--- a/why-four-seed-oil.pptx
+++ b/why-four-seed-oil.pptx
@@ -23,6 +23,7 @@
     <p:sldId id="271" r:id="rId22"/>
     <p:sldId id="272" r:id="rId23"/>
     <p:sldId id="273" r:id="rId24"/>
+    <p:sldId id="274" r:id="rId25"/>
   </p:sldIdLst>
   <p:sldSz cx="12191695" cy="6858000" type="screen4x3"/>
   <p:notesSz cx="6858000" cy="9144000"/>
@@ -3360,7 +3361,7 @@
               </a:defRPr>
             </a:pPr>
             <a:r>
-              <a:t>—— 四种天然籽油的健康奥秘</a:t>
+              <a:t>—— 君臣佐使 · 四种天然籽油的配伍智慧</a:t>
             </a:r>
           </a:p>
         </p:txBody>
@@ -3431,15 +3432,15 @@
           <a:lstStyle/>
           <a:p>
             <a:pPr algn="l">
-              <a:defRPr sz="1600" b="0">
-                <a:solidFill>
-                  <a:srgbClr val="F0FDF4"/>
-                </a:solidFill>
-                <a:latin typeface="Microsoft YaHei"/>
-              </a:defRPr>
-            </a:pPr>
-            <a:r>
-              <a:t>🍇 葡萄籽油</a:t>
+              <a:defRPr sz="1500" b="0">
+                <a:solidFill>
+                  <a:srgbClr val="F0FDF4"/>
+                </a:solidFill>
+                <a:latin typeface="Microsoft YaHei"/>
+              </a:defRPr>
+            </a:pPr>
+            <a:r>
+              <a:t>👑 紫苏籽油（君）</a:t>
             </a:r>
           </a:p>
         </p:txBody>
@@ -3467,15 +3468,15 @@
           <a:lstStyle/>
           <a:p>
             <a:pPr algn="l">
-              <a:defRPr sz="1600" b="0">
-                <a:solidFill>
-                  <a:srgbClr val="F0FDF4"/>
-                </a:solidFill>
-                <a:latin typeface="Microsoft YaHei"/>
-              </a:defRPr>
-            </a:pPr>
-            <a:r>
-              <a:t>🌾 亚麻籽油</a:t>
+              <a:defRPr sz="1500" b="0">
+                <a:solidFill>
+                  <a:srgbClr val="F0FDF4"/>
+                </a:solidFill>
+                <a:latin typeface="Microsoft YaHei"/>
+              </a:defRPr>
+            </a:pPr>
+            <a:r>
+              <a:t>🔷 亚麻籽油（臣）</a:t>
             </a:r>
           </a:p>
         </p:txBody>
@@ -3503,15 +3504,15 @@
           <a:lstStyle/>
           <a:p>
             <a:pPr algn="l">
-              <a:defRPr sz="1600" b="0">
-                <a:solidFill>
-                  <a:srgbClr val="F0FDF4"/>
-                </a:solidFill>
-                <a:latin typeface="Microsoft YaHei"/>
-              </a:defRPr>
-            </a:pPr>
-            <a:r>
-              <a:t>🌿 山茶籽油</a:t>
+              <a:defRPr sz="1500" b="0">
+                <a:solidFill>
+                  <a:srgbClr val="F0FDF4"/>
+                </a:solidFill>
+                <a:latin typeface="Microsoft YaHei"/>
+              </a:defRPr>
+            </a:pPr>
+            <a:r>
+              <a:t>🌿 山茶籽油（佐）</a:t>
             </a:r>
           </a:p>
         </p:txBody>
@@ -3539,15 +3540,15 @@
           <a:lstStyle/>
           <a:p>
             <a:pPr algn="l">
-              <a:defRPr sz="1600" b="0">
-                <a:solidFill>
-                  <a:srgbClr val="F0FDF4"/>
-                </a:solidFill>
-                <a:latin typeface="Microsoft YaHei"/>
-              </a:defRPr>
-            </a:pPr>
-            <a:r>
-              <a:t>🍃 紫苏籽油</a:t>
+              <a:defRPr sz="1500" b="0">
+                <a:solidFill>
+                  <a:srgbClr val="F0FDF4"/>
+                </a:solidFill>
+                <a:latin typeface="Microsoft YaHei"/>
+              </a:defRPr>
+            </a:pPr>
+            <a:r>
+              <a:t>🍇 葡萄籽油（使）</a:t>
             </a:r>
           </a:p>
         </p:txBody>
@@ -3619,7 +3620,7 @@
               </a:defRPr>
             </a:pPr>
             <a:r>
-              <a:t>1/18</a:t>
+              <a:t>1/19</a:t>
             </a:r>
           </a:p>
         </p:txBody>
@@ -4835,7 +4836,7 @@
               </a:defRPr>
             </a:pPr>
             <a:r>
-              <a:t>    然后通过肝脏代谢排出。这就像用干净的水冲洗管道，把污垢带出去。</a:t>
+              <a:t>    然后通过肝脏代谢排出。君药主攻、臣药辅佐、佐药调和、使药引导——四油协同完成"以油去油"。</a:t>
             </a:r>
           </a:p>
         </p:txBody>
@@ -4871,7 +4872,7 @@
               </a:defRPr>
             </a:pPr>
             <a:r>
-              <a:t>10/18</a:t>
+              <a:t>10/19</a:t>
             </a:r>
           </a:p>
         </p:txBody>
@@ -5375,7 +5376,7 @@
               </a:defRPr>
             </a:pPr>
             <a:r>
-              <a:t>⚠️ 国人Omega-6:Omega-3 比例</a:t>
+              <a:t>⚠️ 国人 Omega-6:Omega-3 比例</a:t>
             </a:r>
           </a:p>
           <a:p>
@@ -5504,7 +5505,7 @@
               </a:defRPr>
             </a:pPr>
             <a:r>
-              <a:t>💚 补充优质不饱和脂肪酸</a:t>
+              <a:t>👑 君·紫苏籽油 → 核心降脂</a:t>
             </a:r>
           </a:p>
           <a:p>
@@ -5520,7 +5521,7 @@
               </a:defRPr>
             </a:pPr>
             <a:r>
-              <a:t>  • 丰富Omega-3（α-亚麻酸）</a:t>
+              <a:t>  最高 α-亚麻酸，直击高血脂</a:t>
             </a:r>
           </a:p>
           <a:p>
@@ -5535,9 +5536,6 @@
                 <a:latin typeface="Microsoft YaHei"/>
               </a:defRPr>
             </a:pPr>
-            <a:r>
-              <a:t>  • 平衡Omega-6/Omega-3比例</a:t>
-            </a:r>
           </a:p>
           <a:p>
             <a:pPr algn="l">
@@ -5551,6 +5549,9 @@
                 <a:latin typeface="Microsoft YaHei"/>
               </a:defRPr>
             </a:pPr>
+            <a:r>
+              <a:t>🔷 臣·亚麻籽油 → 双倍 Omega-3</a:t>
+            </a:r>
           </a:p>
           <a:p>
             <a:pPr algn="l">
@@ -5565,7 +5566,7 @@
               </a:defRPr>
             </a:pPr>
             <a:r>
-              <a:t>💚 抗氧化保护</a:t>
+              <a:t>  协同降脂降压降炎症</a:t>
             </a:r>
           </a:p>
           <a:p>
@@ -5580,9 +5581,6 @@
                 <a:latin typeface="Microsoft YaHei"/>
               </a:defRPr>
             </a:pPr>
-            <a:r>
-              <a:t>  • 原花青素清除自由基</a:t>
-            </a:r>
           </a:p>
           <a:p>
             <a:pPr algn="l">
@@ -5597,7 +5595,7 @@
               </a:defRPr>
             </a:pPr>
             <a:r>
-              <a:t>  • 维生素E保护细胞膜</a:t>
+              <a:t>🌿 佐·山茶籽油 → 平衡调和</a:t>
             </a:r>
           </a:p>
           <a:p>
@@ -5612,6 +5610,9 @@
                 <a:latin typeface="Microsoft YaHei"/>
               </a:defRPr>
             </a:pPr>
+            <a:r>
+              <a:t>  兼顾降血糖、抗氧化</a:t>
+            </a:r>
           </a:p>
           <a:p>
             <a:pPr algn="l">
@@ -5625,9 +5626,6 @@
                 <a:latin typeface="Microsoft YaHei"/>
               </a:defRPr>
             </a:pPr>
-            <a:r>
-              <a:t>💚 促进代谢排出</a:t>
-            </a:r>
           </a:p>
           <a:p>
             <a:pPr algn="l">
@@ -5642,7 +5640,7 @@
               </a:defRPr>
             </a:pPr>
             <a:r>
-              <a:t>  • 好油竞争性替换坏油</a:t>
+              <a:t>🍇 使·葡萄籽油 → 引药归经</a:t>
             </a:r>
           </a:p>
           <a:p>
@@ -5658,7 +5656,7 @@
               </a:defRPr>
             </a:pPr>
             <a:r>
-              <a:t>  • 加速肝脏代谢排出</a:t>
+              <a:t>  原花青素清除自由基</a:t>
             </a:r>
           </a:p>
           <a:p>
@@ -5673,53 +5671,8 @@
                 <a:latin typeface="Microsoft YaHei"/>
               </a:defRPr>
             </a:pPr>
-          </a:p>
-          <a:p>
-            <a:pPr algn="l">
-              <a:spcAft>
-                <a:spcPts val="259"/>
-              </a:spcAft>
-              <a:defRPr sz="1300">
-                <a:solidFill>
-                  <a:srgbClr val="F0FDF4"/>
-                </a:solidFill>
-                <a:latin typeface="Microsoft YaHei"/>
-              </a:defRPr>
-            </a:pPr>
-            <a:r>
-              <a:t>💚 综合调理四高</a:t>
-            </a:r>
-          </a:p>
-          <a:p>
-            <a:pPr algn="l">
-              <a:spcAft>
-                <a:spcPts val="259"/>
-              </a:spcAft>
-              <a:defRPr sz="1300">
-                <a:solidFill>
-                  <a:srgbClr val="F0FDF4"/>
-                </a:solidFill>
-                <a:latin typeface="Microsoft YaHei"/>
-              </a:defRPr>
-            </a:pPr>
-            <a:r>
-              <a:t>  • 辅助降血脂、降血压</a:t>
-            </a:r>
-          </a:p>
-          <a:p>
-            <a:pPr algn="l">
-              <a:spcAft>
-                <a:spcPts val="259"/>
-              </a:spcAft>
-              <a:defRPr sz="1300">
-                <a:solidFill>
-                  <a:srgbClr val="F0FDF4"/>
-                </a:solidFill>
-                <a:latin typeface="Microsoft YaHei"/>
-              </a:defRPr>
-            </a:pPr>
-            <a:r>
-              <a:t>  • 辅助降血糖、降尿酸</a:t>
+            <a:r>
+              <a:t>  保护血管、促进吸收</a:t>
             </a:r>
           </a:p>
         </p:txBody>
@@ -5755,7 +5708,7 @@
               </a:defRPr>
             </a:pPr>
             <a:r>
-              <a:t>11/18</a:t>
+              <a:t>11/19</a:t>
             </a:r>
           </a:p>
         </p:txBody>
@@ -6721,7 +6674,7 @@
               </a:defRPr>
             </a:pPr>
             <a:r>
-              <a:t>12/18</a:t>
+              <a:t>12/19</a:t>
             </a:r>
           </a:p>
         </p:txBody>
@@ -6913,7 +6866,7 @@
               </a:defRPr>
             </a:pPr>
             <a:r>
-              <a:t>为什么复方比单方更好？</a:t>
+              <a:t>君臣佐使配伍 &gt; 单打独斗</a:t>
             </a:r>
           </a:p>
         </p:txBody>
@@ -7066,7 +7019,7 @@
               </a:defRPr>
             </a:pPr>
             <a:r>
-              <a:t>四籽油丸</a:t>
+              <a:t>四籽油丸（君臣佐使）</a:t>
             </a:r>
           </a:p>
         </p:txBody>
@@ -7080,7 +7033,7 @@
         <p:spPr>
           <a:xfrm>
             <a:off x="731520" y="2286000"/>
-            <a:ext cx="10515600" cy="502920"/>
+            <a:ext cx="10515600" cy="438912"/>
           </a:xfrm>
           <a:prstGeom prst="roundRect">
             <a:avLst>
@@ -7124,8 +7077,8 @@
         </p:nvSpPr>
         <p:spPr>
           <a:xfrm>
-            <a:off x="914400" y="2331720"/>
-            <a:ext cx="3200400" cy="365760"/>
+            <a:off x="914400" y="2322576"/>
+            <a:ext cx="3200400" cy="320040"/>
           </a:xfrm>
           <a:prstGeom prst="rect">
             <a:avLst/>
@@ -7139,7 +7092,7 @@
           <a:lstStyle/>
           <a:p>
             <a:pPr algn="ctr">
-              <a:defRPr sz="1400" b="1">
+              <a:defRPr sz="1300" b="1">
                 <a:solidFill>
                   <a:srgbClr val="FFFFFF"/>
                 </a:solidFill>
@@ -7147,7 +7100,7 @@
               </a:defRPr>
             </a:pPr>
             <a:r>
-              <a:t>Omega-3 来源</a:t>
+              <a:t>配伍理论</a:t>
             </a:r>
           </a:p>
         </p:txBody>
@@ -7160,8 +7113,8 @@
         </p:nvSpPr>
         <p:spPr>
           <a:xfrm>
-            <a:off x="4206240" y="2331720"/>
-            <a:ext cx="3200400" cy="365760"/>
+            <a:off x="4206240" y="2322576"/>
+            <a:ext cx="3200400" cy="320040"/>
           </a:xfrm>
           <a:prstGeom prst="rect">
             <a:avLst/>
@@ -7175,7 +7128,7 @@
           <a:lstStyle/>
           <a:p>
             <a:pPr algn="ctr">
-              <a:defRPr sz="1400" b="0">
+              <a:defRPr sz="1300" b="0">
                 <a:solidFill>
                   <a:srgbClr val="6B7280"/>
                 </a:solidFill>
@@ -7183,7 +7136,7 @@
               </a:defRPr>
             </a:pPr>
             <a:r>
-              <a:t>单一来源</a:t>
+              <a:t>无</a:t>
             </a:r>
           </a:p>
         </p:txBody>
@@ -7196,8 +7149,8 @@
         </p:nvSpPr>
         <p:spPr>
           <a:xfrm>
-            <a:off x="7498079" y="2331720"/>
-            <a:ext cx="3474720" cy="365760"/>
+            <a:off x="7498079" y="2322576"/>
+            <a:ext cx="3474720" cy="320040"/>
           </a:xfrm>
           <a:prstGeom prst="rect">
             <a:avLst/>
@@ -7211,7 +7164,7 @@
           <a:lstStyle/>
           <a:p>
             <a:pPr algn="ctr">
-              <a:defRPr sz="1400" b="1">
+              <a:defRPr sz="1300" b="1">
                 <a:solidFill>
                   <a:srgbClr val="F59E0B"/>
                 </a:solidFill>
@@ -7219,7 +7172,7 @@
               </a:defRPr>
             </a:pPr>
             <a:r>
-              <a:t>双来源（紫苏+亚麻）</a:t>
+              <a:t>君臣佐使，四油各司其职</a:t>
             </a:r>
           </a:p>
         </p:txBody>
@@ -7232,8 +7185,8 @@
         </p:nvSpPr>
         <p:spPr>
           <a:xfrm>
-            <a:off x="731520" y="2852928"/>
-            <a:ext cx="10515600" cy="502920"/>
+            <a:off x="731520" y="2788920"/>
+            <a:ext cx="10515600" cy="438912"/>
           </a:xfrm>
           <a:prstGeom prst="roundRect">
             <a:avLst>
@@ -7277,8 +7230,8 @@
         </p:nvSpPr>
         <p:spPr>
           <a:xfrm>
-            <a:off x="914400" y="2898648"/>
-            <a:ext cx="3200400" cy="365760"/>
+            <a:off x="914400" y="2825496"/>
+            <a:ext cx="3200400" cy="320040"/>
           </a:xfrm>
           <a:prstGeom prst="rect">
             <a:avLst/>
@@ -7292,7 +7245,7 @@
           <a:lstStyle/>
           <a:p>
             <a:pPr algn="ctr">
-              <a:defRPr sz="1400" b="1">
+              <a:defRPr sz="1300" b="1">
                 <a:solidFill>
                   <a:srgbClr val="FFFFFF"/>
                 </a:solidFill>
@@ -7300,7 +7253,7 @@
               </a:defRPr>
             </a:pPr>
             <a:r>
-              <a:t>抗氧化成分</a:t>
+              <a:t>Omega-3 来源</a:t>
             </a:r>
           </a:p>
         </p:txBody>
@@ -7313,8 +7266,8 @@
         </p:nvSpPr>
         <p:spPr>
           <a:xfrm>
-            <a:off x="4206240" y="2898648"/>
-            <a:ext cx="3200400" cy="365760"/>
+            <a:off x="4206240" y="2825496"/>
+            <a:ext cx="3200400" cy="320040"/>
           </a:xfrm>
           <a:prstGeom prst="rect">
             <a:avLst/>
@@ -7328,7 +7281,7 @@
           <a:lstStyle/>
           <a:p>
             <a:pPr algn="ctr">
-              <a:defRPr sz="1400" b="0">
+              <a:defRPr sz="1300" b="0">
                 <a:solidFill>
                   <a:srgbClr val="6B7280"/>
                 </a:solidFill>
@@ -7336,7 +7289,7 @@
               </a:defRPr>
             </a:pPr>
             <a:r>
-              <a:t>有限</a:t>
+              <a:t>单一来源</a:t>
             </a:r>
           </a:p>
         </p:txBody>
@@ -7349,8 +7302,8 @@
         </p:nvSpPr>
         <p:spPr>
           <a:xfrm>
-            <a:off x="7498079" y="2898648"/>
-            <a:ext cx="3474720" cy="365760"/>
+            <a:off x="7498079" y="2825496"/>
+            <a:ext cx="3474720" cy="320040"/>
           </a:xfrm>
           <a:prstGeom prst="rect">
             <a:avLst/>
@@ -7364,7 +7317,7 @@
           <a:lstStyle/>
           <a:p>
             <a:pPr algn="ctr">
-              <a:defRPr sz="1400" b="1">
+              <a:defRPr sz="1300" b="1">
                 <a:solidFill>
                   <a:srgbClr val="F59E0B"/>
                 </a:solidFill>
@@ -7372,7 +7325,7 @@
               </a:defRPr>
             </a:pPr>
             <a:r>
-              <a:t>原花青素+维生素E+多酚</a:t>
+              <a:t>君+臣双来源（紫苏+亚麻）</a:t>
             </a:r>
           </a:p>
         </p:txBody>
@@ -7385,8 +7338,8 @@
         </p:nvSpPr>
         <p:spPr>
           <a:xfrm>
-            <a:off x="731520" y="3419856"/>
-            <a:ext cx="10515600" cy="502920"/>
+            <a:off x="731520" y="3291840"/>
+            <a:ext cx="10515600" cy="438912"/>
           </a:xfrm>
           <a:prstGeom prst="roundRect">
             <a:avLst>
@@ -7430,8 +7383,8 @@
         </p:nvSpPr>
         <p:spPr>
           <a:xfrm>
-            <a:off x="914400" y="3465576"/>
-            <a:ext cx="3200400" cy="365760"/>
+            <a:off x="914400" y="3328416"/>
+            <a:ext cx="3200400" cy="320040"/>
           </a:xfrm>
           <a:prstGeom prst="rect">
             <a:avLst/>
@@ -7445,7 +7398,7 @@
           <a:lstStyle/>
           <a:p>
             <a:pPr algn="ctr">
-              <a:defRPr sz="1400" b="1">
+              <a:defRPr sz="1300" b="1">
                 <a:solidFill>
                   <a:srgbClr val="FFFFFF"/>
                 </a:solidFill>
@@ -7453,7 +7406,7 @@
               </a:defRPr>
             </a:pPr>
             <a:r>
-              <a:t>脂肪酸谱</a:t>
+              <a:t>抗氧化成分</a:t>
             </a:r>
           </a:p>
         </p:txBody>
@@ -7466,8 +7419,8 @@
         </p:nvSpPr>
         <p:spPr>
           <a:xfrm>
-            <a:off x="4206240" y="3465576"/>
-            <a:ext cx="3200400" cy="365760"/>
+            <a:off x="4206240" y="3328416"/>
+            <a:ext cx="3200400" cy="320040"/>
           </a:xfrm>
           <a:prstGeom prst="rect">
             <a:avLst/>
@@ -7481,7 +7434,7 @@
           <a:lstStyle/>
           <a:p>
             <a:pPr algn="ctr">
-              <a:defRPr sz="1400" b="0">
+              <a:defRPr sz="1300" b="0">
                 <a:solidFill>
                   <a:srgbClr val="6B7280"/>
                 </a:solidFill>
@@ -7489,7 +7442,7 @@
               </a:defRPr>
             </a:pPr>
             <a:r>
-              <a:t>不完整</a:t>
+              <a:t>有限</a:t>
             </a:r>
           </a:p>
         </p:txBody>
@@ -7502,8 +7455,8 @@
         </p:nvSpPr>
         <p:spPr>
           <a:xfrm>
-            <a:off x="7498079" y="3465576"/>
-            <a:ext cx="3474720" cy="365760"/>
+            <a:off x="7498079" y="3328416"/>
+            <a:ext cx="3474720" cy="320040"/>
           </a:xfrm>
           <a:prstGeom prst="rect">
             <a:avLst/>
@@ -7517,7 +7470,7 @@
           <a:lstStyle/>
           <a:p>
             <a:pPr algn="ctr">
-              <a:defRPr sz="1400" b="1">
+              <a:defRPr sz="1300" b="1">
                 <a:solidFill>
                   <a:srgbClr val="F59E0B"/>
                 </a:solidFill>
@@ -7525,7 +7478,7 @@
               </a:defRPr>
             </a:pPr>
             <a:r>
-              <a:t>Omega-3/6/9 全谱覆盖</a:t>
+              <a:t>使药原花青素+佐药多酚+VE</a:t>
             </a:r>
           </a:p>
         </p:txBody>
@@ -7538,8 +7491,8 @@
         </p:nvSpPr>
         <p:spPr>
           <a:xfrm>
-            <a:off x="731520" y="3986783"/>
-            <a:ext cx="10515600" cy="502920"/>
+            <a:off x="731520" y="3794760"/>
+            <a:ext cx="10515600" cy="438912"/>
           </a:xfrm>
           <a:prstGeom prst="roundRect">
             <a:avLst>
@@ -7583,8 +7536,8 @@
         </p:nvSpPr>
         <p:spPr>
           <a:xfrm>
-            <a:off x="914400" y="4032503"/>
-            <a:ext cx="3200400" cy="365760"/>
+            <a:off x="914400" y="3831336"/>
+            <a:ext cx="3200400" cy="320040"/>
           </a:xfrm>
           <a:prstGeom prst="rect">
             <a:avLst/>
@@ -7598,7 +7551,7 @@
           <a:lstStyle/>
           <a:p>
             <a:pPr algn="ctr">
-              <a:defRPr sz="1400" b="1">
+              <a:defRPr sz="1300" b="1">
                 <a:solidFill>
                   <a:srgbClr val="FFFFFF"/>
                 </a:solidFill>
@@ -7606,7 +7559,7 @@
               </a:defRPr>
             </a:pPr>
             <a:r>
-              <a:t>协同效应</a:t>
+              <a:t>脂肪酸谱</a:t>
             </a:r>
           </a:p>
         </p:txBody>
@@ -7619,8 +7572,8 @@
         </p:nvSpPr>
         <p:spPr>
           <a:xfrm>
-            <a:off x="4206240" y="4032503"/>
-            <a:ext cx="3200400" cy="365760"/>
+            <a:off x="4206240" y="3831336"/>
+            <a:ext cx="3200400" cy="320040"/>
           </a:xfrm>
           <a:prstGeom prst="rect">
             <a:avLst/>
@@ -7634,7 +7587,7 @@
           <a:lstStyle/>
           <a:p>
             <a:pPr algn="ctr">
-              <a:defRPr sz="1400" b="0">
+              <a:defRPr sz="1300" b="0">
                 <a:solidFill>
                   <a:srgbClr val="6B7280"/>
                 </a:solidFill>
@@ -7642,7 +7595,7 @@
               </a:defRPr>
             </a:pPr>
             <a:r>
-              <a:t>无</a:t>
+              <a:t>不完整</a:t>
             </a:r>
           </a:p>
         </p:txBody>
@@ -7655,8 +7608,8 @@
         </p:nvSpPr>
         <p:spPr>
           <a:xfrm>
-            <a:off x="7498079" y="4032503"/>
-            <a:ext cx="3474720" cy="365760"/>
+            <a:off x="7498079" y="3831336"/>
+            <a:ext cx="3474720" cy="320040"/>
           </a:xfrm>
           <a:prstGeom prst="rect">
             <a:avLst/>
@@ -7670,7 +7623,7 @@
           <a:lstStyle/>
           <a:p>
             <a:pPr algn="ctr">
-              <a:defRPr sz="1400" b="1">
+              <a:defRPr sz="1300" b="1">
                 <a:solidFill>
                   <a:srgbClr val="F59E0B"/>
                 </a:solidFill>
@@ -7678,7 +7631,7 @@
               </a:defRPr>
             </a:pPr>
             <a:r>
-              <a:t>四油互补，1+1&gt;2</a:t>
+              <a:t>君/臣/佐/使全谱 Omega-3/6/9</a:t>
             </a:r>
           </a:p>
         </p:txBody>
@@ -7691,8 +7644,8 @@
         </p:nvSpPr>
         <p:spPr>
           <a:xfrm>
-            <a:off x="731520" y="4553712"/>
-            <a:ext cx="10515600" cy="502920"/>
+            <a:off x="731520" y="4297680"/>
+            <a:ext cx="10515600" cy="438912"/>
           </a:xfrm>
           <a:prstGeom prst="roundRect">
             <a:avLst>
@@ -7736,8 +7689,8 @@
         </p:nvSpPr>
         <p:spPr>
           <a:xfrm>
-            <a:off x="914400" y="4599432"/>
-            <a:ext cx="3200400" cy="365760"/>
+            <a:off x="914400" y="4334256"/>
+            <a:ext cx="3200400" cy="320040"/>
           </a:xfrm>
           <a:prstGeom prst="rect">
             <a:avLst/>
@@ -7751,7 +7704,7 @@
           <a:lstStyle/>
           <a:p>
             <a:pPr algn="ctr">
-              <a:defRPr sz="1400" b="1">
+              <a:defRPr sz="1300" b="1">
                 <a:solidFill>
                   <a:srgbClr val="FFFFFF"/>
                 </a:solidFill>
@@ -7759,7 +7712,7 @@
               </a:defRPr>
             </a:pPr>
             <a:r>
-              <a:t>适用场景</a:t>
+              <a:t>协同效应</a:t>
             </a:r>
           </a:p>
         </p:txBody>
@@ -7772,8 +7725,8 @@
         </p:nvSpPr>
         <p:spPr>
           <a:xfrm>
-            <a:off x="4206240" y="4599432"/>
-            <a:ext cx="3200400" cy="365760"/>
+            <a:off x="4206240" y="4334256"/>
+            <a:ext cx="3200400" cy="320040"/>
           </a:xfrm>
           <a:prstGeom prst="rect">
             <a:avLst/>
@@ -7787,7 +7740,7 @@
           <a:lstStyle/>
           <a:p>
             <a:pPr algn="ctr">
-              <a:defRPr sz="1400" b="0">
+              <a:defRPr sz="1300" b="0">
                 <a:solidFill>
                   <a:srgbClr val="6B7280"/>
                 </a:solidFill>
@@ -7795,7 +7748,7 @@
               </a:defRPr>
             </a:pPr>
             <a:r>
-              <a:t>单一功效</a:t>
+              <a:t>无</a:t>
             </a:r>
           </a:p>
         </p:txBody>
@@ -7808,8 +7761,8 @@
         </p:nvSpPr>
         <p:spPr>
           <a:xfrm>
-            <a:off x="7498079" y="4599432"/>
-            <a:ext cx="3474720" cy="365760"/>
+            <a:off x="7498079" y="4334256"/>
+            <a:ext cx="3474720" cy="320040"/>
           </a:xfrm>
           <a:prstGeom prst="rect">
             <a:avLst/>
@@ -7823,7 +7776,7 @@
           <a:lstStyle/>
           <a:p>
             <a:pPr algn="ctr">
-              <a:defRPr sz="1400" b="1">
+              <a:defRPr sz="1300" b="1">
                 <a:solidFill>
                   <a:srgbClr val="F59E0B"/>
                 </a:solidFill>
@@ -7831,7 +7784,7 @@
               </a:defRPr>
             </a:pPr>
             <a:r>
-              <a:t>综合调理四高</a:t>
+              <a:t>四油互补，1+1+1+1 &gt; 4</a:t>
             </a:r>
           </a:p>
         </p:txBody>
@@ -7844,8 +7797,8 @@
         </p:nvSpPr>
         <p:spPr>
           <a:xfrm>
-            <a:off x="731520" y="5120640"/>
-            <a:ext cx="10515600" cy="502920"/>
+            <a:off x="731520" y="4800600"/>
+            <a:ext cx="10515600" cy="438912"/>
           </a:xfrm>
           <a:prstGeom prst="roundRect">
             <a:avLst>
@@ -7889,8 +7842,8 @@
         </p:nvSpPr>
         <p:spPr>
           <a:xfrm>
-            <a:off x="914400" y="5166359"/>
-            <a:ext cx="3200400" cy="365760"/>
+            <a:off x="914400" y="4837176"/>
+            <a:ext cx="3200400" cy="320040"/>
           </a:xfrm>
           <a:prstGeom prst="rect">
             <a:avLst/>
@@ -7904,7 +7857,7 @@
           <a:lstStyle/>
           <a:p>
             <a:pPr algn="ctr">
-              <a:defRPr sz="1400" b="1">
+              <a:defRPr sz="1300" b="1">
                 <a:solidFill>
                   <a:srgbClr val="FFFFFF"/>
                 </a:solidFill>
@@ -7912,6 +7865,159 @@
               </a:defRPr>
             </a:pPr>
             <a:r>
+              <a:t>适用场景</a:t>
+            </a:r>
+          </a:p>
+        </p:txBody>
+      </p:sp>
+      <p:sp>
+        <p:nvSpPr>
+          <p:cNvPr id="32" name="TextBox 31"/>
+          <p:cNvSpPr txBox="1"/>
+          <p:nvPr/>
+        </p:nvSpPr>
+        <p:spPr>
+          <a:xfrm>
+            <a:off x="4206240" y="4837176"/>
+            <a:ext cx="3200400" cy="320040"/>
+          </a:xfrm>
+          <a:prstGeom prst="rect">
+            <a:avLst/>
+          </a:prstGeom>
+          <a:noFill/>
+        </p:spPr>
+        <p:txBody>
+          <a:bodyPr wrap="square">
+            <a:spAutoFit/>
+          </a:bodyPr>
+          <a:lstStyle/>
+          <a:p>
+            <a:pPr algn="ctr">
+              <a:defRPr sz="1300" b="0">
+                <a:solidFill>
+                  <a:srgbClr val="6B7280"/>
+                </a:solidFill>
+                <a:latin typeface="Microsoft YaHei"/>
+              </a:defRPr>
+            </a:pPr>
+            <a:r>
+              <a:t>单一功效</a:t>
+            </a:r>
+          </a:p>
+        </p:txBody>
+      </p:sp>
+      <p:sp>
+        <p:nvSpPr>
+          <p:cNvPr id="33" name="TextBox 32"/>
+          <p:cNvSpPr txBox="1"/>
+          <p:nvPr/>
+        </p:nvSpPr>
+        <p:spPr>
+          <a:xfrm>
+            <a:off x="7498079" y="4837176"/>
+            <a:ext cx="3474720" cy="320040"/>
+          </a:xfrm>
+          <a:prstGeom prst="rect">
+            <a:avLst/>
+          </a:prstGeom>
+          <a:noFill/>
+        </p:spPr>
+        <p:txBody>
+          <a:bodyPr wrap="square">
+            <a:spAutoFit/>
+          </a:bodyPr>
+          <a:lstStyle/>
+          <a:p>
+            <a:pPr algn="ctr">
+              <a:defRPr sz="1300" b="1">
+                <a:solidFill>
+                  <a:srgbClr val="F59E0B"/>
+                </a:solidFill>
+                <a:latin typeface="Microsoft YaHei"/>
+              </a:defRPr>
+            </a:pPr>
+            <a:r>
+              <a:t>综合调理四高，全面兼顾</a:t>
+            </a:r>
+          </a:p>
+        </p:txBody>
+      </p:sp>
+      <p:sp>
+        <p:nvSpPr>
+          <p:cNvPr id="34" name="Rounded Rectangle 33"/>
+          <p:cNvSpPr/>
+          <p:nvPr/>
+        </p:nvSpPr>
+        <p:spPr>
+          <a:xfrm>
+            <a:off x="731520" y="5303520"/>
+            <a:ext cx="10515600" cy="438912"/>
+          </a:xfrm>
+          <a:prstGeom prst="roundRect">
+            <a:avLst>
+              <a:gd name="adj" fmla="val 5000"/>
+            </a:avLst>
+          </a:prstGeom>
+          <a:solidFill>
+            <a:srgbClr val="224D38"/>
+          </a:solidFill>
+          <a:ln>
+            <a:noFill/>
+          </a:ln>
+        </p:spPr>
+        <p:style>
+          <a:lnRef idx="1">
+            <a:schemeClr val="accent1"/>
+          </a:lnRef>
+          <a:fillRef idx="3">
+            <a:schemeClr val="accent1"/>
+          </a:fillRef>
+          <a:effectRef idx="2">
+            <a:schemeClr val="accent1"/>
+          </a:effectRef>
+          <a:fontRef idx="minor">
+            <a:schemeClr val="lt1"/>
+          </a:fontRef>
+        </p:style>
+        <p:txBody>
+          <a:bodyPr rtlCol="0" anchor="ctr"/>
+          <a:lstStyle/>
+          <a:p>
+            <a:pPr algn="ctr"/>
+          </a:p>
+        </p:txBody>
+      </p:sp>
+      <p:sp>
+        <p:nvSpPr>
+          <p:cNvPr id="35" name="TextBox 34"/>
+          <p:cNvSpPr txBox="1"/>
+          <p:nvPr/>
+        </p:nvSpPr>
+        <p:spPr>
+          <a:xfrm>
+            <a:off x="914400" y="5340096"/>
+            <a:ext cx="3200400" cy="320040"/>
+          </a:xfrm>
+          <a:prstGeom prst="rect">
+            <a:avLst/>
+          </a:prstGeom>
+          <a:noFill/>
+        </p:spPr>
+        <p:txBody>
+          <a:bodyPr wrap="square">
+            <a:spAutoFit/>
+          </a:bodyPr>
+          <a:lstStyle/>
+          <a:p>
+            <a:pPr algn="ctr">
+              <a:defRPr sz="1300" b="1">
+                <a:solidFill>
+                  <a:srgbClr val="FFFFFF"/>
+                </a:solidFill>
+                <a:latin typeface="Microsoft YaHei"/>
+              </a:defRPr>
+            </a:pPr>
+            <a:r>
               <a:t>吸收效率</a:t>
             </a:r>
           </a:p>
@@ -7919,14 +8025,14 @@
       </p:sp>
       <p:sp>
         <p:nvSpPr>
-          <p:cNvPr id="32" name="TextBox 31"/>
-          <p:cNvSpPr txBox="1"/>
-          <p:nvPr/>
-        </p:nvSpPr>
-        <p:spPr>
-          <a:xfrm>
-            <a:off x="4206240" y="5166359"/>
-            <a:ext cx="3200400" cy="365760"/>
+          <p:cNvPr id="36" name="TextBox 35"/>
+          <p:cNvSpPr txBox="1"/>
+          <p:nvPr/>
+        </p:nvSpPr>
+        <p:spPr>
+          <a:xfrm>
+            <a:off x="4206240" y="5340096"/>
+            <a:ext cx="3200400" cy="320040"/>
           </a:xfrm>
           <a:prstGeom prst="rect">
             <a:avLst/>
@@ -7940,7 +8046,7 @@
           <a:lstStyle/>
           <a:p>
             <a:pPr algn="ctr">
-              <a:defRPr sz="1400" b="0">
+              <a:defRPr sz="1300" b="0">
                 <a:solidFill>
                   <a:srgbClr val="6B7280"/>
                 </a:solidFill>
@@ -7955,14 +8061,14 @@
       </p:sp>
       <p:sp>
         <p:nvSpPr>
-          <p:cNvPr id="33" name="TextBox 32"/>
-          <p:cNvSpPr txBox="1"/>
-          <p:nvPr/>
-        </p:nvSpPr>
-        <p:spPr>
-          <a:xfrm>
-            <a:off x="7498079" y="5166359"/>
-            <a:ext cx="3474720" cy="365760"/>
+          <p:cNvPr id="37" name="TextBox 36"/>
+          <p:cNvSpPr txBox="1"/>
+          <p:nvPr/>
+        </p:nvSpPr>
+        <p:spPr>
+          <a:xfrm>
+            <a:off x="7498079" y="5340096"/>
+            <a:ext cx="3474720" cy="320040"/>
           </a:xfrm>
           <a:prstGeom prst="rect">
             <a:avLst/>
@@ -7976,7 +8082,7 @@
           <a:lstStyle/>
           <a:p>
             <a:pPr algn="ctr">
-              <a:defRPr sz="1400" b="1">
+              <a:defRPr sz="1300" b="1">
                 <a:solidFill>
                   <a:srgbClr val="F59E0B"/>
                 </a:solidFill>
@@ -7984,14 +8090,14 @@
               </a:defRPr>
             </a:pPr>
             <a:r>
-              <a:t>小分子纳米工艺，更好吸收</a:t>
-            </a:r>
-          </a:p>
-        </p:txBody>
-      </p:sp>
-      <p:sp>
-        <p:nvSpPr>
-          <p:cNvPr id="34" name="TextBox 33"/>
+              <a:t>使药引导 + 小分子纳米工艺</a:t>
+            </a:r>
+          </a:p>
+        </p:txBody>
+      </p:sp>
+      <p:sp>
+        <p:nvSpPr>
+          <p:cNvPr id="38" name="TextBox 37"/>
           <p:cNvSpPr txBox="1"/>
           <p:nvPr/>
         </p:nvSpPr>
@@ -8020,7 +8126,7 @@
               </a:defRPr>
             </a:pPr>
             <a:r>
-              <a:t>13/18</a:t>
+              <a:t>13/19</a:t>
             </a:r>
           </a:p>
         </p:txBody>
@@ -8329,7 +8435,7 @@
               </a:defRPr>
             </a:pPr>
             <a:r>
-              <a:t>紫苏籽被列入国家卫健委发布的106种药食同源物质名单，是唯一上榜的油用种子。</a:t>
+              <a:t>紫苏籽（君药）被列入国家卫健委发布的106种药食同源物质名单，是唯一上榜的油用种子。</a:t>
             </a:r>
           </a:p>
         </p:txBody>
@@ -8482,7 +8588,7 @@
               </a:defRPr>
             </a:pPr>
             <a:r>
-              <a:t>明确指出亚麻籽油在降低炎症、改善血压、提升胰岛素敏感度方面呈现积极作用。</a:t>
+              <a:t>明确指出亚麻籽油（臣药）在降低炎症、改善血压、提升胰岛素敏感度方面呈现积极作用。</a:t>
             </a:r>
           </a:p>
         </p:txBody>
@@ -8635,7 +8741,7 @@
               </a:defRPr>
             </a:pPr>
             <a:r>
-              <a:t>专家研究指出：山茶油有利于降血压、降血脂、控制血糖，具有抗氧化能力。</a:t>
+              <a:t>专家研究指出：山茶油（佐药）有利于降血压、降血脂、控制血糖，具有抗氧化能力。</a:t>
             </a:r>
           </a:p>
         </p:txBody>
@@ -8788,7 +8894,7 @@
               </a:defRPr>
             </a:pPr>
             <a:r>
-              <a:t>每日补充10g紫苏籽油，可使血脂异常人群的甘油三酯下降约8%。</a:t>
+              <a:t>每日补充10g紫苏籽油（君药），可使血脂异常人群的甘油三酯下降约8%。</a:t>
             </a:r>
           </a:p>
         </p:txBody>
@@ -8941,7 +9047,7 @@
               </a:defRPr>
             </a:pPr>
             <a:r>
-              <a:t>"空腹食之为食物，患者食之为药物"——药食同源的古老智慧。</a:t>
+              <a:t>"主病之谓君，佐君之谓臣，应臣之谓使"——君臣佐使配伍理论的源头。</a:t>
             </a:r>
           </a:p>
         </p:txBody>
@@ -8977,7 +9083,7 @@
               </a:defRPr>
             </a:pPr>
             <a:r>
-              <a:t>14/18</a:t>
+              <a:t>14/19</a:t>
             </a:r>
           </a:p>
         </p:txBody>
@@ -9339,7 +9445,7 @@
               </a:defRPr>
             </a:pPr>
             <a:r>
-              <a:t>  • 一般每日2-4粒</a:t>
+              <a:t>  • 一般每日 2-4 粒</a:t>
             </a:r>
           </a:p>
           <a:p>
@@ -9825,7 +9931,7 @@
               </a:defRPr>
             </a:pPr>
             <a:r>
-              <a:t>15/18</a:t>
+              <a:t>15/19</a:t>
             </a:r>
           </a:p>
         </p:txBody>
@@ -10728,7 +10834,7 @@
               </a:defRPr>
             </a:pPr>
             <a:r>
-              <a:t>16/18</a:t>
+              <a:t>16/19</a:t>
             </a:r>
           </a:p>
         </p:txBody>
@@ -11082,7 +11188,7 @@
               </a:defRPr>
             </a:pPr>
             <a:r>
-              <a:t>Q: 需要吃多久才有效？</a:t>
+              <a:t>Q: 君臣佐使是什么意思？</a:t>
             </a:r>
           </a:p>
         </p:txBody>
@@ -11118,7 +11224,7 @@
               </a:defRPr>
             </a:pPr>
             <a:r>
-              <a:t>A: 因人而异。一般建议连续服用3个月为一个周期，部分人1-2个月即可感受到变化。</a:t>
+              <a:t>A: 源自《黄帝内经》的中医配伍理论。君（紫苏籽油）主攻、臣（亚麻籽油）辅佐、佐（山茶籽油）调和、使（葡萄籽油）引导，四油各司其职。</a:t>
             </a:r>
           </a:p>
         </p:txBody>
@@ -11199,7 +11305,7 @@
               </a:defRPr>
             </a:pPr>
             <a:r>
-              <a:t>Q: 可以和其他药物一起吃吗？</a:t>
+              <a:t>Q: 需要吃多久才有效？</a:t>
             </a:r>
           </a:p>
         </p:txBody>
@@ -11235,7 +11341,7 @@
               </a:defRPr>
             </a:pPr>
             <a:r>
-              <a:t>A: 建议与药物间隔1-2小时服用。如正在服用处方药，请先咨询医生。</a:t>
+              <a:t>A: 因人而异。一般建议连续服用3个月为一个周期，部分人1-2个月即可感受到变化。</a:t>
             </a:r>
           </a:p>
         </p:txBody>
@@ -11316,7 +11422,7 @@
               </a:defRPr>
             </a:pPr>
             <a:r>
-              <a:t>Q: 有没有副作用？</a:t>
+              <a:t>Q: 可以和其他药物一起吃吗？</a:t>
             </a:r>
           </a:p>
         </p:txBody>
@@ -11352,7 +11458,7 @@
               </a:defRPr>
             </a:pPr>
             <a:r>
-              <a:t>A: 四种籽油均为天然食品级原料，按建议剂量服用一般无副作用。个别人可能出现轻微肠胃不适。</a:t>
+              <a:t>A: 建议与药物间隔1-2小时服用。如正在服用处方药，请先咨询医生。</a:t>
             </a:r>
           </a:p>
         </p:txBody>
@@ -11469,7 +11575,7 @@
               </a:defRPr>
             </a:pPr>
             <a:r>
-              <a:t>A: 四种油科学配比，实现营养协同增效，比单一籽油功效更全面、吸收更均衡。</a:t>
+              <a:t>A: 单一籽油好比单打独斗，四籽油丸按君臣佐使配伍，功效更全面、吸收更均衡。</a:t>
             </a:r>
           </a:p>
         </p:txBody>
@@ -11505,7 +11611,7 @@
               </a:defRPr>
             </a:pPr>
             <a:r>
-              <a:t>17/18</a:t>
+              <a:t>17/19</a:t>
             </a:r>
           </a:p>
         </p:txBody>
@@ -11556,6 +11662,618 @@
                 <a:srgbClr val="1B3A2A"/>
               </a:gs>
               <a:gs pos="100000">
+                <a:srgbClr val="1B3A2A"/>
+              </a:gs>
+            </a:gsLst>
+            <a:lin scaled="0" ang="13500000"/>
+          </a:gradFill>
+          <a:ln>
+            <a:noFill/>
+          </a:ln>
+        </p:spPr>
+        <p:style>
+          <a:lnRef idx="1">
+            <a:schemeClr val="accent1"/>
+          </a:lnRef>
+          <a:fillRef idx="3">
+            <a:schemeClr val="accent1"/>
+          </a:fillRef>
+          <a:effectRef idx="2">
+            <a:schemeClr val="accent1"/>
+          </a:effectRef>
+          <a:fontRef idx="minor">
+            <a:schemeClr val="lt1"/>
+          </a:fontRef>
+        </p:style>
+        <p:txBody>
+          <a:bodyPr rtlCol="0" anchor="ctr"/>
+          <a:lstStyle/>
+          <a:p>
+            <a:pPr algn="ctr"/>
+          </a:p>
+        </p:txBody>
+      </p:sp>
+      <p:sp>
+        <p:nvSpPr>
+          <p:cNvPr id="3" name="Rectangle 2"/>
+          <p:cNvSpPr/>
+          <p:nvPr/>
+        </p:nvSpPr>
+        <p:spPr>
+          <a:xfrm>
+            <a:off x="0" y="0"/>
+            <a:ext cx="12191695" cy="54864"/>
+          </a:xfrm>
+          <a:prstGeom prst="rect">
+            <a:avLst/>
+          </a:prstGeom>
+          <a:solidFill>
+            <a:srgbClr val="F59E0B"/>
+          </a:solidFill>
+          <a:ln>
+            <a:noFill/>
+          </a:ln>
+        </p:spPr>
+        <p:style>
+          <a:lnRef idx="1">
+            <a:schemeClr val="accent1"/>
+          </a:lnRef>
+          <a:fillRef idx="3">
+            <a:schemeClr val="accent1"/>
+          </a:fillRef>
+          <a:effectRef idx="2">
+            <a:schemeClr val="accent1"/>
+          </a:effectRef>
+          <a:fontRef idx="minor">
+            <a:schemeClr val="lt1"/>
+          </a:fontRef>
+        </p:style>
+        <p:txBody>
+          <a:bodyPr rtlCol="0" anchor="ctr"/>
+          <a:lstStyle/>
+          <a:p>
+            <a:pPr algn="ctr"/>
+          </a:p>
+        </p:txBody>
+      </p:sp>
+      <p:sp>
+        <p:nvSpPr>
+          <p:cNvPr id="4" name="TextBox 3"/>
+          <p:cNvSpPr txBox="1"/>
+          <p:nvPr/>
+        </p:nvSpPr>
+        <p:spPr>
+          <a:xfrm>
+            <a:off x="731520" y="274320"/>
+            <a:ext cx="10515600" cy="731520"/>
+          </a:xfrm>
+          <a:prstGeom prst="rect">
+            <a:avLst/>
+          </a:prstGeom>
+          <a:noFill/>
+        </p:spPr>
+        <p:txBody>
+          <a:bodyPr wrap="square">
+            <a:spAutoFit/>
+          </a:bodyPr>
+          <a:lstStyle/>
+          <a:p>
+            <a:pPr algn="l">
+              <a:defRPr sz="3000" b="1">
+                <a:solidFill>
+                  <a:srgbClr val="FFFFFF"/>
+                </a:solidFill>
+                <a:latin typeface="Microsoft YaHei"/>
+              </a:defRPr>
+            </a:pPr>
+            <a:r>
+              <a:t>👑 四籽油丸 · 君臣佐使配伍总览</a:t>
+            </a:r>
+          </a:p>
+        </p:txBody>
+      </p:sp>
+      <p:sp>
+        <p:nvSpPr>
+          <p:cNvPr id="5" name="TextBox 4"/>
+          <p:cNvSpPr txBox="1"/>
+          <p:nvPr/>
+        </p:nvSpPr>
+        <p:spPr>
+          <a:xfrm>
+            <a:off x="731520" y="914400"/>
+            <a:ext cx="10515600" cy="457200"/>
+          </a:xfrm>
+          <a:prstGeom prst="rect">
+            <a:avLst/>
+          </a:prstGeom>
+          <a:noFill/>
+        </p:spPr>
+        <p:txBody>
+          <a:bodyPr wrap="square">
+            <a:spAutoFit/>
+          </a:bodyPr>
+          <a:lstStyle/>
+          <a:p>
+            <a:pPr algn="l">
+              <a:defRPr sz="1600" b="0">
+                <a:solidFill>
+                  <a:srgbClr val="6B7280"/>
+                </a:solidFill>
+                <a:latin typeface="Microsoft YaHei"/>
+              </a:defRPr>
+            </a:pPr>
+            <a:r>
+              <a:t>一图看懂四种籽油的角色与分工</a:t>
+            </a:r>
+          </a:p>
+        </p:txBody>
+      </p:sp>
+      <p:sp>
+        <p:nvSpPr>
+          <p:cNvPr id="6" name="Oval 5"/>
+          <p:cNvSpPr/>
+          <p:nvPr/>
+        </p:nvSpPr>
+        <p:spPr>
+          <a:xfrm>
+            <a:off x="4572000" y="2743200"/>
+            <a:ext cx="3017520" cy="3017520"/>
+          </a:xfrm>
+          <a:prstGeom prst="ellipse">
+            <a:avLst/>
+          </a:prstGeom>
+          <a:solidFill>
+            <a:srgbClr val="F59E0B"/>
+          </a:solidFill>
+          <a:ln>
+            <a:noFill/>
+          </a:ln>
+        </p:spPr>
+        <p:style>
+          <a:lnRef idx="1">
+            <a:schemeClr val="accent1"/>
+          </a:lnRef>
+          <a:fillRef idx="3">
+            <a:schemeClr val="accent1"/>
+          </a:fillRef>
+          <a:effectRef idx="2">
+            <a:schemeClr val="accent1"/>
+          </a:effectRef>
+          <a:fontRef idx="minor">
+            <a:schemeClr val="lt1"/>
+          </a:fontRef>
+        </p:style>
+        <p:txBody>
+          <a:bodyPr rtlCol="0" anchor="ctr" wrap="square"/>
+          <a:lstStyle/>
+          <a:p>
+            <a:pPr algn="ctr">
+              <a:defRPr sz="2200" b="1">
+                <a:solidFill>
+                  <a:srgbClr val="FFFFFF"/>
+                </a:solidFill>
+              </a:defRPr>
+            </a:pPr>
+            <a:r>
+              <a:t>四籽</a:t>
+            </a:r>
+            <a:br/>
+            <a:r>
+              <a:t>油丸</a:t>
+            </a:r>
+          </a:p>
+        </p:txBody>
+      </p:sp>
+      <p:sp>
+        <p:nvSpPr>
+          <p:cNvPr id="7" name="Rounded Rectangle 6"/>
+          <p:cNvSpPr/>
+          <p:nvPr/>
+        </p:nvSpPr>
+        <p:spPr>
+          <a:xfrm>
+            <a:off x="1828800" y="1645920"/>
+            <a:ext cx="2286000" cy="1371600"/>
+          </a:xfrm>
+          <a:prstGeom prst="roundRect">
+            <a:avLst/>
+          </a:prstGeom>
+          <a:solidFill>
+            <a:srgbClr val="224D38"/>
+          </a:solidFill>
+          <a:ln w="25400">
+            <a:solidFill>
+              <a:srgbClr val="DC2626"/>
+            </a:solidFill>
+          </a:ln>
+        </p:spPr>
+        <p:style>
+          <a:lnRef idx="1">
+            <a:schemeClr val="accent1"/>
+          </a:lnRef>
+          <a:fillRef idx="3">
+            <a:schemeClr val="accent1"/>
+          </a:fillRef>
+          <a:effectRef idx="2">
+            <a:schemeClr val="accent1"/>
+          </a:effectRef>
+          <a:fontRef idx="minor">
+            <a:schemeClr val="lt1"/>
+          </a:fontRef>
+        </p:style>
+        <p:txBody>
+          <a:bodyPr rtlCol="0" anchor="ctr" wrap="square"/>
+          <a:lstStyle/>
+          <a:p>
+            <a:pPr algn="ctr">
+              <a:defRPr sz="1600" b="1">
+                <a:solidFill>
+                  <a:srgbClr val="DC2626"/>
+                </a:solidFill>
+              </a:defRPr>
+            </a:pPr>
+            <a:r>
+              <a:t>👑 君</a:t>
+            </a:r>
+          </a:p>
+          <a:p>
+            <a:pPr algn="ctr">
+              <a:defRPr sz="1400" b="1">
+                <a:solidFill>
+                  <a:srgbClr val="FFFFFF"/>
+                </a:solidFill>
+              </a:defRPr>
+            </a:pPr>
+            <a:r>
+              <a:t>紫苏籽油</a:t>
+            </a:r>
+          </a:p>
+          <a:p>
+            <a:pPr algn="ctr">
+              <a:defRPr sz="1100">
+                <a:solidFill>
+                  <a:srgbClr val="6B7280"/>
+                </a:solidFill>
+              </a:defRPr>
+            </a:pPr>
+            <a:r>
+              <a:t>核心降脂</a:t>
+            </a:r>
+            <a:br/>
+            <a:r>
+              <a:t>α-亚麻酸 67%</a:t>
+            </a:r>
+          </a:p>
+        </p:txBody>
+      </p:sp>
+      <p:sp>
+        <p:nvSpPr>
+          <p:cNvPr id="8" name="Rounded Rectangle 7"/>
+          <p:cNvSpPr/>
+          <p:nvPr/>
+        </p:nvSpPr>
+        <p:spPr>
+          <a:xfrm>
+            <a:off x="8229600" y="1645920"/>
+            <a:ext cx="2286000" cy="1371600"/>
+          </a:xfrm>
+          <a:prstGeom prst="roundRect">
+            <a:avLst/>
+          </a:prstGeom>
+          <a:solidFill>
+            <a:srgbClr val="224D38"/>
+          </a:solidFill>
+          <a:ln w="25400">
+            <a:solidFill>
+              <a:srgbClr val="2569EB"/>
+            </a:solidFill>
+          </a:ln>
+        </p:spPr>
+        <p:style>
+          <a:lnRef idx="1">
+            <a:schemeClr val="accent1"/>
+          </a:lnRef>
+          <a:fillRef idx="3">
+            <a:schemeClr val="accent1"/>
+          </a:fillRef>
+          <a:effectRef idx="2">
+            <a:schemeClr val="accent1"/>
+          </a:effectRef>
+          <a:fontRef idx="minor">
+            <a:schemeClr val="lt1"/>
+          </a:fontRef>
+        </p:style>
+        <p:txBody>
+          <a:bodyPr rtlCol="0" anchor="ctr" wrap="square"/>
+          <a:lstStyle/>
+          <a:p>
+            <a:pPr algn="ctr">
+              <a:defRPr sz="1600" b="1">
+                <a:solidFill>
+                  <a:srgbClr val="2569EB"/>
+                </a:solidFill>
+              </a:defRPr>
+            </a:pPr>
+            <a:r>
+              <a:t>🔷 臣</a:t>
+            </a:r>
+          </a:p>
+          <a:p>
+            <a:pPr algn="ctr">
+              <a:defRPr sz="1400" b="1">
+                <a:solidFill>
+                  <a:srgbClr val="FFFFFF"/>
+                </a:solidFill>
+              </a:defRPr>
+            </a:pPr>
+            <a:r>
+              <a:t>亚麻籽油</a:t>
+            </a:r>
+          </a:p>
+          <a:p>
+            <a:pPr algn="ctr">
+              <a:defRPr sz="1100">
+                <a:solidFill>
+                  <a:srgbClr val="6B7280"/>
+                </a:solidFill>
+              </a:defRPr>
+            </a:pPr>
+            <a:r>
+              <a:t>双倍 Omega-3</a:t>
+            </a:r>
+            <a:br/>
+            <a:r>
+              <a:t>强力辅佐</a:t>
+            </a:r>
+          </a:p>
+        </p:txBody>
+      </p:sp>
+      <p:sp>
+        <p:nvSpPr>
+          <p:cNvPr id="9" name="Rounded Rectangle 8"/>
+          <p:cNvSpPr/>
+          <p:nvPr/>
+        </p:nvSpPr>
+        <p:spPr>
+          <a:xfrm>
+            <a:off x="1828800" y="4572000"/>
+            <a:ext cx="2286000" cy="1371600"/>
+          </a:xfrm>
+          <a:prstGeom prst="roundRect">
+            <a:avLst/>
+          </a:prstGeom>
+          <a:solidFill>
+            <a:srgbClr val="224D38"/>
+          </a:solidFill>
+          <a:ln w="25400">
+            <a:solidFill>
+              <a:srgbClr val="059669"/>
+            </a:solidFill>
+          </a:ln>
+        </p:spPr>
+        <p:style>
+          <a:lnRef idx="1">
+            <a:schemeClr val="accent1"/>
+          </a:lnRef>
+          <a:fillRef idx="3">
+            <a:schemeClr val="accent1"/>
+          </a:fillRef>
+          <a:effectRef idx="2">
+            <a:schemeClr val="accent1"/>
+          </a:effectRef>
+          <a:fontRef idx="minor">
+            <a:schemeClr val="lt1"/>
+          </a:fontRef>
+        </p:style>
+        <p:txBody>
+          <a:bodyPr rtlCol="0" anchor="ctr" wrap="square"/>
+          <a:lstStyle/>
+          <a:p>
+            <a:pPr algn="ctr">
+              <a:defRPr sz="1600" b="1">
+                <a:solidFill>
+                  <a:srgbClr val="059669"/>
+                </a:solidFill>
+              </a:defRPr>
+            </a:pPr>
+            <a:r>
+              <a:t>🌿 佐</a:t>
+            </a:r>
+          </a:p>
+          <a:p>
+            <a:pPr algn="ctr">
+              <a:defRPr sz="1400" b="1">
+                <a:solidFill>
+                  <a:srgbClr val="FFFFFF"/>
+                </a:solidFill>
+              </a:defRPr>
+            </a:pPr>
+            <a:r>
+              <a:t>山茶籽油</a:t>
+            </a:r>
+          </a:p>
+          <a:p>
+            <a:pPr algn="ctr">
+              <a:defRPr sz="1100">
+                <a:solidFill>
+                  <a:srgbClr val="6B7280"/>
+                </a:solidFill>
+              </a:defRPr>
+            </a:pPr>
+            <a:r>
+              <a:t>平衡调和</a:t>
+            </a:r>
+            <a:br/>
+            <a:r>
+              <a:t>兼顾血糖</a:t>
+            </a:r>
+          </a:p>
+        </p:txBody>
+      </p:sp>
+      <p:sp>
+        <p:nvSpPr>
+          <p:cNvPr id="10" name="Rounded Rectangle 9"/>
+          <p:cNvSpPr/>
+          <p:nvPr/>
+        </p:nvSpPr>
+        <p:spPr>
+          <a:xfrm>
+            <a:off x="8229600" y="4572000"/>
+            <a:ext cx="2286000" cy="1371600"/>
+          </a:xfrm>
+          <a:prstGeom prst="roundRect">
+            <a:avLst/>
+          </a:prstGeom>
+          <a:solidFill>
+            <a:srgbClr val="224D38"/>
+          </a:solidFill>
+          <a:ln w="25400">
+            <a:solidFill>
+              <a:srgbClr val="7C3AED"/>
+            </a:solidFill>
+          </a:ln>
+        </p:spPr>
+        <p:style>
+          <a:lnRef idx="1">
+            <a:schemeClr val="accent1"/>
+          </a:lnRef>
+          <a:fillRef idx="3">
+            <a:schemeClr val="accent1"/>
+          </a:fillRef>
+          <a:effectRef idx="2">
+            <a:schemeClr val="accent1"/>
+          </a:effectRef>
+          <a:fontRef idx="minor">
+            <a:schemeClr val="lt1"/>
+          </a:fontRef>
+        </p:style>
+        <p:txBody>
+          <a:bodyPr rtlCol="0" anchor="ctr" wrap="square"/>
+          <a:lstStyle/>
+          <a:p>
+            <a:pPr algn="ctr">
+              <a:defRPr sz="1600" b="1">
+                <a:solidFill>
+                  <a:srgbClr val="7C3AED"/>
+                </a:solidFill>
+              </a:defRPr>
+            </a:pPr>
+            <a:r>
+              <a:t>🍇 使</a:t>
+            </a:r>
+          </a:p>
+          <a:p>
+            <a:pPr algn="ctr">
+              <a:defRPr sz="1400" b="1">
+                <a:solidFill>
+                  <a:srgbClr val="FFFFFF"/>
+                </a:solidFill>
+              </a:defRPr>
+            </a:pPr>
+            <a:r>
+              <a:t>葡萄籽油</a:t>
+            </a:r>
+          </a:p>
+          <a:p>
+            <a:pPr algn="ctr">
+              <a:defRPr sz="1100">
+                <a:solidFill>
+                  <a:srgbClr val="6B7280"/>
+                </a:solidFill>
+              </a:defRPr>
+            </a:pPr>
+            <a:r>
+              <a:t>引药归经</a:t>
+            </a:r>
+            <a:br/>
+            <a:r>
+              <a:t>抗氧化</a:t>
+            </a:r>
+          </a:p>
+        </p:txBody>
+      </p:sp>
+      <p:sp>
+        <p:nvSpPr>
+          <p:cNvPr id="11" name="TextBox 10"/>
+          <p:cNvSpPr txBox="1"/>
+          <p:nvPr/>
+        </p:nvSpPr>
+        <p:spPr>
+          <a:xfrm>
+            <a:off x="10515600" y="6400800"/>
+            <a:ext cx="1371600" cy="365760"/>
+          </a:xfrm>
+          <a:prstGeom prst="rect">
+            <a:avLst/>
+          </a:prstGeom>
+          <a:noFill/>
+        </p:spPr>
+        <p:txBody>
+          <a:bodyPr wrap="square">
+            <a:spAutoFit/>
+          </a:bodyPr>
+          <a:lstStyle/>
+          <a:p>
+            <a:pPr algn="r">
+              <a:defRPr sz="1000" b="0">
+                <a:solidFill>
+                  <a:srgbClr val="6B7280"/>
+                </a:solidFill>
+                <a:latin typeface="Microsoft YaHei"/>
+              </a:defRPr>
+            </a:pPr>
+            <a:r>
+              <a:t>18/19</a:t>
+            </a:r>
+          </a:p>
+        </p:txBody>
+      </p:sp>
+    </p:spTree>
+  </p:cSld>
+  <p:clrMapOvr>
+    <a:masterClrMapping/>
+  </p:clrMapOvr>
+</p:sld>
+</file>
+
+<file path=ppt/slides/slide19.xml><?xml version="1.0" encoding="utf-8"?>
+<p:sld xmlns:a="http://schemas.openxmlformats.org/drawingml/2006/main" xmlns:p="http://schemas.openxmlformats.org/presentationml/2006/main" xmlns:r="http://schemas.openxmlformats.org/officeDocument/2006/relationships">
+  <p:cSld>
+    <p:bg>
+      <p:bgPr>
+        <a:solidFill>
+          <a:srgbClr val="1B3A2A"/>
+        </a:solidFill>
+        <a:effectLst/>
+      </p:bgPr>
+    </p:bg>
+    <p:spTree>
+      <p:nvGrpSpPr>
+        <p:cNvPr id="1" name=""/>
+        <p:cNvGrpSpPr/>
+        <p:nvPr/>
+      </p:nvGrpSpPr>
+      <p:grpSpPr/>
+      <p:sp>
+        <p:nvSpPr>
+          <p:cNvPr id="2" name="Rectangle 1"/>
+          <p:cNvSpPr/>
+          <p:nvPr/>
+        </p:nvSpPr>
+        <p:spPr>
+          <a:xfrm>
+            <a:off x="0" y="0"/>
+            <a:ext cx="12191695" cy="6858000"/>
+          </a:xfrm>
+          <a:prstGeom prst="rect">
+            <a:avLst/>
+          </a:prstGeom>
+          <a:gradFill rotWithShape="1">
+            <a:gsLst>
+              <a:gs pos="0">
+                <a:srgbClr val="1B3A2A"/>
+              </a:gs>
+              <a:gs pos="100000">
                 <a:srgbClr val="0E5E4A"/>
               </a:gs>
             </a:gsLst>
@@ -11681,7 +12399,7 @@
         </p:nvSpPr>
         <p:spPr>
           <a:xfrm>
-            <a:off x="914400" y="914400"/>
+            <a:off x="914400" y="731520"/>
             <a:ext cx="10058400" cy="731520"/>
           </a:xfrm>
           <a:prstGeom prst="rect">
@@ -11696,7 +12414,7 @@
           <a:lstStyle/>
           <a:p>
             <a:pPr algn="l">
-              <a:defRPr sz="3600" b="1">
+              <a:defRPr sz="3400" b="1">
                 <a:solidFill>
                   <a:srgbClr val="FFFFFF"/>
                 </a:solidFill>
@@ -11704,7 +12422,7 @@
               </a:defRPr>
             </a:pPr>
             <a:r>
-              <a:t>四籽油丸 —— 用天然的力量守护健康</a:t>
+              <a:t>四籽油丸 —— 君臣佐使 · 用天然的智慧守护健康</a:t>
             </a:r>
           </a:p>
         </p:txBody>
@@ -11717,8 +12435,8 @@
         </p:nvSpPr>
         <p:spPr>
           <a:xfrm>
-            <a:off x="731520" y="2011680"/>
-            <a:ext cx="10515600" cy="2560320"/>
+            <a:off x="731520" y="1828800"/>
+            <a:ext cx="10515600" cy="2743200"/>
           </a:xfrm>
           <a:prstGeom prst="roundRect">
             <a:avLst>
@@ -11762,8 +12480,8 @@
         </p:nvSpPr>
         <p:spPr>
           <a:xfrm>
-            <a:off x="1097280" y="2194560"/>
-            <a:ext cx="9875520" cy="2194560"/>
+            <a:off x="1097280" y="2011680"/>
+            <a:ext cx="9875520" cy="2377440"/>
           </a:xfrm>
           <a:prstGeom prst="rect">
             <a:avLst/>
@@ -11817,7 +12535,7 @@
               </a:defRPr>
             </a:pPr>
             <a:r>
-              <a:t>✅ 四种天然籽油：葡萄籽油 + 亚麻籽油 + 山茶籽油 + 紫苏籽油</a:t>
+              <a:t>👑 君 · 紫苏籽油 → 核心降脂主力，唯一药食同源油用种子</a:t>
             </a:r>
           </a:p>
           <a:p>
@@ -11833,7 +12551,7 @@
               </a:defRPr>
             </a:pPr>
             <a:r>
-              <a:t>✅ 科学原理：以"好油"（不饱和脂肪酸）替换"坏油"（饱和脂肪/反式脂肪）</a:t>
+              <a:t>🔷 臣 · 亚麻籽油 → 双倍 Omega-3，强力辅佐降脂降压</a:t>
             </a:r>
           </a:p>
           <a:p>
@@ -11849,7 +12567,7 @@
               </a:defRPr>
             </a:pPr>
             <a:r>
-              <a:t>✅ 协同效应：四油合一，1+1+1+1 &gt; 4，全面调理四高</a:t>
+              <a:t>🌿 佐 · 山茶籽油 → 东方橄榄油，平衡调和、兼顾血糖</a:t>
             </a:r>
           </a:p>
           <a:p>
@@ -11865,7 +12583,7 @@
               </a:defRPr>
             </a:pPr>
             <a:r>
-              <a:t>✅ 药食同源：紫苏籽入选国家药食同源目录，天然安全</a:t>
+              <a:t>🍇 使 · 葡萄籽油 → 原花青素抗氧化，引药归经、促进吸收</a:t>
             </a:r>
           </a:p>
           <a:p>
@@ -11880,8 +12598,21 @@
                 <a:latin typeface="Microsoft YaHei"/>
               </a:defRPr>
             </a:pPr>
-            <a:r>
-              <a:t>✅ 适用广泛：三高/四高人群、中老年、高压工作者、关注健康人群</a:t>
+          </a:p>
+          <a:p>
+            <a:pPr algn="l">
+              <a:spcAft>
+                <a:spcPts val="489"/>
+              </a:spcAft>
+              <a:defRPr sz="1400">
+                <a:solidFill>
+                  <a:srgbClr val="F0FDF4"/>
+                </a:solidFill>
+                <a:latin typeface="Microsoft YaHei"/>
+              </a:defRPr>
+            </a:pPr>
+            <a:r>
+              <a:t>✅ 四油按君臣佐使配伍 → 1+1+1+1 &gt; 4 → 全面调理四高</a:t>
             </a:r>
           </a:p>
         </p:txBody>
@@ -11965,7 +12696,7 @@
               </a:defRPr>
             </a:pPr>
             <a:r>
-              <a:t>🌟 从今天开始，用四籽油丸为你的健康加分！</a:t>
+              <a:t>🌟 从今天开始，用君臣佐使的配伍智慧为你的健康加分！</a:t>
             </a:r>
           </a:p>
           <a:p>
@@ -11981,7 +12712,7 @@
               </a:defRPr>
             </a:pPr>
             <a:r>
-              <a:t>换掉厨房里的普通油，选择更科学的营养方案。</a:t>
+              <a:t>四籽油丸 —— 四种籽油，四种角色，一个完整的健康方案。</a:t>
             </a:r>
           </a:p>
         </p:txBody>
@@ -12053,7 +12784,7 @@
               </a:defRPr>
             </a:pPr>
             <a:r>
-              <a:t>18/18</a:t>
+              <a:t>19/19</a:t>
             </a:r>
           </a:p>
         </p:txBody>
@@ -12259,7 +12990,7 @@
         <p:spPr>
           <a:xfrm>
             <a:off x="914400" y="1645920"/>
-            <a:ext cx="10058400" cy="658368"/>
+            <a:ext cx="10058400" cy="393192"/>
           </a:xfrm>
           <a:prstGeom prst="roundRect">
             <a:avLst>
@@ -12303,22 +13034,22 @@
         </p:nvSpPr>
         <p:spPr>
           <a:xfrm>
-            <a:off x="1188720" y="1737360"/>
-            <a:ext cx="731520" cy="457200"/>
-          </a:xfrm>
-          <a:prstGeom prst="rect">
-            <a:avLst/>
-          </a:prstGeom>
-          <a:noFill/>
-        </p:spPr>
-        <p:txBody>
-          <a:bodyPr wrap="square">
-            <a:spAutoFit/>
-          </a:bodyPr>
-          <a:lstStyle/>
-          <a:p>
-            <a:pPr algn="l">
-              <a:defRPr sz="2200" b="1">
+            <a:off x="1188720" y="1691640"/>
+            <a:ext cx="640080" cy="292608"/>
+          </a:xfrm>
+          <a:prstGeom prst="rect">
+            <a:avLst/>
+          </a:prstGeom>
+          <a:noFill/>
+        </p:spPr>
+        <p:txBody>
+          <a:bodyPr wrap="square">
+            <a:spAutoFit/>
+          </a:bodyPr>
+          <a:lstStyle/>
+          <a:p>
+            <a:pPr algn="l">
+              <a:defRPr sz="1600" b="1">
                 <a:solidFill>
                   <a:srgbClr val="F59E0B"/>
                 </a:solidFill>
@@ -12339,22 +13070,22 @@
         </p:nvSpPr>
         <p:spPr>
           <a:xfrm>
-            <a:off x="2011680" y="1737360"/>
-            <a:ext cx="3657600" cy="457200"/>
-          </a:xfrm>
-          <a:prstGeom prst="rect">
-            <a:avLst/>
-          </a:prstGeom>
-          <a:noFill/>
-        </p:spPr>
-        <p:txBody>
-          <a:bodyPr wrap="square">
-            <a:spAutoFit/>
-          </a:bodyPr>
-          <a:lstStyle/>
-          <a:p>
-            <a:pPr algn="l">
-              <a:defRPr sz="1800" b="1">
+            <a:off x="2011680" y="1691640"/>
+            <a:ext cx="3657600" cy="292608"/>
+          </a:xfrm>
+          <a:prstGeom prst="rect">
+            <a:avLst/>
+          </a:prstGeom>
+          <a:noFill/>
+        </p:spPr>
+        <p:txBody>
+          <a:bodyPr wrap="square">
+            <a:spAutoFit/>
+          </a:bodyPr>
+          <a:lstStyle/>
+          <a:p>
+            <a:pPr algn="l">
+              <a:defRPr sz="1400" b="1">
                 <a:solidFill>
                   <a:srgbClr val="FFFFFF"/>
                 </a:solidFill>
@@ -12375,22 +13106,22 @@
         </p:nvSpPr>
         <p:spPr>
           <a:xfrm>
-            <a:off x="5943600" y="1783080"/>
-            <a:ext cx="5029200" cy="365760"/>
-          </a:xfrm>
-          <a:prstGeom prst="rect">
-            <a:avLst/>
-          </a:prstGeom>
-          <a:noFill/>
-        </p:spPr>
-        <p:txBody>
-          <a:bodyPr wrap="square">
-            <a:spAutoFit/>
-          </a:bodyPr>
-          <a:lstStyle/>
-          <a:p>
-            <a:pPr algn="l">
-              <a:defRPr sz="1300" b="0">
+            <a:off x="5943600" y="1691640"/>
+            <a:ext cx="5029200" cy="292608"/>
+          </a:xfrm>
+          <a:prstGeom prst="rect">
+            <a:avLst/>
+          </a:prstGeom>
+          <a:noFill/>
+        </p:spPr>
+        <p:txBody>
+          <a:bodyPr wrap="square">
+            <a:spAutoFit/>
+          </a:bodyPr>
+          <a:lstStyle/>
+          <a:p>
+            <a:pPr algn="l">
+              <a:defRPr sz="1100" b="0">
                 <a:solidFill>
                   <a:srgbClr val="6B7280"/>
                 </a:solidFill>
@@ -12411,8 +13142,161 @@
         </p:nvSpPr>
         <p:spPr>
           <a:xfrm>
-            <a:off x="914400" y="2423160"/>
-            <a:ext cx="10058400" cy="658368"/>
+            <a:off x="914400" y="2093976"/>
+            <a:ext cx="10058400" cy="393192"/>
+          </a:xfrm>
+          <a:prstGeom prst="roundRect">
+            <a:avLst>
+              <a:gd name="adj" fmla="val 5000"/>
+            </a:avLst>
+          </a:prstGeom>
+          <a:solidFill>
+            <a:srgbClr val="25553F"/>
+          </a:solidFill>
+          <a:ln>
+            <a:noFill/>
+          </a:ln>
+        </p:spPr>
+        <p:style>
+          <a:lnRef idx="1">
+            <a:schemeClr val="accent1"/>
+          </a:lnRef>
+          <a:fillRef idx="3">
+            <a:schemeClr val="accent1"/>
+          </a:fillRef>
+          <a:effectRef idx="2">
+            <a:schemeClr val="accent1"/>
+          </a:effectRef>
+          <a:fontRef idx="minor">
+            <a:schemeClr val="lt1"/>
+          </a:fontRef>
+        </p:style>
+        <p:txBody>
+          <a:bodyPr rtlCol="0" anchor="ctr"/>
+          <a:lstStyle/>
+          <a:p>
+            <a:pPr algn="ctr"/>
+          </a:p>
+        </p:txBody>
+      </p:sp>
+      <p:sp>
+        <p:nvSpPr>
+          <p:cNvPr id="11" name="TextBox 10"/>
+          <p:cNvSpPr txBox="1"/>
+          <p:nvPr/>
+        </p:nvSpPr>
+        <p:spPr>
+          <a:xfrm>
+            <a:off x="1188720" y="2139696"/>
+            <a:ext cx="640080" cy="292608"/>
+          </a:xfrm>
+          <a:prstGeom prst="rect">
+            <a:avLst/>
+          </a:prstGeom>
+          <a:noFill/>
+        </p:spPr>
+        <p:txBody>
+          <a:bodyPr wrap="square">
+            <a:spAutoFit/>
+          </a:bodyPr>
+          <a:lstStyle/>
+          <a:p>
+            <a:pPr algn="l">
+              <a:defRPr sz="1600" b="1">
+                <a:solidFill>
+                  <a:srgbClr val="F59E0B"/>
+                </a:solidFill>
+                <a:latin typeface="Microsoft YaHei"/>
+              </a:defRPr>
+            </a:pPr>
+            <a:r>
+              <a:t>02</a:t>
+            </a:r>
+          </a:p>
+        </p:txBody>
+      </p:sp>
+      <p:sp>
+        <p:nvSpPr>
+          <p:cNvPr id="12" name="TextBox 11"/>
+          <p:cNvSpPr txBox="1"/>
+          <p:nvPr/>
+        </p:nvSpPr>
+        <p:spPr>
+          <a:xfrm>
+            <a:off x="2011680" y="2139696"/>
+            <a:ext cx="3657600" cy="292608"/>
+          </a:xfrm>
+          <a:prstGeom prst="rect">
+            <a:avLst/>
+          </a:prstGeom>
+          <a:noFill/>
+        </p:spPr>
+        <p:txBody>
+          <a:bodyPr wrap="square">
+            <a:spAutoFit/>
+          </a:bodyPr>
+          <a:lstStyle/>
+          <a:p>
+            <a:pPr algn="l">
+              <a:defRPr sz="1400" b="1">
+                <a:solidFill>
+                  <a:srgbClr val="FFFFFF"/>
+                </a:solidFill>
+                <a:latin typeface="Microsoft YaHei"/>
+              </a:defRPr>
+            </a:pPr>
+            <a:r>
+              <a:t>君臣佐使 · 配伍理论</a:t>
+            </a:r>
+          </a:p>
+        </p:txBody>
+      </p:sp>
+      <p:sp>
+        <p:nvSpPr>
+          <p:cNvPr id="13" name="TextBox 12"/>
+          <p:cNvSpPr txBox="1"/>
+          <p:nvPr/>
+        </p:nvSpPr>
+        <p:spPr>
+          <a:xfrm>
+            <a:off x="5943600" y="2139696"/>
+            <a:ext cx="5029200" cy="292608"/>
+          </a:xfrm>
+          <a:prstGeom prst="rect">
+            <a:avLst/>
+          </a:prstGeom>
+          <a:noFill/>
+        </p:spPr>
+        <p:txBody>
+          <a:bodyPr wrap="square">
+            <a:spAutoFit/>
+          </a:bodyPr>
+          <a:lstStyle/>
+          <a:p>
+            <a:pPr algn="l">
+              <a:defRPr sz="1100" b="0">
+                <a:solidFill>
+                  <a:srgbClr val="6B7280"/>
+                </a:solidFill>
+                <a:latin typeface="Microsoft YaHei"/>
+              </a:defRPr>
+            </a:pPr>
+            <a:r>
+              <a:t>四种籽油的角色与分工</a:t>
+            </a:r>
+          </a:p>
+        </p:txBody>
+      </p:sp>
+      <p:sp>
+        <p:nvSpPr>
+          <p:cNvPr id="14" name="Rounded Rectangle 13"/>
+          <p:cNvSpPr/>
+          <p:nvPr/>
+        </p:nvSpPr>
+        <p:spPr>
+          <a:xfrm>
+            <a:off x="914400" y="2542032"/>
+            <a:ext cx="10058400" cy="393192"/>
           </a:xfrm>
           <a:prstGeom prst="roundRect">
             <a:avLst>
@@ -12450,28 +13334,28 @@
       </p:sp>
       <p:sp>
         <p:nvSpPr>
-          <p:cNvPr id="11" name="TextBox 10"/>
-          <p:cNvSpPr txBox="1"/>
-          <p:nvPr/>
-        </p:nvSpPr>
-        <p:spPr>
-          <a:xfrm>
-            <a:off x="1188720" y="2514600"/>
-            <a:ext cx="731520" cy="457200"/>
-          </a:xfrm>
-          <a:prstGeom prst="rect">
-            <a:avLst/>
-          </a:prstGeom>
-          <a:noFill/>
-        </p:spPr>
-        <p:txBody>
-          <a:bodyPr wrap="square">
-            <a:spAutoFit/>
-          </a:bodyPr>
-          <a:lstStyle/>
-          <a:p>
-            <a:pPr algn="l">
-              <a:defRPr sz="2200" b="1">
+          <p:cNvPr id="15" name="TextBox 14"/>
+          <p:cNvSpPr txBox="1"/>
+          <p:nvPr/>
+        </p:nvSpPr>
+        <p:spPr>
+          <a:xfrm>
+            <a:off x="1188720" y="2587752"/>
+            <a:ext cx="640080" cy="292608"/>
+          </a:xfrm>
+          <a:prstGeom prst="rect">
+            <a:avLst/>
+          </a:prstGeom>
+          <a:noFill/>
+        </p:spPr>
+        <p:txBody>
+          <a:bodyPr wrap="square">
+            <a:spAutoFit/>
+          </a:bodyPr>
+          <a:lstStyle/>
+          <a:p>
+            <a:pPr algn="l">
+              <a:defRPr sz="1600" b="1">
                 <a:solidFill>
                   <a:srgbClr val="F59E0B"/>
                 </a:solidFill>
@@ -12479,35 +13363,35 @@
               </a:defRPr>
             </a:pPr>
             <a:r>
-              <a:t>02</a:t>
-            </a:r>
-          </a:p>
-        </p:txBody>
-      </p:sp>
-      <p:sp>
-        <p:nvSpPr>
-          <p:cNvPr id="12" name="TextBox 11"/>
-          <p:cNvSpPr txBox="1"/>
-          <p:nvPr/>
-        </p:nvSpPr>
-        <p:spPr>
-          <a:xfrm>
-            <a:off x="2011680" y="2514600"/>
-            <a:ext cx="3657600" cy="457200"/>
-          </a:xfrm>
-          <a:prstGeom prst="rect">
-            <a:avLst/>
-          </a:prstGeom>
-          <a:noFill/>
-        </p:spPr>
-        <p:txBody>
-          <a:bodyPr wrap="square">
-            <a:spAutoFit/>
-          </a:bodyPr>
-          <a:lstStyle/>
-          <a:p>
-            <a:pPr algn="l">
-              <a:defRPr sz="1800" b="1">
+              <a:t>03</a:t>
+            </a:r>
+          </a:p>
+        </p:txBody>
+      </p:sp>
+      <p:sp>
+        <p:nvSpPr>
+          <p:cNvPr id="16" name="TextBox 15"/>
+          <p:cNvSpPr txBox="1"/>
+          <p:nvPr/>
+        </p:nvSpPr>
+        <p:spPr>
+          <a:xfrm>
+            <a:off x="2011680" y="2587752"/>
+            <a:ext cx="3657600" cy="292608"/>
+          </a:xfrm>
+          <a:prstGeom prst="rect">
+            <a:avLst/>
+          </a:prstGeom>
+          <a:noFill/>
+        </p:spPr>
+        <p:txBody>
+          <a:bodyPr wrap="square">
+            <a:spAutoFit/>
+          </a:bodyPr>
+          <a:lstStyle/>
+          <a:p>
+            <a:pPr algn="l">
+              <a:defRPr sz="1400" b="1">
                 <a:solidFill>
                   <a:srgbClr val="FFFFFF"/>
                 </a:solidFill>
@@ -12515,35 +13399,35 @@
               </a:defRPr>
             </a:pPr>
             <a:r>
-              <a:t>四种籽油的功效</a:t>
-            </a:r>
-          </a:p>
-        </p:txBody>
-      </p:sp>
-      <p:sp>
-        <p:nvSpPr>
-          <p:cNvPr id="13" name="TextBox 12"/>
-          <p:cNvSpPr txBox="1"/>
-          <p:nvPr/>
-        </p:nvSpPr>
-        <p:spPr>
-          <a:xfrm>
-            <a:off x="5943600" y="2560320"/>
-            <a:ext cx="5029200" cy="365760"/>
-          </a:xfrm>
-          <a:prstGeom prst="rect">
-            <a:avLst/>
-          </a:prstGeom>
-          <a:noFill/>
-        </p:spPr>
-        <p:txBody>
-          <a:bodyPr wrap="square">
-            <a:spAutoFit/>
-          </a:bodyPr>
-          <a:lstStyle/>
-          <a:p>
-            <a:pPr algn="l">
-              <a:defRPr sz="1300" b="0">
+              <a:t>君 · 紫苏籽油</a:t>
+            </a:r>
+          </a:p>
+        </p:txBody>
+      </p:sp>
+      <p:sp>
+        <p:nvSpPr>
+          <p:cNvPr id="17" name="TextBox 16"/>
+          <p:cNvSpPr txBox="1"/>
+          <p:nvPr/>
+        </p:nvSpPr>
+        <p:spPr>
+          <a:xfrm>
+            <a:off x="5943600" y="2587752"/>
+            <a:ext cx="5029200" cy="292608"/>
+          </a:xfrm>
+          <a:prstGeom prst="rect">
+            <a:avLst/>
+          </a:prstGeom>
+          <a:noFill/>
+        </p:spPr>
+        <p:txBody>
+          <a:bodyPr wrap="square">
+            <a:spAutoFit/>
+          </a:bodyPr>
+          <a:lstStyle/>
+          <a:p>
+            <a:pPr algn="l">
+              <a:defRPr sz="1100" b="0">
                 <a:solidFill>
                   <a:srgbClr val="6B7280"/>
                 </a:solidFill>
@@ -12551,21 +13435,174 @@
               </a:defRPr>
             </a:pPr>
             <a:r>
-              <a:t>葡萄籽油·亚麻籽油·山茶籽油·紫苏籽油</a:t>
-            </a:r>
-          </a:p>
-        </p:txBody>
-      </p:sp>
-      <p:sp>
-        <p:nvSpPr>
-          <p:cNvPr id="14" name="Rounded Rectangle 13"/>
+              <a:t>药食同源 · 核心主力</a:t>
+            </a:r>
+          </a:p>
+        </p:txBody>
+      </p:sp>
+      <p:sp>
+        <p:nvSpPr>
+          <p:cNvPr id="18" name="Rounded Rectangle 17"/>
           <p:cNvSpPr/>
           <p:nvPr/>
         </p:nvSpPr>
         <p:spPr>
           <a:xfrm>
-            <a:off x="914400" y="3200400"/>
-            <a:ext cx="10058400" cy="658368"/>
+            <a:off x="914400" y="2990088"/>
+            <a:ext cx="10058400" cy="393192"/>
+          </a:xfrm>
+          <a:prstGeom prst="roundRect">
+            <a:avLst>
+              <a:gd name="adj" fmla="val 5000"/>
+            </a:avLst>
+          </a:prstGeom>
+          <a:solidFill>
+            <a:srgbClr val="25553F"/>
+          </a:solidFill>
+          <a:ln>
+            <a:noFill/>
+          </a:ln>
+        </p:spPr>
+        <p:style>
+          <a:lnRef idx="1">
+            <a:schemeClr val="accent1"/>
+          </a:lnRef>
+          <a:fillRef idx="3">
+            <a:schemeClr val="accent1"/>
+          </a:fillRef>
+          <a:effectRef idx="2">
+            <a:schemeClr val="accent1"/>
+          </a:effectRef>
+          <a:fontRef idx="minor">
+            <a:schemeClr val="lt1"/>
+          </a:fontRef>
+        </p:style>
+        <p:txBody>
+          <a:bodyPr rtlCol="0" anchor="ctr"/>
+          <a:lstStyle/>
+          <a:p>
+            <a:pPr algn="ctr"/>
+          </a:p>
+        </p:txBody>
+      </p:sp>
+      <p:sp>
+        <p:nvSpPr>
+          <p:cNvPr id="19" name="TextBox 18"/>
+          <p:cNvSpPr txBox="1"/>
+          <p:nvPr/>
+        </p:nvSpPr>
+        <p:spPr>
+          <a:xfrm>
+            <a:off x="1188720" y="3035808"/>
+            <a:ext cx="640080" cy="292608"/>
+          </a:xfrm>
+          <a:prstGeom prst="rect">
+            <a:avLst/>
+          </a:prstGeom>
+          <a:noFill/>
+        </p:spPr>
+        <p:txBody>
+          <a:bodyPr wrap="square">
+            <a:spAutoFit/>
+          </a:bodyPr>
+          <a:lstStyle/>
+          <a:p>
+            <a:pPr algn="l">
+              <a:defRPr sz="1600" b="1">
+                <a:solidFill>
+                  <a:srgbClr val="F59E0B"/>
+                </a:solidFill>
+                <a:latin typeface="Microsoft YaHei"/>
+              </a:defRPr>
+            </a:pPr>
+            <a:r>
+              <a:t>04</a:t>
+            </a:r>
+          </a:p>
+        </p:txBody>
+      </p:sp>
+      <p:sp>
+        <p:nvSpPr>
+          <p:cNvPr id="20" name="TextBox 19"/>
+          <p:cNvSpPr txBox="1"/>
+          <p:nvPr/>
+        </p:nvSpPr>
+        <p:spPr>
+          <a:xfrm>
+            <a:off x="2011680" y="3035808"/>
+            <a:ext cx="3657600" cy="292608"/>
+          </a:xfrm>
+          <a:prstGeom prst="rect">
+            <a:avLst/>
+          </a:prstGeom>
+          <a:noFill/>
+        </p:spPr>
+        <p:txBody>
+          <a:bodyPr wrap="square">
+            <a:spAutoFit/>
+          </a:bodyPr>
+          <a:lstStyle/>
+          <a:p>
+            <a:pPr algn="l">
+              <a:defRPr sz="1400" b="1">
+                <a:solidFill>
+                  <a:srgbClr val="FFFFFF"/>
+                </a:solidFill>
+                <a:latin typeface="Microsoft YaHei"/>
+              </a:defRPr>
+            </a:pPr>
+            <a:r>
+              <a:t>臣 · 亚麻籽油</a:t>
+            </a:r>
+          </a:p>
+        </p:txBody>
+      </p:sp>
+      <p:sp>
+        <p:nvSpPr>
+          <p:cNvPr id="21" name="TextBox 20"/>
+          <p:cNvSpPr txBox="1"/>
+          <p:nvPr/>
+        </p:nvSpPr>
+        <p:spPr>
+          <a:xfrm>
+            <a:off x="5943600" y="3035808"/>
+            <a:ext cx="5029200" cy="292608"/>
+          </a:xfrm>
+          <a:prstGeom prst="rect">
+            <a:avLst/>
+          </a:prstGeom>
+          <a:noFill/>
+        </p:spPr>
+        <p:txBody>
+          <a:bodyPr wrap="square">
+            <a:spAutoFit/>
+          </a:bodyPr>
+          <a:lstStyle/>
+          <a:p>
+            <a:pPr algn="l">
+              <a:defRPr sz="1100" b="0">
+                <a:solidFill>
+                  <a:srgbClr val="6B7280"/>
+                </a:solidFill>
+                <a:latin typeface="Microsoft YaHei"/>
+              </a:defRPr>
+            </a:pPr>
+            <a:r>
+              <a:t>Omega-3之王 · 强力辅佐</a:t>
+            </a:r>
+          </a:p>
+        </p:txBody>
+      </p:sp>
+      <p:sp>
+        <p:nvSpPr>
+          <p:cNvPr id="22" name="Rounded Rectangle 21"/>
+          <p:cNvSpPr/>
+          <p:nvPr/>
+        </p:nvSpPr>
+        <p:spPr>
+          <a:xfrm>
+            <a:off x="914400" y="3438144"/>
+            <a:ext cx="10058400" cy="393192"/>
           </a:xfrm>
           <a:prstGeom prst="roundRect">
             <a:avLst>
@@ -12603,28 +13640,28 @@
       </p:sp>
       <p:sp>
         <p:nvSpPr>
-          <p:cNvPr id="15" name="TextBox 14"/>
-          <p:cNvSpPr txBox="1"/>
-          <p:nvPr/>
-        </p:nvSpPr>
-        <p:spPr>
-          <a:xfrm>
-            <a:off x="1188720" y="3291840"/>
-            <a:ext cx="731520" cy="457200"/>
-          </a:xfrm>
-          <a:prstGeom prst="rect">
-            <a:avLst/>
-          </a:prstGeom>
-          <a:noFill/>
-        </p:spPr>
-        <p:txBody>
-          <a:bodyPr wrap="square">
-            <a:spAutoFit/>
-          </a:bodyPr>
-          <a:lstStyle/>
-          <a:p>
-            <a:pPr algn="l">
-              <a:defRPr sz="2200" b="1">
+          <p:cNvPr id="23" name="TextBox 22"/>
+          <p:cNvSpPr txBox="1"/>
+          <p:nvPr/>
+        </p:nvSpPr>
+        <p:spPr>
+          <a:xfrm>
+            <a:off x="1188720" y="3483863"/>
+            <a:ext cx="640080" cy="292608"/>
+          </a:xfrm>
+          <a:prstGeom prst="rect">
+            <a:avLst/>
+          </a:prstGeom>
+          <a:noFill/>
+        </p:spPr>
+        <p:txBody>
+          <a:bodyPr wrap="square">
+            <a:spAutoFit/>
+          </a:bodyPr>
+          <a:lstStyle/>
+          <a:p>
+            <a:pPr algn="l">
+              <a:defRPr sz="1600" b="1">
                 <a:solidFill>
                   <a:srgbClr val="F59E0B"/>
                 </a:solidFill>
@@ -12632,35 +13669,35 @@
               </a:defRPr>
             </a:pPr>
             <a:r>
-              <a:t>03</a:t>
-            </a:r>
-          </a:p>
-        </p:txBody>
-      </p:sp>
-      <p:sp>
-        <p:nvSpPr>
-          <p:cNvPr id="16" name="TextBox 15"/>
-          <p:cNvSpPr txBox="1"/>
-          <p:nvPr/>
-        </p:nvSpPr>
-        <p:spPr>
-          <a:xfrm>
-            <a:off x="2011680" y="3291840"/>
-            <a:ext cx="3657600" cy="457200"/>
-          </a:xfrm>
-          <a:prstGeom prst="rect">
-            <a:avLst/>
-          </a:prstGeom>
-          <a:noFill/>
-        </p:spPr>
-        <p:txBody>
-          <a:bodyPr wrap="square">
-            <a:spAutoFit/>
-          </a:bodyPr>
-          <a:lstStyle/>
-          <a:p>
-            <a:pPr algn="l">
-              <a:defRPr sz="1800" b="1">
+              <a:t>05</a:t>
+            </a:r>
+          </a:p>
+        </p:txBody>
+      </p:sp>
+      <p:sp>
+        <p:nvSpPr>
+          <p:cNvPr id="24" name="TextBox 23"/>
+          <p:cNvSpPr txBox="1"/>
+          <p:nvPr/>
+        </p:nvSpPr>
+        <p:spPr>
+          <a:xfrm>
+            <a:off x="2011680" y="3483863"/>
+            <a:ext cx="3657600" cy="292608"/>
+          </a:xfrm>
+          <a:prstGeom prst="rect">
+            <a:avLst/>
+          </a:prstGeom>
+          <a:noFill/>
+        </p:spPr>
+        <p:txBody>
+          <a:bodyPr wrap="square">
+            <a:spAutoFit/>
+          </a:bodyPr>
+          <a:lstStyle/>
+          <a:p>
+            <a:pPr algn="l">
+              <a:defRPr sz="1400" b="1">
                 <a:solidFill>
                   <a:srgbClr val="FFFFFF"/>
                 </a:solidFill>
@@ -12668,35 +13705,35 @@
               </a:defRPr>
             </a:pPr>
             <a:r>
-              <a:t>"以油去油"的原理</a:t>
-            </a:r>
-          </a:p>
-        </p:txBody>
-      </p:sp>
-      <p:sp>
-        <p:nvSpPr>
-          <p:cNvPr id="17" name="TextBox 16"/>
-          <p:cNvSpPr txBox="1"/>
-          <p:nvPr/>
-        </p:nvSpPr>
-        <p:spPr>
-          <a:xfrm>
-            <a:off x="5943600" y="3337560"/>
-            <a:ext cx="5029200" cy="365760"/>
-          </a:xfrm>
-          <a:prstGeom prst="rect">
-            <a:avLst/>
-          </a:prstGeom>
-          <a:noFill/>
-        </p:spPr>
-        <p:txBody>
-          <a:bodyPr wrap="square">
-            <a:spAutoFit/>
-          </a:bodyPr>
-          <a:lstStyle/>
-          <a:p>
-            <a:pPr algn="l">
-              <a:defRPr sz="1300" b="0">
+              <a:t>佐 · 山茶籽油</a:t>
+            </a:r>
+          </a:p>
+        </p:txBody>
+      </p:sp>
+      <p:sp>
+        <p:nvSpPr>
+          <p:cNvPr id="25" name="TextBox 24"/>
+          <p:cNvSpPr txBox="1"/>
+          <p:nvPr/>
+        </p:nvSpPr>
+        <p:spPr>
+          <a:xfrm>
+            <a:off x="5943600" y="3483863"/>
+            <a:ext cx="5029200" cy="292608"/>
+          </a:xfrm>
+          <a:prstGeom prst="rect">
+            <a:avLst/>
+          </a:prstGeom>
+          <a:noFill/>
+        </p:spPr>
+        <p:txBody>
+          <a:bodyPr wrap="square">
+            <a:spAutoFit/>
+          </a:bodyPr>
+          <a:lstStyle/>
+          <a:p>
+            <a:pPr algn="l">
+              <a:defRPr sz="1100" b="0">
                 <a:solidFill>
                   <a:srgbClr val="6B7280"/>
                 </a:solidFill>
@@ -12704,21 +13741,174 @@
               </a:defRPr>
             </a:pPr>
             <a:r>
-              <a:t>好油如何帮助身体排出坏油</a:t>
-            </a:r>
-          </a:p>
-        </p:txBody>
-      </p:sp>
-      <p:sp>
-        <p:nvSpPr>
-          <p:cNvPr id="18" name="Rounded Rectangle 17"/>
+              <a:t>东方橄榄油 · 平衡调和</a:t>
+            </a:r>
+          </a:p>
+        </p:txBody>
+      </p:sp>
+      <p:sp>
+        <p:nvSpPr>
+          <p:cNvPr id="26" name="Rounded Rectangle 25"/>
           <p:cNvSpPr/>
           <p:nvPr/>
         </p:nvSpPr>
         <p:spPr>
           <a:xfrm>
-            <a:off x="914400" y="3977639"/>
-            <a:ext cx="10058400" cy="658368"/>
+            <a:off x="914400" y="3886200"/>
+            <a:ext cx="10058400" cy="393192"/>
+          </a:xfrm>
+          <a:prstGeom prst="roundRect">
+            <a:avLst>
+              <a:gd name="adj" fmla="val 5000"/>
+            </a:avLst>
+          </a:prstGeom>
+          <a:solidFill>
+            <a:srgbClr val="25553F"/>
+          </a:solidFill>
+          <a:ln>
+            <a:noFill/>
+          </a:ln>
+        </p:spPr>
+        <p:style>
+          <a:lnRef idx="1">
+            <a:schemeClr val="accent1"/>
+          </a:lnRef>
+          <a:fillRef idx="3">
+            <a:schemeClr val="accent1"/>
+          </a:fillRef>
+          <a:effectRef idx="2">
+            <a:schemeClr val="accent1"/>
+          </a:effectRef>
+          <a:fontRef idx="minor">
+            <a:schemeClr val="lt1"/>
+          </a:fontRef>
+        </p:style>
+        <p:txBody>
+          <a:bodyPr rtlCol="0" anchor="ctr"/>
+          <a:lstStyle/>
+          <a:p>
+            <a:pPr algn="ctr"/>
+          </a:p>
+        </p:txBody>
+      </p:sp>
+      <p:sp>
+        <p:nvSpPr>
+          <p:cNvPr id="27" name="TextBox 26"/>
+          <p:cNvSpPr txBox="1"/>
+          <p:nvPr/>
+        </p:nvSpPr>
+        <p:spPr>
+          <a:xfrm>
+            <a:off x="1188720" y="3931920"/>
+            <a:ext cx="640080" cy="292608"/>
+          </a:xfrm>
+          <a:prstGeom prst="rect">
+            <a:avLst/>
+          </a:prstGeom>
+          <a:noFill/>
+        </p:spPr>
+        <p:txBody>
+          <a:bodyPr wrap="square">
+            <a:spAutoFit/>
+          </a:bodyPr>
+          <a:lstStyle/>
+          <a:p>
+            <a:pPr algn="l">
+              <a:defRPr sz="1600" b="1">
+                <a:solidFill>
+                  <a:srgbClr val="F59E0B"/>
+                </a:solidFill>
+                <a:latin typeface="Microsoft YaHei"/>
+              </a:defRPr>
+            </a:pPr>
+            <a:r>
+              <a:t>06</a:t>
+            </a:r>
+          </a:p>
+        </p:txBody>
+      </p:sp>
+      <p:sp>
+        <p:nvSpPr>
+          <p:cNvPr id="28" name="TextBox 27"/>
+          <p:cNvSpPr txBox="1"/>
+          <p:nvPr/>
+        </p:nvSpPr>
+        <p:spPr>
+          <a:xfrm>
+            <a:off x="2011680" y="3931920"/>
+            <a:ext cx="3657600" cy="292608"/>
+          </a:xfrm>
+          <a:prstGeom prst="rect">
+            <a:avLst/>
+          </a:prstGeom>
+          <a:noFill/>
+        </p:spPr>
+        <p:txBody>
+          <a:bodyPr wrap="square">
+            <a:spAutoFit/>
+          </a:bodyPr>
+          <a:lstStyle/>
+          <a:p>
+            <a:pPr algn="l">
+              <a:defRPr sz="1400" b="1">
+                <a:solidFill>
+                  <a:srgbClr val="FFFFFF"/>
+                </a:solidFill>
+                <a:latin typeface="Microsoft YaHei"/>
+              </a:defRPr>
+            </a:pPr>
+            <a:r>
+              <a:t>使 · 葡萄籽油</a:t>
+            </a:r>
+          </a:p>
+        </p:txBody>
+      </p:sp>
+      <p:sp>
+        <p:nvSpPr>
+          <p:cNvPr id="29" name="TextBox 28"/>
+          <p:cNvSpPr txBox="1"/>
+          <p:nvPr/>
+        </p:nvSpPr>
+        <p:spPr>
+          <a:xfrm>
+            <a:off x="5943600" y="3931920"/>
+            <a:ext cx="5029200" cy="292608"/>
+          </a:xfrm>
+          <a:prstGeom prst="rect">
+            <a:avLst/>
+          </a:prstGeom>
+          <a:noFill/>
+        </p:spPr>
+        <p:txBody>
+          <a:bodyPr wrap="square">
+            <a:spAutoFit/>
+          </a:bodyPr>
+          <a:lstStyle/>
+          <a:p>
+            <a:pPr algn="l">
+              <a:defRPr sz="1100" b="0">
+                <a:solidFill>
+                  <a:srgbClr val="6B7280"/>
+                </a:solidFill>
+                <a:latin typeface="Microsoft YaHei"/>
+              </a:defRPr>
+            </a:pPr>
+            <a:r>
+              <a:t>抗氧化守护 · 引药归经</a:t>
+            </a:r>
+          </a:p>
+        </p:txBody>
+      </p:sp>
+      <p:sp>
+        <p:nvSpPr>
+          <p:cNvPr id="30" name="Rounded Rectangle 29"/>
+          <p:cNvSpPr/>
+          <p:nvPr/>
+        </p:nvSpPr>
+        <p:spPr>
+          <a:xfrm>
+            <a:off x="914400" y="4334256"/>
+            <a:ext cx="10058400" cy="393192"/>
           </a:xfrm>
           <a:prstGeom prst="roundRect">
             <a:avLst>
@@ -12756,28 +13946,28 @@
       </p:sp>
       <p:sp>
         <p:nvSpPr>
-          <p:cNvPr id="19" name="TextBox 18"/>
-          <p:cNvSpPr txBox="1"/>
-          <p:nvPr/>
-        </p:nvSpPr>
-        <p:spPr>
-          <a:xfrm>
-            <a:off x="1188720" y="4069079"/>
-            <a:ext cx="731520" cy="457200"/>
-          </a:xfrm>
-          <a:prstGeom prst="rect">
-            <a:avLst/>
-          </a:prstGeom>
-          <a:noFill/>
-        </p:spPr>
-        <p:txBody>
-          <a:bodyPr wrap="square">
-            <a:spAutoFit/>
-          </a:bodyPr>
-          <a:lstStyle/>
-          <a:p>
-            <a:pPr algn="l">
-              <a:defRPr sz="2200" b="1">
+          <p:cNvPr id="31" name="TextBox 30"/>
+          <p:cNvSpPr txBox="1"/>
+          <p:nvPr/>
+        </p:nvSpPr>
+        <p:spPr>
+          <a:xfrm>
+            <a:off x="1188720" y="4379976"/>
+            <a:ext cx="640080" cy="292608"/>
+          </a:xfrm>
+          <a:prstGeom prst="rect">
+            <a:avLst/>
+          </a:prstGeom>
+          <a:noFill/>
+        </p:spPr>
+        <p:txBody>
+          <a:bodyPr wrap="square">
+            <a:spAutoFit/>
+          </a:bodyPr>
+          <a:lstStyle/>
+          <a:p>
+            <a:pPr algn="l">
+              <a:defRPr sz="1600" b="1">
                 <a:solidFill>
                   <a:srgbClr val="F59E0B"/>
                 </a:solidFill>
@@ -12785,35 +13975,35 @@
               </a:defRPr>
             </a:pPr>
             <a:r>
-              <a:t>04</a:t>
-            </a:r>
-          </a:p>
-        </p:txBody>
-      </p:sp>
-      <p:sp>
-        <p:nvSpPr>
-          <p:cNvPr id="20" name="TextBox 19"/>
-          <p:cNvSpPr txBox="1"/>
-          <p:nvPr/>
-        </p:nvSpPr>
-        <p:spPr>
-          <a:xfrm>
-            <a:off x="2011680" y="4069079"/>
-            <a:ext cx="3657600" cy="457200"/>
-          </a:xfrm>
-          <a:prstGeom prst="rect">
-            <a:avLst/>
-          </a:prstGeom>
-          <a:noFill/>
-        </p:spPr>
-        <p:txBody>
-          <a:bodyPr wrap="square">
-            <a:spAutoFit/>
-          </a:bodyPr>
-          <a:lstStyle/>
-          <a:p>
-            <a:pPr algn="l">
-              <a:defRPr sz="1800" b="1">
+              <a:t>07</a:t>
+            </a:r>
+          </a:p>
+        </p:txBody>
+      </p:sp>
+      <p:sp>
+        <p:nvSpPr>
+          <p:cNvPr id="32" name="TextBox 31"/>
+          <p:cNvSpPr txBox="1"/>
+          <p:nvPr/>
+        </p:nvSpPr>
+        <p:spPr>
+          <a:xfrm>
+            <a:off x="2011680" y="4379976"/>
+            <a:ext cx="3657600" cy="292608"/>
+          </a:xfrm>
+          <a:prstGeom prst="rect">
+            <a:avLst/>
+          </a:prstGeom>
+          <a:noFill/>
+        </p:spPr>
+        <p:txBody>
+          <a:bodyPr wrap="square">
+            <a:spAutoFit/>
+          </a:bodyPr>
+          <a:lstStyle/>
+          <a:p>
+            <a:pPr algn="l">
+              <a:defRPr sz="1400" b="1">
                 <a:solidFill>
                   <a:srgbClr val="FFFFFF"/>
                 </a:solidFill>
@@ -12821,35 +14011,35 @@
               </a:defRPr>
             </a:pPr>
             <a:r>
-              <a:t>谁最需要四籽油丸</a:t>
-            </a:r>
-          </a:p>
-        </p:txBody>
-      </p:sp>
-      <p:sp>
-        <p:nvSpPr>
-          <p:cNvPr id="21" name="TextBox 20"/>
-          <p:cNvSpPr txBox="1"/>
-          <p:nvPr/>
-        </p:nvSpPr>
-        <p:spPr>
-          <a:xfrm>
-            <a:off x="5943600" y="4114800"/>
-            <a:ext cx="5029200" cy="365760"/>
-          </a:xfrm>
-          <a:prstGeom prst="rect">
-            <a:avLst/>
-          </a:prstGeom>
-          <a:noFill/>
-        </p:spPr>
-        <p:txBody>
-          <a:bodyPr wrap="square">
-            <a:spAutoFit/>
-          </a:bodyPr>
-          <a:lstStyle/>
-          <a:p>
-            <a:pPr algn="l">
-              <a:defRPr sz="1300" b="0">
+              <a:t>四油合一的协同效应</a:t>
+            </a:r>
+          </a:p>
+        </p:txBody>
+      </p:sp>
+      <p:sp>
+        <p:nvSpPr>
+          <p:cNvPr id="33" name="TextBox 32"/>
+          <p:cNvSpPr txBox="1"/>
+          <p:nvPr/>
+        </p:nvSpPr>
+        <p:spPr>
+          <a:xfrm>
+            <a:off x="5943600" y="4379976"/>
+            <a:ext cx="5029200" cy="292608"/>
+          </a:xfrm>
+          <a:prstGeom prst="rect">
+            <a:avLst/>
+          </a:prstGeom>
+          <a:noFill/>
+        </p:spPr>
+        <p:txBody>
+          <a:bodyPr wrap="square">
+            <a:spAutoFit/>
+          </a:bodyPr>
+          <a:lstStyle/>
+          <a:p>
+            <a:pPr algn="l">
+              <a:defRPr sz="1100" b="0">
                 <a:solidFill>
                   <a:srgbClr val="6B7280"/>
                 </a:solidFill>
@@ -12857,21 +14047,174 @@
               </a:defRPr>
             </a:pPr>
             <a:r>
-              <a:t>适用人群分析</a:t>
-            </a:r>
-          </a:p>
-        </p:txBody>
-      </p:sp>
-      <p:sp>
-        <p:nvSpPr>
-          <p:cNvPr id="22" name="Rounded Rectangle 21"/>
+              <a:t>1+1+1+1 &gt; 4</a:t>
+            </a:r>
+          </a:p>
+        </p:txBody>
+      </p:sp>
+      <p:sp>
+        <p:nvSpPr>
+          <p:cNvPr id="34" name="Rounded Rectangle 33"/>
           <p:cNvSpPr/>
           <p:nvPr/>
         </p:nvSpPr>
         <p:spPr>
           <a:xfrm>
-            <a:off x="914400" y="4754880"/>
-            <a:ext cx="10058400" cy="658368"/>
+            <a:off x="914400" y="4782312"/>
+            <a:ext cx="10058400" cy="393192"/>
+          </a:xfrm>
+          <a:prstGeom prst="roundRect">
+            <a:avLst>
+              <a:gd name="adj" fmla="val 5000"/>
+            </a:avLst>
+          </a:prstGeom>
+          <a:solidFill>
+            <a:srgbClr val="25553F"/>
+          </a:solidFill>
+          <a:ln>
+            <a:noFill/>
+          </a:ln>
+        </p:spPr>
+        <p:style>
+          <a:lnRef idx="1">
+            <a:schemeClr val="accent1"/>
+          </a:lnRef>
+          <a:fillRef idx="3">
+            <a:schemeClr val="accent1"/>
+          </a:fillRef>
+          <a:effectRef idx="2">
+            <a:schemeClr val="accent1"/>
+          </a:effectRef>
+          <a:fontRef idx="minor">
+            <a:schemeClr val="lt1"/>
+          </a:fontRef>
+        </p:style>
+        <p:txBody>
+          <a:bodyPr rtlCol="0" anchor="ctr"/>
+          <a:lstStyle/>
+          <a:p>
+            <a:pPr algn="ctr"/>
+          </a:p>
+        </p:txBody>
+      </p:sp>
+      <p:sp>
+        <p:nvSpPr>
+          <p:cNvPr id="35" name="TextBox 34"/>
+          <p:cNvSpPr txBox="1"/>
+          <p:nvPr/>
+        </p:nvSpPr>
+        <p:spPr>
+          <a:xfrm>
+            <a:off x="1188720" y="4828031"/>
+            <a:ext cx="640080" cy="292608"/>
+          </a:xfrm>
+          <a:prstGeom prst="rect">
+            <a:avLst/>
+          </a:prstGeom>
+          <a:noFill/>
+        </p:spPr>
+        <p:txBody>
+          <a:bodyPr wrap="square">
+            <a:spAutoFit/>
+          </a:bodyPr>
+          <a:lstStyle/>
+          <a:p>
+            <a:pPr algn="l">
+              <a:defRPr sz="1600" b="1">
+                <a:solidFill>
+                  <a:srgbClr val="F59E0B"/>
+                </a:solidFill>
+                <a:latin typeface="Microsoft YaHei"/>
+              </a:defRPr>
+            </a:pPr>
+            <a:r>
+              <a:t>08</a:t>
+            </a:r>
+          </a:p>
+        </p:txBody>
+      </p:sp>
+      <p:sp>
+        <p:nvSpPr>
+          <p:cNvPr id="36" name="TextBox 35"/>
+          <p:cNvSpPr txBox="1"/>
+          <p:nvPr/>
+        </p:nvSpPr>
+        <p:spPr>
+          <a:xfrm>
+            <a:off x="2011680" y="4828031"/>
+            <a:ext cx="3657600" cy="292608"/>
+          </a:xfrm>
+          <a:prstGeom prst="rect">
+            <a:avLst/>
+          </a:prstGeom>
+          <a:noFill/>
+        </p:spPr>
+        <p:txBody>
+          <a:bodyPr wrap="square">
+            <a:spAutoFit/>
+          </a:bodyPr>
+          <a:lstStyle/>
+          <a:p>
+            <a:pPr algn="l">
+              <a:defRPr sz="1400" b="1">
+                <a:solidFill>
+                  <a:srgbClr val="FFFFFF"/>
+                </a:solidFill>
+                <a:latin typeface="Microsoft YaHei"/>
+              </a:defRPr>
+            </a:pPr>
+            <a:r>
+              <a:t>"以油去油"的原理</a:t>
+            </a:r>
+          </a:p>
+        </p:txBody>
+      </p:sp>
+      <p:sp>
+        <p:nvSpPr>
+          <p:cNvPr id="37" name="TextBox 36"/>
+          <p:cNvSpPr txBox="1"/>
+          <p:nvPr/>
+        </p:nvSpPr>
+        <p:spPr>
+          <a:xfrm>
+            <a:off x="5943600" y="4828031"/>
+            <a:ext cx="5029200" cy="292608"/>
+          </a:xfrm>
+          <a:prstGeom prst="rect">
+            <a:avLst/>
+          </a:prstGeom>
+          <a:noFill/>
+        </p:spPr>
+        <p:txBody>
+          <a:bodyPr wrap="square">
+            <a:spAutoFit/>
+          </a:bodyPr>
+          <a:lstStyle/>
+          <a:p>
+            <a:pPr algn="l">
+              <a:defRPr sz="1100" b="0">
+                <a:solidFill>
+                  <a:srgbClr val="6B7280"/>
+                </a:solidFill>
+                <a:latin typeface="Microsoft YaHei"/>
+              </a:defRPr>
+            </a:pPr>
+            <a:r>
+              <a:t>好油如何帮助身体排出坏油</a:t>
+            </a:r>
+          </a:p>
+        </p:txBody>
+      </p:sp>
+      <p:sp>
+        <p:nvSpPr>
+          <p:cNvPr id="38" name="Rounded Rectangle 37"/>
+          <p:cNvSpPr/>
+          <p:nvPr/>
+        </p:nvSpPr>
+        <p:spPr>
+          <a:xfrm>
+            <a:off x="914400" y="5230368"/>
+            <a:ext cx="10058400" cy="393192"/>
           </a:xfrm>
           <a:prstGeom prst="roundRect">
             <a:avLst>
@@ -12909,28 +14252,28 @@
       </p:sp>
       <p:sp>
         <p:nvSpPr>
-          <p:cNvPr id="23" name="TextBox 22"/>
-          <p:cNvSpPr txBox="1"/>
-          <p:nvPr/>
-        </p:nvSpPr>
-        <p:spPr>
-          <a:xfrm>
-            <a:off x="1188720" y="4846320"/>
-            <a:ext cx="731520" cy="457200"/>
-          </a:xfrm>
-          <a:prstGeom prst="rect">
-            <a:avLst/>
-          </a:prstGeom>
-          <a:noFill/>
-        </p:spPr>
-        <p:txBody>
-          <a:bodyPr wrap="square">
-            <a:spAutoFit/>
-          </a:bodyPr>
-          <a:lstStyle/>
-          <a:p>
-            <a:pPr algn="l">
-              <a:defRPr sz="2200" b="1">
+          <p:cNvPr id="39" name="TextBox 38"/>
+          <p:cNvSpPr txBox="1"/>
+          <p:nvPr/>
+        </p:nvSpPr>
+        <p:spPr>
+          <a:xfrm>
+            <a:off x="1188720" y="5276088"/>
+            <a:ext cx="640080" cy="292608"/>
+          </a:xfrm>
+          <a:prstGeom prst="rect">
+            <a:avLst/>
+          </a:prstGeom>
+          <a:noFill/>
+        </p:spPr>
+        <p:txBody>
+          <a:bodyPr wrap="square">
+            <a:spAutoFit/>
+          </a:bodyPr>
+          <a:lstStyle/>
+          <a:p>
+            <a:pPr algn="l">
+              <a:defRPr sz="1600" b="1">
                 <a:solidFill>
                   <a:srgbClr val="F59E0B"/>
                 </a:solidFill>
@@ -12938,35 +14281,35 @@
               </a:defRPr>
             </a:pPr>
             <a:r>
-              <a:t>05</a:t>
-            </a:r>
-          </a:p>
-        </p:txBody>
-      </p:sp>
-      <p:sp>
-        <p:nvSpPr>
-          <p:cNvPr id="24" name="TextBox 23"/>
-          <p:cNvSpPr txBox="1"/>
-          <p:nvPr/>
-        </p:nvSpPr>
-        <p:spPr>
-          <a:xfrm>
-            <a:off x="2011680" y="4846320"/>
-            <a:ext cx="3657600" cy="457200"/>
-          </a:xfrm>
-          <a:prstGeom prst="rect">
-            <a:avLst/>
-          </a:prstGeom>
-          <a:noFill/>
-        </p:spPr>
-        <p:txBody>
-          <a:bodyPr wrap="square">
-            <a:spAutoFit/>
-          </a:bodyPr>
-          <a:lstStyle/>
-          <a:p>
-            <a:pPr algn="l">
-              <a:defRPr sz="1800" b="1">
+              <a:t>09</a:t>
+            </a:r>
+          </a:p>
+        </p:txBody>
+      </p:sp>
+      <p:sp>
+        <p:nvSpPr>
+          <p:cNvPr id="40" name="TextBox 39"/>
+          <p:cNvSpPr txBox="1"/>
+          <p:nvPr/>
+        </p:nvSpPr>
+        <p:spPr>
+          <a:xfrm>
+            <a:off x="2011680" y="5276088"/>
+            <a:ext cx="3657600" cy="292608"/>
+          </a:xfrm>
+          <a:prstGeom prst="rect">
+            <a:avLst/>
+          </a:prstGeom>
+          <a:noFill/>
+        </p:spPr>
+        <p:txBody>
+          <a:bodyPr wrap="square">
+            <a:spAutoFit/>
+          </a:bodyPr>
+          <a:lstStyle/>
+          <a:p>
+            <a:pPr algn="l">
+              <a:defRPr sz="1400" b="1">
                 <a:solidFill>
                   <a:srgbClr val="FFFFFF"/>
                 </a:solidFill>
@@ -12974,6 +14317,159 @@
               </a:defRPr>
             </a:pPr>
             <a:r>
+              <a:t>谁最需要四籽油丸</a:t>
+            </a:r>
+          </a:p>
+        </p:txBody>
+      </p:sp>
+      <p:sp>
+        <p:nvSpPr>
+          <p:cNvPr id="41" name="TextBox 40"/>
+          <p:cNvSpPr txBox="1"/>
+          <p:nvPr/>
+        </p:nvSpPr>
+        <p:spPr>
+          <a:xfrm>
+            <a:off x="5943600" y="5276088"/>
+            <a:ext cx="5029200" cy="292608"/>
+          </a:xfrm>
+          <a:prstGeom prst="rect">
+            <a:avLst/>
+          </a:prstGeom>
+          <a:noFill/>
+        </p:spPr>
+        <p:txBody>
+          <a:bodyPr wrap="square">
+            <a:spAutoFit/>
+          </a:bodyPr>
+          <a:lstStyle/>
+          <a:p>
+            <a:pPr algn="l">
+              <a:defRPr sz="1100" b="0">
+                <a:solidFill>
+                  <a:srgbClr val="6B7280"/>
+                </a:solidFill>
+                <a:latin typeface="Microsoft YaHei"/>
+              </a:defRPr>
+            </a:pPr>
+            <a:r>
+              <a:t>适用人群分析</a:t>
+            </a:r>
+          </a:p>
+        </p:txBody>
+      </p:sp>
+      <p:sp>
+        <p:nvSpPr>
+          <p:cNvPr id="42" name="Rounded Rectangle 41"/>
+          <p:cNvSpPr/>
+          <p:nvPr/>
+        </p:nvSpPr>
+        <p:spPr>
+          <a:xfrm>
+            <a:off x="914400" y="5678424"/>
+            <a:ext cx="10058400" cy="393192"/>
+          </a:xfrm>
+          <a:prstGeom prst="roundRect">
+            <a:avLst>
+              <a:gd name="adj" fmla="val 5000"/>
+            </a:avLst>
+          </a:prstGeom>
+          <a:solidFill>
+            <a:srgbClr val="25553F"/>
+          </a:solidFill>
+          <a:ln>
+            <a:noFill/>
+          </a:ln>
+        </p:spPr>
+        <p:style>
+          <a:lnRef idx="1">
+            <a:schemeClr val="accent1"/>
+          </a:lnRef>
+          <a:fillRef idx="3">
+            <a:schemeClr val="accent1"/>
+          </a:fillRef>
+          <a:effectRef idx="2">
+            <a:schemeClr val="accent1"/>
+          </a:effectRef>
+          <a:fontRef idx="minor">
+            <a:schemeClr val="lt1"/>
+          </a:fontRef>
+        </p:style>
+        <p:txBody>
+          <a:bodyPr rtlCol="0" anchor="ctr"/>
+          <a:lstStyle/>
+          <a:p>
+            <a:pPr algn="ctr"/>
+          </a:p>
+        </p:txBody>
+      </p:sp>
+      <p:sp>
+        <p:nvSpPr>
+          <p:cNvPr id="43" name="TextBox 42"/>
+          <p:cNvSpPr txBox="1"/>
+          <p:nvPr/>
+        </p:nvSpPr>
+        <p:spPr>
+          <a:xfrm>
+            <a:off x="1188720" y="5724144"/>
+            <a:ext cx="640080" cy="292608"/>
+          </a:xfrm>
+          <a:prstGeom prst="rect">
+            <a:avLst/>
+          </a:prstGeom>
+          <a:noFill/>
+        </p:spPr>
+        <p:txBody>
+          <a:bodyPr wrap="square">
+            <a:spAutoFit/>
+          </a:bodyPr>
+          <a:lstStyle/>
+          <a:p>
+            <a:pPr algn="l">
+              <a:defRPr sz="1600" b="1">
+                <a:solidFill>
+                  <a:srgbClr val="F59E0B"/>
+                </a:solidFill>
+                <a:latin typeface="Microsoft YaHei"/>
+              </a:defRPr>
+            </a:pPr>
+            <a:r>
+              <a:t>10</a:t>
+            </a:r>
+          </a:p>
+        </p:txBody>
+      </p:sp>
+      <p:sp>
+        <p:nvSpPr>
+          <p:cNvPr id="44" name="TextBox 43"/>
+          <p:cNvSpPr txBox="1"/>
+          <p:nvPr/>
+        </p:nvSpPr>
+        <p:spPr>
+          <a:xfrm>
+            <a:off x="2011680" y="5724144"/>
+            <a:ext cx="3657600" cy="292608"/>
+          </a:xfrm>
+          <a:prstGeom prst="rect">
+            <a:avLst/>
+          </a:prstGeom>
+          <a:noFill/>
+        </p:spPr>
+        <p:txBody>
+          <a:bodyPr wrap="square">
+            <a:spAutoFit/>
+          </a:bodyPr>
+          <a:lstStyle/>
+          <a:p>
+            <a:pPr algn="l">
+              <a:defRPr sz="1400" b="1">
+                <a:solidFill>
+                  <a:srgbClr val="FFFFFF"/>
+                </a:solidFill>
+                <a:latin typeface="Microsoft YaHei"/>
+              </a:defRPr>
+            </a:pPr>
+            <a:r>
               <a:t>科学依据与数据</a:t>
             </a:r>
           </a:p>
@@ -12981,28 +14477,28 @@
       </p:sp>
       <p:sp>
         <p:nvSpPr>
-          <p:cNvPr id="25" name="TextBox 24"/>
-          <p:cNvSpPr txBox="1"/>
-          <p:nvPr/>
-        </p:nvSpPr>
-        <p:spPr>
-          <a:xfrm>
-            <a:off x="5943600" y="4892040"/>
-            <a:ext cx="5029200" cy="365760"/>
-          </a:xfrm>
-          <a:prstGeom prst="rect">
-            <a:avLst/>
-          </a:prstGeom>
-          <a:noFill/>
-        </p:spPr>
-        <p:txBody>
-          <a:bodyPr wrap="square">
-            <a:spAutoFit/>
-          </a:bodyPr>
-          <a:lstStyle/>
-          <a:p>
-            <a:pPr algn="l">
-              <a:defRPr sz="1300" b="0">
+          <p:cNvPr id="45" name="TextBox 44"/>
+          <p:cNvSpPr txBox="1"/>
+          <p:nvPr/>
+        </p:nvSpPr>
+        <p:spPr>
+          <a:xfrm>
+            <a:off x="5943600" y="5724144"/>
+            <a:ext cx="5029200" cy="292608"/>
+          </a:xfrm>
+          <a:prstGeom prst="rect">
+            <a:avLst/>
+          </a:prstGeom>
+          <a:noFill/>
+        </p:spPr>
+        <p:txBody>
+          <a:bodyPr wrap="square">
+            <a:spAutoFit/>
+          </a:bodyPr>
+          <a:lstStyle/>
+          <a:p>
+            <a:pPr algn="l">
+              <a:defRPr sz="1100" b="0">
                 <a:solidFill>
                   <a:srgbClr val="6B7280"/>
                 </a:solidFill>
@@ -13017,14 +14513,14 @@
       </p:sp>
       <p:sp>
         <p:nvSpPr>
-          <p:cNvPr id="26" name="Rounded Rectangle 25"/>
+          <p:cNvPr id="46" name="Rounded Rectangle 45"/>
           <p:cNvSpPr/>
           <p:nvPr/>
         </p:nvSpPr>
         <p:spPr>
           <a:xfrm>
-            <a:off x="914400" y="5532120"/>
-            <a:ext cx="10058400" cy="658368"/>
+            <a:off x="914400" y="6126480"/>
+            <a:ext cx="10058400" cy="393192"/>
           </a:xfrm>
           <a:prstGeom prst="roundRect">
             <a:avLst>
@@ -13062,28 +14558,28 @@
       </p:sp>
       <p:sp>
         <p:nvSpPr>
-          <p:cNvPr id="27" name="TextBox 26"/>
-          <p:cNvSpPr txBox="1"/>
-          <p:nvPr/>
-        </p:nvSpPr>
-        <p:spPr>
-          <a:xfrm>
-            <a:off x="1188720" y="5623559"/>
-            <a:ext cx="731520" cy="457200"/>
-          </a:xfrm>
-          <a:prstGeom prst="rect">
-            <a:avLst/>
-          </a:prstGeom>
-          <a:noFill/>
-        </p:spPr>
-        <p:txBody>
-          <a:bodyPr wrap="square">
-            <a:spAutoFit/>
-          </a:bodyPr>
-          <a:lstStyle/>
-          <a:p>
-            <a:pPr algn="l">
-              <a:defRPr sz="2200" b="1">
+          <p:cNvPr id="47" name="TextBox 46"/>
+          <p:cNvSpPr txBox="1"/>
+          <p:nvPr/>
+        </p:nvSpPr>
+        <p:spPr>
+          <a:xfrm>
+            <a:off x="1188720" y="6172200"/>
+            <a:ext cx="640080" cy="292608"/>
+          </a:xfrm>
+          <a:prstGeom prst="rect">
+            <a:avLst/>
+          </a:prstGeom>
+          <a:noFill/>
+        </p:spPr>
+        <p:txBody>
+          <a:bodyPr wrap="square">
+            <a:spAutoFit/>
+          </a:bodyPr>
+          <a:lstStyle/>
+          <a:p>
+            <a:pPr algn="l">
+              <a:defRPr sz="1600" b="1">
                 <a:solidFill>
                   <a:srgbClr val="F59E0B"/>
                 </a:solidFill>
@@ -13091,35 +14587,35 @@
               </a:defRPr>
             </a:pPr>
             <a:r>
-              <a:t>06</a:t>
-            </a:r>
-          </a:p>
-        </p:txBody>
-      </p:sp>
-      <p:sp>
-        <p:nvSpPr>
-          <p:cNvPr id="28" name="TextBox 27"/>
-          <p:cNvSpPr txBox="1"/>
-          <p:nvPr/>
-        </p:nvSpPr>
-        <p:spPr>
-          <a:xfrm>
-            <a:off x="2011680" y="5623559"/>
-            <a:ext cx="3657600" cy="457200"/>
-          </a:xfrm>
-          <a:prstGeom prst="rect">
-            <a:avLst/>
-          </a:prstGeom>
-          <a:noFill/>
-        </p:spPr>
-        <p:txBody>
-          <a:bodyPr wrap="square">
-            <a:spAutoFit/>
-          </a:bodyPr>
-          <a:lstStyle/>
-          <a:p>
-            <a:pPr algn="l">
-              <a:defRPr sz="1800" b="1">
+              <a:t>11</a:t>
+            </a:r>
+          </a:p>
+        </p:txBody>
+      </p:sp>
+      <p:sp>
+        <p:nvSpPr>
+          <p:cNvPr id="48" name="TextBox 47"/>
+          <p:cNvSpPr txBox="1"/>
+          <p:nvPr/>
+        </p:nvSpPr>
+        <p:spPr>
+          <a:xfrm>
+            <a:off x="2011680" y="6172200"/>
+            <a:ext cx="3657600" cy="292608"/>
+          </a:xfrm>
+          <a:prstGeom prst="rect">
+            <a:avLst/>
+          </a:prstGeom>
+          <a:noFill/>
+        </p:spPr>
+        <p:txBody>
+          <a:bodyPr wrap="square">
+            <a:spAutoFit/>
+          </a:bodyPr>
+          <a:lstStyle/>
+          <a:p>
+            <a:pPr algn="l">
+              <a:defRPr sz="1400" b="1">
                 <a:solidFill>
                   <a:srgbClr val="FFFFFF"/>
                 </a:solidFill>
@@ -13134,28 +14630,28 @@
       </p:sp>
       <p:sp>
         <p:nvSpPr>
-          <p:cNvPr id="29" name="TextBox 28"/>
-          <p:cNvSpPr txBox="1"/>
-          <p:nvPr/>
-        </p:nvSpPr>
-        <p:spPr>
-          <a:xfrm>
-            <a:off x="5943600" y="5669280"/>
-            <a:ext cx="5029200" cy="365760"/>
-          </a:xfrm>
-          <a:prstGeom prst="rect">
-            <a:avLst/>
-          </a:prstGeom>
-          <a:noFill/>
-        </p:spPr>
-        <p:txBody>
-          <a:bodyPr wrap="square">
-            <a:spAutoFit/>
-          </a:bodyPr>
-          <a:lstStyle/>
-          <a:p>
-            <a:pPr algn="l">
-              <a:defRPr sz="1300" b="0">
+          <p:cNvPr id="49" name="TextBox 48"/>
+          <p:cNvSpPr txBox="1"/>
+          <p:nvPr/>
+        </p:nvSpPr>
+        <p:spPr>
+          <a:xfrm>
+            <a:off x="5943600" y="6172200"/>
+            <a:ext cx="5029200" cy="292608"/>
+          </a:xfrm>
+          <a:prstGeom prst="rect">
+            <a:avLst/>
+          </a:prstGeom>
+          <a:noFill/>
+        </p:spPr>
+        <p:txBody>
+          <a:bodyPr wrap="square">
+            <a:spAutoFit/>
+          </a:bodyPr>
+          <a:lstStyle/>
+          <a:p>
+            <a:pPr algn="l">
+              <a:defRPr sz="1100" b="0">
                 <a:solidFill>
                   <a:srgbClr val="6B7280"/>
                 </a:solidFill>
@@ -13170,7 +14666,7 @@
       </p:sp>
       <p:sp>
         <p:nvSpPr>
-          <p:cNvPr id="30" name="TextBox 29"/>
+          <p:cNvPr id="50" name="TextBox 49"/>
           <p:cNvSpPr txBox="1"/>
           <p:nvPr/>
         </p:nvSpPr>
@@ -13199,7 +14695,7 @@
               </a:defRPr>
             </a:pPr>
             <a:r>
-              <a:t>2/18</a:t>
+              <a:t>2/19</a:t>
             </a:r>
           </a:p>
         </p:txBody>
@@ -13520,7 +15016,7 @@
               </a:defRPr>
             </a:pPr>
             <a:r>
-              <a:t>🍇 葡萄籽油  🌾 亚麻籽油</a:t>
+              <a:t>👑 紫苏籽油（君）  🔷 亚麻籽油（臣）</a:t>
             </a:r>
           </a:p>
           <a:p>
@@ -13536,7 +15032,7 @@
               </a:defRPr>
             </a:pPr>
             <a:r>
-              <a:t>🌿 山茶籽油  🍃 紫苏籽油</a:t>
+              <a:t>🌿 山茶籽油（佐）  🍇 葡萄籽油（使）</a:t>
             </a:r>
           </a:p>
           <a:p>
@@ -13565,7 +15061,7 @@
               </a:defRPr>
             </a:pPr>
             <a:r>
-              <a:t>经过科学配比、低温萃取制成的膳食补充剂。</a:t>
+              <a:t>按照中医「君臣佐使」配伍理论，</a:t>
             </a:r>
           </a:p>
           <a:p>
@@ -13580,6 +15076,9 @@
                 <a:latin typeface="Microsoft YaHei"/>
               </a:defRPr>
             </a:pPr>
+            <a:r>
+              <a:t>科学配比、低温萃取制成的膳食补充剂。</a:t>
+            </a:r>
           </a:p>
           <a:p>
             <a:pPr algn="l">
@@ -13593,9 +15092,6 @@
                 <a:latin typeface="Microsoft YaHei"/>
               </a:defRPr>
             </a:pPr>
-            <a:r>
-              <a:t>它属于"药食同源"理念下的健康食品，</a:t>
-            </a:r>
           </a:p>
           <a:p>
             <a:pPr algn="l">
@@ -13610,7 +15106,7 @@
               </a:defRPr>
             </a:pPr>
             <a:r>
-              <a:t>采用小分子纳米工艺锁留营养成分，</a:t>
+              <a:t>它属于"药食同源"理念下的健康食品，</a:t>
             </a:r>
           </a:p>
           <a:p>
@@ -13626,7 +15122,7 @@
               </a:defRPr>
             </a:pPr>
             <a:r>
-              <a:t>帮助身体以"好油"替换"坏油"，</a:t>
+              <a:t>采用小分子纳米工艺锁留营养成分，</a:t>
             </a:r>
           </a:p>
           <a:p>
@@ -13642,7 +15138,7 @@
               </a:defRPr>
             </a:pPr>
             <a:r>
-              <a:t>达到调理身体的辅助作用。</a:t>
+              <a:t>帮助身体以"好油"替换"坏油"。</a:t>
             </a:r>
           </a:p>
         </p:txBody>
@@ -13759,7 +15255,7 @@
               </a:defRPr>
             </a:pPr>
             <a:r>
-              <a:t>🔬  科学配比复方</a:t>
+              <a:t>🔬  君臣佐使配比</a:t>
             </a:r>
           </a:p>
         </p:txBody>
@@ -13939,7 +15435,7 @@
               </a:defRPr>
             </a:pPr>
             <a:r>
-              <a:t>3/18</a:t>
+              <a:t>3/19</a:t>
             </a:r>
           </a:p>
         </p:txBody>
@@ -14095,7 +15591,7 @@
               </a:defRPr>
             </a:pPr>
             <a:r>
-              <a:t>🔬 四种籽油概览</a:t>
+              <a:t>🏛️ 君臣佐使 · 四籽配伍理论</a:t>
             </a:r>
           </a:p>
         </p:txBody>
@@ -14131,7 +15627,7 @@
               </a:defRPr>
             </a:pPr>
             <a:r>
-              <a:t>四大核心成分，协同守护健康</a:t>
+              <a:t>源自《黄帝内经》的配伍智慧，四种籽油各司其职</a:t>
             </a:r>
           </a:p>
         </p:txBody>
@@ -14145,7 +15641,7 @@
         <p:spPr>
           <a:xfrm>
             <a:off x="457200" y="1645920"/>
-            <a:ext cx="2697480" cy="4389120"/>
+            <a:ext cx="5486400" cy="2103120"/>
           </a:xfrm>
           <a:prstGeom prst="roundRect">
             <a:avLst>
@@ -14190,7 +15686,679 @@
         <p:spPr>
           <a:xfrm>
             <a:off x="457200" y="1645920"/>
-            <a:ext cx="2697480" cy="73152"/>
+            <a:ext cx="5486400" cy="73152"/>
+          </a:xfrm>
+          <a:prstGeom prst="rect">
+            <a:avLst/>
+          </a:prstGeom>
+          <a:solidFill>
+            <a:srgbClr val="DC2626"/>
+          </a:solidFill>
+          <a:ln>
+            <a:noFill/>
+          </a:ln>
+        </p:spPr>
+        <p:style>
+          <a:lnRef idx="1">
+            <a:schemeClr val="accent1"/>
+          </a:lnRef>
+          <a:fillRef idx="3">
+            <a:schemeClr val="accent1"/>
+          </a:fillRef>
+          <a:effectRef idx="2">
+            <a:schemeClr val="accent1"/>
+          </a:effectRef>
+          <a:fontRef idx="minor">
+            <a:schemeClr val="lt1"/>
+          </a:fontRef>
+        </p:style>
+        <p:txBody>
+          <a:bodyPr rtlCol="0" anchor="ctr"/>
+          <a:lstStyle/>
+          <a:p>
+            <a:pPr algn="ctr"/>
+          </a:p>
+        </p:txBody>
+      </p:sp>
+      <p:sp>
+        <p:nvSpPr>
+          <p:cNvPr id="8" name="Rounded Rectangle 7"/>
+          <p:cNvSpPr/>
+          <p:nvPr/>
+        </p:nvSpPr>
+        <p:spPr>
+          <a:xfrm>
+            <a:off x="4663440" y="1828800"/>
+            <a:ext cx="1097280" cy="320040"/>
+          </a:xfrm>
+          <a:prstGeom prst="roundRect">
+            <a:avLst/>
+          </a:prstGeom>
+          <a:solidFill>
+            <a:srgbClr val="DC2626"/>
+          </a:solidFill>
+          <a:ln>
+            <a:noFill/>
+          </a:ln>
+        </p:spPr>
+        <p:style>
+          <a:lnRef idx="1">
+            <a:schemeClr val="accent1"/>
+          </a:lnRef>
+          <a:fillRef idx="3">
+            <a:schemeClr val="accent1"/>
+          </a:fillRef>
+          <a:effectRef idx="2">
+            <a:schemeClr val="accent1"/>
+          </a:effectRef>
+          <a:fontRef idx="minor">
+            <a:schemeClr val="lt1"/>
+          </a:fontRef>
+        </p:style>
+        <p:txBody>
+          <a:bodyPr rtlCol="0" anchor="ctr"/>
+          <a:lstStyle/>
+          <a:p>
+            <a:pPr algn="ctr">
+              <a:defRPr sz="1100" b="1">
+                <a:solidFill>
+                  <a:srgbClr val="FFFFFF"/>
+                </a:solidFill>
+              </a:defRPr>
+            </a:pPr>
+            <a:r>
+              <a:t>核心主力</a:t>
+            </a:r>
+          </a:p>
+        </p:txBody>
+      </p:sp>
+      <p:sp>
+        <p:nvSpPr>
+          <p:cNvPr id="9" name="TextBox 8"/>
+          <p:cNvSpPr txBox="1"/>
+          <p:nvPr/>
+        </p:nvSpPr>
+        <p:spPr>
+          <a:xfrm>
+            <a:off x="640080" y="1783080"/>
+            <a:ext cx="3657600" cy="457200"/>
+          </a:xfrm>
+          <a:prstGeom prst="rect">
+            <a:avLst/>
+          </a:prstGeom>
+          <a:noFill/>
+        </p:spPr>
+        <p:txBody>
+          <a:bodyPr wrap="square">
+            <a:spAutoFit/>
+          </a:bodyPr>
+          <a:lstStyle/>
+          <a:p>
+            <a:pPr algn="l">
+              <a:defRPr sz="2000" b="1">
+                <a:solidFill>
+                  <a:srgbClr val="FFFFFF"/>
+                </a:solidFill>
+                <a:latin typeface="Microsoft YaHei"/>
+              </a:defRPr>
+            </a:pPr>
+            <a:r>
+              <a:t>👑 君 · 紫苏籽油</a:t>
+            </a:r>
+          </a:p>
+        </p:txBody>
+      </p:sp>
+      <p:sp>
+        <p:nvSpPr>
+          <p:cNvPr id="10" name="TextBox 9"/>
+          <p:cNvSpPr txBox="1"/>
+          <p:nvPr/>
+        </p:nvSpPr>
+        <p:spPr>
+          <a:xfrm>
+            <a:off x="640080" y="2286000"/>
+            <a:ext cx="5029200" cy="1280160"/>
+          </a:xfrm>
+          <a:prstGeom prst="rect">
+            <a:avLst/>
+          </a:prstGeom>
+          <a:noFill/>
+        </p:spPr>
+        <p:txBody>
+          <a:bodyPr wrap="square">
+            <a:spAutoFit/>
+          </a:bodyPr>
+          <a:lstStyle/>
+          <a:p>
+            <a:pPr algn="l">
+              <a:defRPr sz="1300" b="0">
+                <a:solidFill>
+                  <a:srgbClr val="F0FDF4"/>
+                </a:solidFill>
+                <a:latin typeface="Microsoft YaHei"/>
+              </a:defRPr>
+            </a:pPr>
+            <a:r>
+              <a:t>针对主要问题（高血脂/高血压）</a:t>
+            </a:r>
+            <a:br/>
+            <a:r>
+              <a:t>α-亚麻酸含量最高 54%-67%</a:t>
+            </a:r>
+            <a:br/>
+            <a:r>
+              <a:t>唯一入选国家药食同源目录</a:t>
+            </a:r>
+            <a:br/>
+            <a:r>
+              <a:t>统领全局，直击病所</a:t>
+            </a:r>
+          </a:p>
+        </p:txBody>
+      </p:sp>
+      <p:sp>
+        <p:nvSpPr>
+          <p:cNvPr id="11" name="Rounded Rectangle 10"/>
+          <p:cNvSpPr/>
+          <p:nvPr/>
+        </p:nvSpPr>
+        <p:spPr>
+          <a:xfrm>
+            <a:off x="6217920" y="1645920"/>
+            <a:ext cx="5486400" cy="2103120"/>
+          </a:xfrm>
+          <a:prstGeom prst="roundRect">
+            <a:avLst>
+              <a:gd name="adj" fmla="val 5000"/>
+            </a:avLst>
+          </a:prstGeom>
+          <a:solidFill>
+            <a:srgbClr val="224D38"/>
+          </a:solidFill>
+          <a:ln>
+            <a:noFill/>
+          </a:ln>
+        </p:spPr>
+        <p:style>
+          <a:lnRef idx="1">
+            <a:schemeClr val="accent1"/>
+          </a:lnRef>
+          <a:fillRef idx="3">
+            <a:schemeClr val="accent1"/>
+          </a:fillRef>
+          <a:effectRef idx="2">
+            <a:schemeClr val="accent1"/>
+          </a:effectRef>
+          <a:fontRef idx="minor">
+            <a:schemeClr val="lt1"/>
+          </a:fontRef>
+        </p:style>
+        <p:txBody>
+          <a:bodyPr rtlCol="0" anchor="ctr"/>
+          <a:lstStyle/>
+          <a:p>
+            <a:pPr algn="ctr"/>
+          </a:p>
+        </p:txBody>
+      </p:sp>
+      <p:sp>
+        <p:nvSpPr>
+          <p:cNvPr id="12" name="Rectangle 11"/>
+          <p:cNvSpPr/>
+          <p:nvPr/>
+        </p:nvSpPr>
+        <p:spPr>
+          <a:xfrm>
+            <a:off x="6217920" y="1645920"/>
+            <a:ext cx="5486400" cy="73152"/>
+          </a:xfrm>
+          <a:prstGeom prst="rect">
+            <a:avLst/>
+          </a:prstGeom>
+          <a:solidFill>
+            <a:srgbClr val="2569EB"/>
+          </a:solidFill>
+          <a:ln>
+            <a:noFill/>
+          </a:ln>
+        </p:spPr>
+        <p:style>
+          <a:lnRef idx="1">
+            <a:schemeClr val="accent1"/>
+          </a:lnRef>
+          <a:fillRef idx="3">
+            <a:schemeClr val="accent1"/>
+          </a:fillRef>
+          <a:effectRef idx="2">
+            <a:schemeClr val="accent1"/>
+          </a:effectRef>
+          <a:fontRef idx="minor">
+            <a:schemeClr val="lt1"/>
+          </a:fontRef>
+        </p:style>
+        <p:txBody>
+          <a:bodyPr rtlCol="0" anchor="ctr"/>
+          <a:lstStyle/>
+          <a:p>
+            <a:pPr algn="ctr"/>
+          </a:p>
+        </p:txBody>
+      </p:sp>
+      <p:sp>
+        <p:nvSpPr>
+          <p:cNvPr id="13" name="Rounded Rectangle 12"/>
+          <p:cNvSpPr/>
+          <p:nvPr/>
+        </p:nvSpPr>
+        <p:spPr>
+          <a:xfrm>
+            <a:off x="10424159" y="1828800"/>
+            <a:ext cx="1097280" cy="320040"/>
+          </a:xfrm>
+          <a:prstGeom prst="roundRect">
+            <a:avLst/>
+          </a:prstGeom>
+          <a:solidFill>
+            <a:srgbClr val="2569EB"/>
+          </a:solidFill>
+          <a:ln>
+            <a:noFill/>
+          </a:ln>
+        </p:spPr>
+        <p:style>
+          <a:lnRef idx="1">
+            <a:schemeClr val="accent1"/>
+          </a:lnRef>
+          <a:fillRef idx="3">
+            <a:schemeClr val="accent1"/>
+          </a:fillRef>
+          <a:effectRef idx="2">
+            <a:schemeClr val="accent1"/>
+          </a:effectRef>
+          <a:fontRef idx="minor">
+            <a:schemeClr val="lt1"/>
+          </a:fontRef>
+        </p:style>
+        <p:txBody>
+          <a:bodyPr rtlCol="0" anchor="ctr"/>
+          <a:lstStyle/>
+          <a:p>
+            <a:pPr algn="ctr">
+              <a:defRPr sz="1100" b="1">
+                <a:solidFill>
+                  <a:srgbClr val="FFFFFF"/>
+                </a:solidFill>
+              </a:defRPr>
+            </a:pPr>
+            <a:r>
+              <a:t>强力辅佐</a:t>
+            </a:r>
+          </a:p>
+        </p:txBody>
+      </p:sp>
+      <p:sp>
+        <p:nvSpPr>
+          <p:cNvPr id="14" name="TextBox 13"/>
+          <p:cNvSpPr txBox="1"/>
+          <p:nvPr/>
+        </p:nvSpPr>
+        <p:spPr>
+          <a:xfrm>
+            <a:off x="6400800" y="1783080"/>
+            <a:ext cx="3657600" cy="457200"/>
+          </a:xfrm>
+          <a:prstGeom prst="rect">
+            <a:avLst/>
+          </a:prstGeom>
+          <a:noFill/>
+        </p:spPr>
+        <p:txBody>
+          <a:bodyPr wrap="square">
+            <a:spAutoFit/>
+          </a:bodyPr>
+          <a:lstStyle/>
+          <a:p>
+            <a:pPr algn="l">
+              <a:defRPr sz="2000" b="1">
+                <a:solidFill>
+                  <a:srgbClr val="FFFFFF"/>
+                </a:solidFill>
+                <a:latin typeface="Microsoft YaHei"/>
+              </a:defRPr>
+            </a:pPr>
+            <a:r>
+              <a:t>🔷 臣 · 亚麻籽油</a:t>
+            </a:r>
+          </a:p>
+        </p:txBody>
+      </p:sp>
+      <p:sp>
+        <p:nvSpPr>
+          <p:cNvPr id="15" name="TextBox 14"/>
+          <p:cNvSpPr txBox="1"/>
+          <p:nvPr/>
+        </p:nvSpPr>
+        <p:spPr>
+          <a:xfrm>
+            <a:off x="6400800" y="2286000"/>
+            <a:ext cx="5029200" cy="1280160"/>
+          </a:xfrm>
+          <a:prstGeom prst="rect">
+            <a:avLst/>
+          </a:prstGeom>
+          <a:noFill/>
+        </p:spPr>
+        <p:txBody>
+          <a:bodyPr wrap="square">
+            <a:spAutoFit/>
+          </a:bodyPr>
+          <a:lstStyle/>
+          <a:p>
+            <a:pPr algn="l">
+              <a:defRPr sz="1300" b="0">
+                <a:solidFill>
+                  <a:srgbClr val="F0FDF4"/>
+                </a:solidFill>
+                <a:latin typeface="Microsoft YaHei"/>
+              </a:defRPr>
+            </a:pPr>
+            <a:r>
+              <a:t>辅助君药增强功效</a:t>
+            </a:r>
+            <a:br/>
+            <a:r>
+              <a:t>α-亚麻酸含量约 55%</a:t>
+            </a:r>
+            <a:br/>
+            <a:r>
+              <a:t>双倍补充 Omega-3</a:t>
+            </a:r>
+            <a:br/>
+            <a:r>
+              <a:t>协同调节血脂血压</a:t>
+            </a:r>
+          </a:p>
+        </p:txBody>
+      </p:sp>
+      <p:sp>
+        <p:nvSpPr>
+          <p:cNvPr id="16" name="Rounded Rectangle 15"/>
+          <p:cNvSpPr/>
+          <p:nvPr/>
+        </p:nvSpPr>
+        <p:spPr>
+          <a:xfrm>
+            <a:off x="457200" y="4023360"/>
+            <a:ext cx="5486400" cy="2103120"/>
+          </a:xfrm>
+          <a:prstGeom prst="roundRect">
+            <a:avLst>
+              <a:gd name="adj" fmla="val 5000"/>
+            </a:avLst>
+          </a:prstGeom>
+          <a:solidFill>
+            <a:srgbClr val="224D38"/>
+          </a:solidFill>
+          <a:ln>
+            <a:noFill/>
+          </a:ln>
+        </p:spPr>
+        <p:style>
+          <a:lnRef idx="1">
+            <a:schemeClr val="accent1"/>
+          </a:lnRef>
+          <a:fillRef idx="3">
+            <a:schemeClr val="accent1"/>
+          </a:fillRef>
+          <a:effectRef idx="2">
+            <a:schemeClr val="accent1"/>
+          </a:effectRef>
+          <a:fontRef idx="minor">
+            <a:schemeClr val="lt1"/>
+          </a:fontRef>
+        </p:style>
+        <p:txBody>
+          <a:bodyPr rtlCol="0" anchor="ctr"/>
+          <a:lstStyle/>
+          <a:p>
+            <a:pPr algn="ctr"/>
+          </a:p>
+        </p:txBody>
+      </p:sp>
+      <p:sp>
+        <p:nvSpPr>
+          <p:cNvPr id="17" name="Rectangle 16"/>
+          <p:cNvSpPr/>
+          <p:nvPr/>
+        </p:nvSpPr>
+        <p:spPr>
+          <a:xfrm>
+            <a:off x="457200" y="4023360"/>
+            <a:ext cx="5486400" cy="73152"/>
+          </a:xfrm>
+          <a:prstGeom prst="rect">
+            <a:avLst/>
+          </a:prstGeom>
+          <a:solidFill>
+            <a:srgbClr val="059669"/>
+          </a:solidFill>
+          <a:ln>
+            <a:noFill/>
+          </a:ln>
+        </p:spPr>
+        <p:style>
+          <a:lnRef idx="1">
+            <a:schemeClr val="accent1"/>
+          </a:lnRef>
+          <a:fillRef idx="3">
+            <a:schemeClr val="accent1"/>
+          </a:fillRef>
+          <a:effectRef idx="2">
+            <a:schemeClr val="accent1"/>
+          </a:effectRef>
+          <a:fontRef idx="minor">
+            <a:schemeClr val="lt1"/>
+          </a:fontRef>
+        </p:style>
+        <p:txBody>
+          <a:bodyPr rtlCol="0" anchor="ctr"/>
+          <a:lstStyle/>
+          <a:p>
+            <a:pPr algn="ctr"/>
+          </a:p>
+        </p:txBody>
+      </p:sp>
+      <p:sp>
+        <p:nvSpPr>
+          <p:cNvPr id="18" name="Rounded Rectangle 17"/>
+          <p:cNvSpPr/>
+          <p:nvPr/>
+        </p:nvSpPr>
+        <p:spPr>
+          <a:xfrm>
+            <a:off x="4663440" y="4206240"/>
+            <a:ext cx="1097280" cy="320040"/>
+          </a:xfrm>
+          <a:prstGeom prst="roundRect">
+            <a:avLst/>
+          </a:prstGeom>
+          <a:solidFill>
+            <a:srgbClr val="059669"/>
+          </a:solidFill>
+          <a:ln>
+            <a:noFill/>
+          </a:ln>
+        </p:spPr>
+        <p:style>
+          <a:lnRef idx="1">
+            <a:schemeClr val="accent1"/>
+          </a:lnRef>
+          <a:fillRef idx="3">
+            <a:schemeClr val="accent1"/>
+          </a:fillRef>
+          <a:effectRef idx="2">
+            <a:schemeClr val="accent1"/>
+          </a:effectRef>
+          <a:fontRef idx="minor">
+            <a:schemeClr val="lt1"/>
+          </a:fontRef>
+        </p:style>
+        <p:txBody>
+          <a:bodyPr rtlCol="0" anchor="ctr"/>
+          <a:lstStyle/>
+          <a:p>
+            <a:pPr algn="ctr">
+              <a:defRPr sz="1100" b="1">
+                <a:solidFill>
+                  <a:srgbClr val="FFFFFF"/>
+                </a:solidFill>
+              </a:defRPr>
+            </a:pPr>
+            <a:r>
+              <a:t>平衡调和</a:t>
+            </a:r>
+          </a:p>
+        </p:txBody>
+      </p:sp>
+      <p:sp>
+        <p:nvSpPr>
+          <p:cNvPr id="19" name="TextBox 18"/>
+          <p:cNvSpPr txBox="1"/>
+          <p:nvPr/>
+        </p:nvSpPr>
+        <p:spPr>
+          <a:xfrm>
+            <a:off x="640080" y="4160520"/>
+            <a:ext cx="3657600" cy="457200"/>
+          </a:xfrm>
+          <a:prstGeom prst="rect">
+            <a:avLst/>
+          </a:prstGeom>
+          <a:noFill/>
+        </p:spPr>
+        <p:txBody>
+          <a:bodyPr wrap="square">
+            <a:spAutoFit/>
+          </a:bodyPr>
+          <a:lstStyle/>
+          <a:p>
+            <a:pPr algn="l">
+              <a:defRPr sz="2000" b="1">
+                <a:solidFill>
+                  <a:srgbClr val="FFFFFF"/>
+                </a:solidFill>
+                <a:latin typeface="Microsoft YaHei"/>
+              </a:defRPr>
+            </a:pPr>
+            <a:r>
+              <a:t>🌿 佐 · 山茶籽油</a:t>
+            </a:r>
+          </a:p>
+        </p:txBody>
+      </p:sp>
+      <p:sp>
+        <p:nvSpPr>
+          <p:cNvPr id="20" name="TextBox 19"/>
+          <p:cNvSpPr txBox="1"/>
+          <p:nvPr/>
+        </p:nvSpPr>
+        <p:spPr>
+          <a:xfrm>
+            <a:off x="640080" y="4663440"/>
+            <a:ext cx="5029200" cy="1280160"/>
+          </a:xfrm>
+          <a:prstGeom prst="rect">
+            <a:avLst/>
+          </a:prstGeom>
+          <a:noFill/>
+        </p:spPr>
+        <p:txBody>
+          <a:bodyPr wrap="square">
+            <a:spAutoFit/>
+          </a:bodyPr>
+          <a:lstStyle/>
+          <a:p>
+            <a:pPr algn="l">
+              <a:defRPr sz="1300" b="0">
+                <a:solidFill>
+                  <a:srgbClr val="F0FDF4"/>
+                </a:solidFill>
+                <a:latin typeface="Microsoft YaHei"/>
+              </a:defRPr>
+            </a:pPr>
+            <a:r>
+              <a:t>制衡药性、兼顾次要问题</a:t>
+            </a:r>
+            <a:br/>
+            <a:r>
+              <a:t>单不饱和脂肪酸 80%+</a:t>
+            </a:r>
+            <a:br/>
+            <a:r>
+              <a:t>温和滋养、不增加负担</a:t>
+            </a:r>
+            <a:br/>
+            <a:r>
+              <a:t>降血糖、抗氧化</a:t>
+            </a:r>
+          </a:p>
+        </p:txBody>
+      </p:sp>
+      <p:sp>
+        <p:nvSpPr>
+          <p:cNvPr id="21" name="Rounded Rectangle 20"/>
+          <p:cNvSpPr/>
+          <p:nvPr/>
+        </p:nvSpPr>
+        <p:spPr>
+          <a:xfrm>
+            <a:off x="6217920" y="4023360"/>
+            <a:ext cx="5486400" cy="2103120"/>
+          </a:xfrm>
+          <a:prstGeom prst="roundRect">
+            <a:avLst>
+              <a:gd name="adj" fmla="val 5000"/>
+            </a:avLst>
+          </a:prstGeom>
+          <a:solidFill>
+            <a:srgbClr val="224D38"/>
+          </a:solidFill>
+          <a:ln>
+            <a:noFill/>
+          </a:ln>
+        </p:spPr>
+        <p:style>
+          <a:lnRef idx="1">
+            <a:schemeClr val="accent1"/>
+          </a:lnRef>
+          <a:fillRef idx="3">
+            <a:schemeClr val="accent1"/>
+          </a:fillRef>
+          <a:effectRef idx="2">
+            <a:schemeClr val="accent1"/>
+          </a:effectRef>
+          <a:fontRef idx="minor">
+            <a:schemeClr val="lt1"/>
+          </a:fontRef>
+        </p:style>
+        <p:txBody>
+          <a:bodyPr rtlCol="0" anchor="ctr"/>
+          <a:lstStyle/>
+          <a:p>
+            <a:pPr algn="ctr"/>
+          </a:p>
+        </p:txBody>
+      </p:sp>
+      <p:sp>
+        <p:nvSpPr>
+          <p:cNvPr id="22" name="Rectangle 21"/>
+          <p:cNvSpPr/>
+          <p:nvPr/>
+        </p:nvSpPr>
+        <p:spPr>
+          <a:xfrm>
+            <a:off x="6217920" y="4023360"/>
+            <a:ext cx="5486400" cy="73152"/>
           </a:xfrm>
           <a:prstGeom prst="rect">
             <a:avLst/>
@@ -14226,130 +16394,20 @@
       </p:sp>
       <p:sp>
         <p:nvSpPr>
-          <p:cNvPr id="8" name="TextBox 7"/>
-          <p:cNvSpPr txBox="1"/>
-          <p:nvPr/>
-        </p:nvSpPr>
-        <p:spPr>
-          <a:xfrm>
-            <a:off x="594360" y="1920240"/>
-            <a:ext cx="2377440" cy="548640"/>
-          </a:xfrm>
-          <a:prstGeom prst="rect">
-            <a:avLst/>
-          </a:prstGeom>
-          <a:noFill/>
-        </p:spPr>
-        <p:txBody>
-          <a:bodyPr wrap="square">
-            <a:spAutoFit/>
-          </a:bodyPr>
-          <a:lstStyle/>
-          <a:p>
-            <a:pPr algn="l">
-              <a:defRPr sz="2000" b="1">
-                <a:solidFill>
-                  <a:srgbClr val="FFFFFF"/>
-                </a:solidFill>
-                <a:latin typeface="Microsoft YaHei"/>
-              </a:defRPr>
-            </a:pPr>
-            <a:r>
-              <a:t>🍇 葡萄籽油</a:t>
-            </a:r>
-          </a:p>
-        </p:txBody>
-      </p:sp>
-      <p:sp>
-        <p:nvSpPr>
-          <p:cNvPr id="9" name="TextBox 8"/>
-          <p:cNvSpPr txBox="1"/>
-          <p:nvPr/>
-        </p:nvSpPr>
-        <p:spPr>
-          <a:xfrm>
-            <a:off x="594360" y="2468880"/>
-            <a:ext cx="2377440" cy="457200"/>
-          </a:xfrm>
-          <a:prstGeom prst="rect">
-            <a:avLst/>
-          </a:prstGeom>
-          <a:noFill/>
-        </p:spPr>
-        <p:txBody>
-          <a:bodyPr wrap="square">
-            <a:spAutoFit/>
-          </a:bodyPr>
-          <a:lstStyle/>
-          <a:p>
-            <a:pPr algn="l">
-              <a:defRPr sz="1200" b="0">
-                <a:solidFill>
-                  <a:srgbClr val="F59E0B"/>
-                </a:solidFill>
-                <a:latin typeface="Microsoft YaHei"/>
-              </a:defRPr>
-            </a:pPr>
-            <a:r>
-              <a:t>核心：原花青素 + 亚油酸</a:t>
-            </a:r>
-          </a:p>
-        </p:txBody>
-      </p:sp>
-      <p:sp>
-        <p:nvSpPr>
-          <p:cNvPr id="10" name="TextBox 9"/>
-          <p:cNvSpPr txBox="1"/>
-          <p:nvPr/>
-        </p:nvSpPr>
-        <p:spPr>
-          <a:xfrm>
-            <a:off x="594360" y="3017520"/>
-            <a:ext cx="2377440" cy="2286000"/>
-          </a:xfrm>
-          <a:prstGeom prst="rect">
-            <a:avLst/>
-          </a:prstGeom>
-          <a:noFill/>
-        </p:spPr>
-        <p:txBody>
-          <a:bodyPr wrap="square">
-            <a:spAutoFit/>
-          </a:bodyPr>
-          <a:lstStyle/>
-          <a:p>
-            <a:pPr algn="l">
-              <a:defRPr sz="1400" b="0">
-                <a:solidFill>
-                  <a:srgbClr val="F0FDF4"/>
-                </a:solidFill>
-                <a:latin typeface="Microsoft YaHei"/>
-              </a:defRPr>
-            </a:pPr>
-            <a:r>
-              <a:t>抗氧化、清除自由基、保护血管弹性</a:t>
-            </a:r>
-          </a:p>
-        </p:txBody>
-      </p:sp>
-      <p:sp>
-        <p:nvSpPr>
-          <p:cNvPr id="11" name="Rounded Rectangle 10"/>
+          <p:cNvPr id="23" name="Rounded Rectangle 22"/>
           <p:cNvSpPr/>
           <p:nvPr/>
         </p:nvSpPr>
         <p:spPr>
           <a:xfrm>
-            <a:off x="3337560" y="1645920"/>
-            <a:ext cx="2697480" cy="4389120"/>
+            <a:off x="10424159" y="4206240"/>
+            <a:ext cx="1097280" cy="320040"/>
           </a:xfrm>
           <a:prstGeom prst="roundRect">
-            <a:avLst>
-              <a:gd name="adj" fmla="val 5000"/>
-            </a:avLst>
+            <a:avLst/>
           </a:prstGeom>
           <a:solidFill>
-            <a:srgbClr val="224D38"/>
+            <a:srgbClr val="7C3AED"/>
           </a:solidFill>
           <a:ln>
             <a:noFill/>
@@ -14373,63 +16431,29 @@
           <a:bodyPr rtlCol="0" anchor="ctr"/>
           <a:lstStyle/>
           <a:p>
-            <a:pPr algn="ctr"/>
-          </a:p>
-        </p:txBody>
-      </p:sp>
-      <p:sp>
-        <p:nvSpPr>
-          <p:cNvPr id="12" name="Rectangle 11"/>
-          <p:cNvSpPr/>
-          <p:nvPr/>
-        </p:nvSpPr>
-        <p:spPr>
-          <a:xfrm>
-            <a:off x="3337560" y="1645920"/>
-            <a:ext cx="2697480" cy="73152"/>
-          </a:xfrm>
-          <a:prstGeom prst="rect">
-            <a:avLst/>
-          </a:prstGeom>
-          <a:solidFill>
-            <a:srgbClr val="D97706"/>
-          </a:solidFill>
-          <a:ln>
-            <a:noFill/>
-          </a:ln>
-        </p:spPr>
-        <p:style>
-          <a:lnRef idx="1">
-            <a:schemeClr val="accent1"/>
-          </a:lnRef>
-          <a:fillRef idx="3">
-            <a:schemeClr val="accent1"/>
-          </a:fillRef>
-          <a:effectRef idx="2">
-            <a:schemeClr val="accent1"/>
-          </a:effectRef>
-          <a:fontRef idx="minor">
-            <a:schemeClr val="lt1"/>
-          </a:fontRef>
-        </p:style>
-        <p:txBody>
-          <a:bodyPr rtlCol="0" anchor="ctr"/>
-          <a:lstStyle/>
-          <a:p>
-            <a:pPr algn="ctr"/>
-          </a:p>
-        </p:txBody>
-      </p:sp>
-      <p:sp>
-        <p:nvSpPr>
-          <p:cNvPr id="13" name="TextBox 12"/>
-          <p:cNvSpPr txBox="1"/>
-          <p:nvPr/>
-        </p:nvSpPr>
-        <p:spPr>
-          <a:xfrm>
-            <a:off x="3474720" y="1920240"/>
-            <a:ext cx="2377440" cy="548640"/>
+            <a:pPr algn="ctr">
+              <a:defRPr sz="1100" b="1">
+                <a:solidFill>
+                  <a:srgbClr val="FFFFFF"/>
+                </a:solidFill>
+              </a:defRPr>
+            </a:pPr>
+            <a:r>
+              <a:t>引药归经</a:t>
+            </a:r>
+          </a:p>
+        </p:txBody>
+      </p:sp>
+      <p:sp>
+        <p:nvSpPr>
+          <p:cNvPr id="24" name="TextBox 23"/>
+          <p:cNvSpPr txBox="1"/>
+          <p:nvPr/>
+        </p:nvSpPr>
+        <p:spPr>
+          <a:xfrm>
+            <a:off x="6400800" y="4160520"/>
+            <a:ext cx="3657600" cy="457200"/>
           </a:xfrm>
           <a:prstGeom prst="rect">
             <a:avLst/>
@@ -14451,435 +16475,7 @@
               </a:defRPr>
             </a:pPr>
             <a:r>
-              <a:t>🌾 亚麻籽油</a:t>
-            </a:r>
-          </a:p>
-        </p:txBody>
-      </p:sp>
-      <p:sp>
-        <p:nvSpPr>
-          <p:cNvPr id="14" name="TextBox 13"/>
-          <p:cNvSpPr txBox="1"/>
-          <p:nvPr/>
-        </p:nvSpPr>
-        <p:spPr>
-          <a:xfrm>
-            <a:off x="3474720" y="2468880"/>
-            <a:ext cx="2377440" cy="457200"/>
-          </a:xfrm>
-          <a:prstGeom prst="rect">
-            <a:avLst/>
-          </a:prstGeom>
-          <a:noFill/>
-        </p:spPr>
-        <p:txBody>
-          <a:bodyPr wrap="square">
-            <a:spAutoFit/>
-          </a:bodyPr>
-          <a:lstStyle/>
-          <a:p>
-            <a:pPr algn="l">
-              <a:defRPr sz="1200" b="0">
-                <a:solidFill>
-                  <a:srgbClr val="F59E0B"/>
-                </a:solidFill>
-                <a:latin typeface="Microsoft YaHei"/>
-              </a:defRPr>
-            </a:pPr>
-            <a:r>
-              <a:t>核心：α-亚麻酸 55%+</a:t>
-            </a:r>
-          </a:p>
-        </p:txBody>
-      </p:sp>
-      <p:sp>
-        <p:nvSpPr>
-          <p:cNvPr id="15" name="TextBox 14"/>
-          <p:cNvSpPr txBox="1"/>
-          <p:nvPr/>
-        </p:nvSpPr>
-        <p:spPr>
-          <a:xfrm>
-            <a:off x="3474720" y="3017520"/>
-            <a:ext cx="2377440" cy="2286000"/>
-          </a:xfrm>
-          <a:prstGeom prst="rect">
-            <a:avLst/>
-          </a:prstGeom>
-          <a:noFill/>
-        </p:spPr>
-        <p:txBody>
-          <a:bodyPr wrap="square">
-            <a:spAutoFit/>
-          </a:bodyPr>
-          <a:lstStyle/>
-          <a:p>
-            <a:pPr algn="l">
-              <a:defRPr sz="1400" b="0">
-                <a:solidFill>
-                  <a:srgbClr val="F0FDF4"/>
-                </a:solidFill>
-                <a:latin typeface="Microsoft YaHei"/>
-              </a:defRPr>
-            </a:pPr>
-            <a:r>
-              <a:t>降血脂、降血压、改善胰岛素敏感度</a:t>
-            </a:r>
-          </a:p>
-        </p:txBody>
-      </p:sp>
-      <p:sp>
-        <p:nvSpPr>
-          <p:cNvPr id="16" name="Rounded Rectangle 15"/>
-          <p:cNvSpPr/>
-          <p:nvPr/>
-        </p:nvSpPr>
-        <p:spPr>
-          <a:xfrm>
-            <a:off x="6217920" y="1645920"/>
-            <a:ext cx="2697480" cy="4389120"/>
-          </a:xfrm>
-          <a:prstGeom prst="roundRect">
-            <a:avLst>
-              <a:gd name="adj" fmla="val 5000"/>
-            </a:avLst>
-          </a:prstGeom>
-          <a:solidFill>
-            <a:srgbClr val="224D38"/>
-          </a:solidFill>
-          <a:ln>
-            <a:noFill/>
-          </a:ln>
-        </p:spPr>
-        <p:style>
-          <a:lnRef idx="1">
-            <a:schemeClr val="accent1"/>
-          </a:lnRef>
-          <a:fillRef idx="3">
-            <a:schemeClr val="accent1"/>
-          </a:fillRef>
-          <a:effectRef idx="2">
-            <a:schemeClr val="accent1"/>
-          </a:effectRef>
-          <a:fontRef idx="minor">
-            <a:schemeClr val="lt1"/>
-          </a:fontRef>
-        </p:style>
-        <p:txBody>
-          <a:bodyPr rtlCol="0" anchor="ctr"/>
-          <a:lstStyle/>
-          <a:p>
-            <a:pPr algn="ctr"/>
-          </a:p>
-        </p:txBody>
-      </p:sp>
-      <p:sp>
-        <p:nvSpPr>
-          <p:cNvPr id="17" name="Rectangle 16"/>
-          <p:cNvSpPr/>
-          <p:nvPr/>
-        </p:nvSpPr>
-        <p:spPr>
-          <a:xfrm>
-            <a:off x="6217920" y="1645920"/>
-            <a:ext cx="2697480" cy="73152"/>
-          </a:xfrm>
-          <a:prstGeom prst="rect">
-            <a:avLst/>
-          </a:prstGeom>
-          <a:solidFill>
-            <a:srgbClr val="059669"/>
-          </a:solidFill>
-          <a:ln>
-            <a:noFill/>
-          </a:ln>
-        </p:spPr>
-        <p:style>
-          <a:lnRef idx="1">
-            <a:schemeClr val="accent1"/>
-          </a:lnRef>
-          <a:fillRef idx="3">
-            <a:schemeClr val="accent1"/>
-          </a:fillRef>
-          <a:effectRef idx="2">
-            <a:schemeClr val="accent1"/>
-          </a:effectRef>
-          <a:fontRef idx="minor">
-            <a:schemeClr val="lt1"/>
-          </a:fontRef>
-        </p:style>
-        <p:txBody>
-          <a:bodyPr rtlCol="0" anchor="ctr"/>
-          <a:lstStyle/>
-          <a:p>
-            <a:pPr algn="ctr"/>
-          </a:p>
-        </p:txBody>
-      </p:sp>
-      <p:sp>
-        <p:nvSpPr>
-          <p:cNvPr id="18" name="TextBox 17"/>
-          <p:cNvSpPr txBox="1"/>
-          <p:nvPr/>
-        </p:nvSpPr>
-        <p:spPr>
-          <a:xfrm>
-            <a:off x="6355080" y="1920240"/>
-            <a:ext cx="2377440" cy="548640"/>
-          </a:xfrm>
-          <a:prstGeom prst="rect">
-            <a:avLst/>
-          </a:prstGeom>
-          <a:noFill/>
-        </p:spPr>
-        <p:txBody>
-          <a:bodyPr wrap="square">
-            <a:spAutoFit/>
-          </a:bodyPr>
-          <a:lstStyle/>
-          <a:p>
-            <a:pPr algn="l">
-              <a:defRPr sz="2000" b="1">
-                <a:solidFill>
-                  <a:srgbClr val="FFFFFF"/>
-                </a:solidFill>
-                <a:latin typeface="Microsoft YaHei"/>
-              </a:defRPr>
-            </a:pPr>
-            <a:r>
-              <a:t>🌿 山茶籽油</a:t>
-            </a:r>
-          </a:p>
-        </p:txBody>
-      </p:sp>
-      <p:sp>
-        <p:nvSpPr>
-          <p:cNvPr id="19" name="TextBox 18"/>
-          <p:cNvSpPr txBox="1"/>
-          <p:nvPr/>
-        </p:nvSpPr>
-        <p:spPr>
-          <a:xfrm>
-            <a:off x="6355080" y="2468880"/>
-            <a:ext cx="2377440" cy="457200"/>
-          </a:xfrm>
-          <a:prstGeom prst="rect">
-            <a:avLst/>
-          </a:prstGeom>
-          <a:noFill/>
-        </p:spPr>
-        <p:txBody>
-          <a:bodyPr wrap="square">
-            <a:spAutoFit/>
-          </a:bodyPr>
-          <a:lstStyle/>
-          <a:p>
-            <a:pPr algn="l">
-              <a:defRPr sz="1200" b="0">
-                <a:solidFill>
-                  <a:srgbClr val="F59E0B"/>
-                </a:solidFill>
-                <a:latin typeface="Microsoft YaHei"/>
-              </a:defRPr>
-            </a:pPr>
-            <a:r>
-              <a:t>核心：单不饱和脂肪酸 80%+</a:t>
-            </a:r>
-          </a:p>
-        </p:txBody>
-      </p:sp>
-      <p:sp>
-        <p:nvSpPr>
-          <p:cNvPr id="20" name="TextBox 19"/>
-          <p:cNvSpPr txBox="1"/>
-          <p:nvPr/>
-        </p:nvSpPr>
-        <p:spPr>
-          <a:xfrm>
-            <a:off x="6355080" y="3017520"/>
-            <a:ext cx="2377440" cy="2286000"/>
-          </a:xfrm>
-          <a:prstGeom prst="rect">
-            <a:avLst/>
-          </a:prstGeom>
-          <a:noFill/>
-        </p:spPr>
-        <p:txBody>
-          <a:bodyPr wrap="square">
-            <a:spAutoFit/>
-          </a:bodyPr>
-          <a:lstStyle/>
-          <a:p>
-            <a:pPr algn="l">
-              <a:defRPr sz="1400" b="0">
-                <a:solidFill>
-                  <a:srgbClr val="F0FDF4"/>
-                </a:solidFill>
-                <a:latin typeface="Microsoft YaHei"/>
-              </a:defRPr>
-            </a:pPr>
-            <a:r>
-              <a:t>降血压、降血脂、控制血糖、抗氧化</a:t>
-            </a:r>
-          </a:p>
-        </p:txBody>
-      </p:sp>
-      <p:sp>
-        <p:nvSpPr>
-          <p:cNvPr id="21" name="Rounded Rectangle 20"/>
-          <p:cNvSpPr/>
-          <p:nvPr/>
-        </p:nvSpPr>
-        <p:spPr>
-          <a:xfrm>
-            <a:off x="9098280" y="1645920"/>
-            <a:ext cx="2697480" cy="4389120"/>
-          </a:xfrm>
-          <a:prstGeom prst="roundRect">
-            <a:avLst>
-              <a:gd name="adj" fmla="val 5000"/>
-            </a:avLst>
-          </a:prstGeom>
-          <a:solidFill>
-            <a:srgbClr val="224D38"/>
-          </a:solidFill>
-          <a:ln>
-            <a:noFill/>
-          </a:ln>
-        </p:spPr>
-        <p:style>
-          <a:lnRef idx="1">
-            <a:schemeClr val="accent1"/>
-          </a:lnRef>
-          <a:fillRef idx="3">
-            <a:schemeClr val="accent1"/>
-          </a:fillRef>
-          <a:effectRef idx="2">
-            <a:schemeClr val="accent1"/>
-          </a:effectRef>
-          <a:fontRef idx="minor">
-            <a:schemeClr val="lt1"/>
-          </a:fontRef>
-        </p:style>
-        <p:txBody>
-          <a:bodyPr rtlCol="0" anchor="ctr"/>
-          <a:lstStyle/>
-          <a:p>
-            <a:pPr algn="ctr"/>
-          </a:p>
-        </p:txBody>
-      </p:sp>
-      <p:sp>
-        <p:nvSpPr>
-          <p:cNvPr id="22" name="Rectangle 21"/>
-          <p:cNvSpPr/>
-          <p:nvPr/>
-        </p:nvSpPr>
-        <p:spPr>
-          <a:xfrm>
-            <a:off x="9098280" y="1645920"/>
-            <a:ext cx="2697480" cy="73152"/>
-          </a:xfrm>
-          <a:prstGeom prst="rect">
-            <a:avLst/>
-          </a:prstGeom>
-          <a:solidFill>
-            <a:srgbClr val="2569EB"/>
-          </a:solidFill>
-          <a:ln>
-            <a:noFill/>
-          </a:ln>
-        </p:spPr>
-        <p:style>
-          <a:lnRef idx="1">
-            <a:schemeClr val="accent1"/>
-          </a:lnRef>
-          <a:fillRef idx="3">
-            <a:schemeClr val="accent1"/>
-          </a:fillRef>
-          <a:effectRef idx="2">
-            <a:schemeClr val="accent1"/>
-          </a:effectRef>
-          <a:fontRef idx="minor">
-            <a:schemeClr val="lt1"/>
-          </a:fontRef>
-        </p:style>
-        <p:txBody>
-          <a:bodyPr rtlCol="0" anchor="ctr"/>
-          <a:lstStyle/>
-          <a:p>
-            <a:pPr algn="ctr"/>
-          </a:p>
-        </p:txBody>
-      </p:sp>
-      <p:sp>
-        <p:nvSpPr>
-          <p:cNvPr id="23" name="TextBox 22"/>
-          <p:cNvSpPr txBox="1"/>
-          <p:nvPr/>
-        </p:nvSpPr>
-        <p:spPr>
-          <a:xfrm>
-            <a:off x="9235440" y="1920240"/>
-            <a:ext cx="2377440" cy="548640"/>
-          </a:xfrm>
-          <a:prstGeom prst="rect">
-            <a:avLst/>
-          </a:prstGeom>
-          <a:noFill/>
-        </p:spPr>
-        <p:txBody>
-          <a:bodyPr wrap="square">
-            <a:spAutoFit/>
-          </a:bodyPr>
-          <a:lstStyle/>
-          <a:p>
-            <a:pPr algn="l">
-              <a:defRPr sz="2000" b="1">
-                <a:solidFill>
-                  <a:srgbClr val="FFFFFF"/>
-                </a:solidFill>
-                <a:latin typeface="Microsoft YaHei"/>
-              </a:defRPr>
-            </a:pPr>
-            <a:r>
-              <a:t>🍃 紫苏籽油</a:t>
-            </a:r>
-          </a:p>
-        </p:txBody>
-      </p:sp>
-      <p:sp>
-        <p:nvSpPr>
-          <p:cNvPr id="24" name="TextBox 23"/>
-          <p:cNvSpPr txBox="1"/>
-          <p:nvPr/>
-        </p:nvSpPr>
-        <p:spPr>
-          <a:xfrm>
-            <a:off x="9235440" y="2468880"/>
-            <a:ext cx="2377440" cy="457200"/>
-          </a:xfrm>
-          <a:prstGeom prst="rect">
-            <a:avLst/>
-          </a:prstGeom>
-          <a:noFill/>
-        </p:spPr>
-        <p:txBody>
-          <a:bodyPr wrap="square">
-            <a:spAutoFit/>
-          </a:bodyPr>
-          <a:lstStyle/>
-          <a:p>
-            <a:pPr algn="l">
-              <a:defRPr sz="1200" b="0">
-                <a:solidFill>
-                  <a:srgbClr val="F59E0B"/>
-                </a:solidFill>
-                <a:latin typeface="Microsoft YaHei"/>
-              </a:defRPr>
-            </a:pPr>
-            <a:r>
-              <a:t>核心：α-亚麻酸 54%-67%</a:t>
+              <a:t>🍇 使 · 葡萄籽油</a:t>
             </a:r>
           </a:p>
         </p:txBody>
@@ -14892,30 +16488,42 @@
         </p:nvSpPr>
         <p:spPr>
           <a:xfrm>
-            <a:off x="9235440" y="3017520"/>
-            <a:ext cx="2377440" cy="2286000"/>
-          </a:xfrm>
-          <a:prstGeom prst="rect">
-            <a:avLst/>
-          </a:prstGeom>
-          <a:noFill/>
-        </p:spPr>
-        <p:txBody>
-          <a:bodyPr wrap="square">
-            <a:spAutoFit/>
-          </a:bodyPr>
-          <a:lstStyle/>
-          <a:p>
-            <a:pPr algn="l">
-              <a:defRPr sz="1400" b="0">
-                <a:solidFill>
-                  <a:srgbClr val="F0FDF4"/>
-                </a:solidFill>
-                <a:latin typeface="Microsoft YaHei"/>
-              </a:defRPr>
-            </a:pPr>
-            <a:r>
-              <a:t>调节血脂、抗炎、保护心血管</a:t>
+            <a:off x="6400800" y="4663440"/>
+            <a:ext cx="5029200" cy="1280160"/>
+          </a:xfrm>
+          <a:prstGeom prst="rect">
+            <a:avLst/>
+          </a:prstGeom>
+          <a:noFill/>
+        </p:spPr>
+        <p:txBody>
+          <a:bodyPr wrap="square">
+            <a:spAutoFit/>
+          </a:bodyPr>
+          <a:lstStyle/>
+          <a:p>
+            <a:pPr algn="l">
+              <a:defRPr sz="1300" b="0">
+                <a:solidFill>
+                  <a:srgbClr val="F0FDF4"/>
+                </a:solidFill>
+                <a:latin typeface="Microsoft YaHei"/>
+              </a:defRPr>
+            </a:pPr>
+            <a:r>
+              <a:t>引导诸药到达作用部位</a:t>
+            </a:r>
+            <a:br/>
+            <a:r>
+              <a:t>原花青素清除自由基</a:t>
+            </a:r>
+            <a:br/>
+            <a:r>
+              <a:t>保护血管弹性</a:t>
+            </a:r>
+            <a:br/>
+            <a:r>
+              <a:t>促进吸收、调和诸油</a:t>
             </a:r>
           </a:p>
         </p:txBody>
@@ -14951,7 +16559,7 @@
               </a:defRPr>
             </a:pPr>
             <a:r>
-              <a:t>4/18</a:t>
+              <a:t>4/19</a:t>
             </a:r>
           </a:p>
         </p:txBody>
@@ -15107,14 +16715,50 @@
               </a:defRPr>
             </a:pPr>
             <a:r>
-              <a:t>🍇 葡萄籽油 —— 抗氧化的守护者</a:t>
-            </a:r>
-          </a:p>
-        </p:txBody>
-      </p:sp>
-      <p:sp>
-        <p:nvSpPr>
-          <p:cNvPr id="5" name="Rounded Rectangle 4"/>
+              <a:t>👑 君 · 紫苏籽油 —— 核心主力</a:t>
+            </a:r>
+          </a:p>
+        </p:txBody>
+      </p:sp>
+      <p:sp>
+        <p:nvSpPr>
+          <p:cNvPr id="5" name="TextBox 4"/>
+          <p:cNvSpPr txBox="1"/>
+          <p:nvPr/>
+        </p:nvSpPr>
+        <p:spPr>
+          <a:xfrm>
+            <a:off x="731520" y="914400"/>
+            <a:ext cx="10515600" cy="457200"/>
+          </a:xfrm>
+          <a:prstGeom prst="rect">
+            <a:avLst/>
+          </a:prstGeom>
+          <a:noFill/>
+        </p:spPr>
+        <p:txBody>
+          <a:bodyPr wrap="square">
+            <a:spAutoFit/>
+          </a:bodyPr>
+          <a:lstStyle/>
+          <a:p>
+            <a:pPr algn="l">
+              <a:defRPr sz="1600" b="0">
+                <a:solidFill>
+                  <a:srgbClr val="6B7280"/>
+                </a:solidFill>
+                <a:latin typeface="Microsoft YaHei"/>
+              </a:defRPr>
+            </a:pPr>
+            <a:r>
+              <a:t>统领全局，直击病所，针对主要问题</a:t>
+            </a:r>
+          </a:p>
+        </p:txBody>
+      </p:sp>
+      <p:sp>
+        <p:nvSpPr>
+          <p:cNvPr id="6" name="Rounded Rectangle 5"/>
           <p:cNvSpPr/>
           <p:nvPr/>
         </p:nvSpPr>
@@ -15159,7 +16803,7 @@
       </p:sp>
       <p:sp>
         <p:nvSpPr>
-          <p:cNvPr id="6" name="TextBox 5"/>
+          <p:cNvPr id="7" name="TextBox 6"/>
           <p:cNvSpPr txBox="1"/>
           <p:nvPr/>
         </p:nvSpPr>
@@ -15191,7 +16835,7 @@
               </a:defRPr>
             </a:pPr>
             <a:r>
-              <a:t>核心成分与功效</a:t>
+              <a:t>👑 君药地位：核心主力</a:t>
             </a:r>
           </a:p>
           <a:p>
@@ -15220,7 +16864,7 @@
               </a:defRPr>
             </a:pPr>
             <a:r>
-              <a:t>🔸 原花青素（OPC）：自然界最强的抗氧化剂之一</a:t>
+              <a:t>🔸 α-亚麻酸含量高达 54%-67%</a:t>
             </a:r>
           </a:p>
           <a:p>
@@ -15236,7 +16880,7 @@
               </a:defRPr>
             </a:pPr>
             <a:r>
-              <a:t>  • 清除体内自由基，延缓衰老</a:t>
+              <a:t>  • 所有植物油中含量最高</a:t>
             </a:r>
           </a:p>
           <a:p>
@@ -15252,7 +16896,7 @@
               </a:defRPr>
             </a:pPr>
             <a:r>
-              <a:t>  • 保护血管弹性，预防动脉硬化</a:t>
+              <a:t>  • 国际医学界公认的天然保健品</a:t>
             </a:r>
           </a:p>
           <a:p>
@@ -15281,7 +16925,7 @@
               </a:defRPr>
             </a:pPr>
             <a:r>
-              <a:t>🔸 亚油酸（Omega-6）：</a:t>
+              <a:t>🔸 唯一入选国家药食同源目录的油用种子</a:t>
             </a:r>
           </a:p>
           <a:p>
@@ -15297,7 +16941,7 @@
               </a:defRPr>
             </a:pPr>
             <a:r>
-              <a:t>  • 降低血清胆固醇水平</a:t>
+              <a:t>  • 国家卫健委106种药食同源物质之一</a:t>
             </a:r>
           </a:p>
           <a:p>
@@ -15312,9 +16956,6 @@
                 <a:latin typeface="Microsoft YaHei"/>
               </a:defRPr>
             </a:pPr>
-            <a:r>
-              <a:t>  • 降低甘油三酯</a:t>
-            </a:r>
           </a:p>
           <a:p>
             <a:pPr algn="l">
@@ -15328,6 +16969,9 @@
                 <a:latin typeface="Microsoft YaHei"/>
               </a:defRPr>
             </a:pPr>
+            <a:r>
+              <a:t>🔸 中医传统认知：</a:t>
+            </a:r>
           </a:p>
           <a:p>
             <a:pPr algn="l">
@@ -15342,7 +16986,7 @@
               </a:defRPr>
             </a:pPr>
             <a:r>
-              <a:t>🔸 维生素E：</a:t>
+              <a:t>  • "解表散寒，行气和胃"</a:t>
             </a:r>
           </a:p>
           <a:p>
@@ -15358,7 +17002,7 @@
               </a:defRPr>
             </a:pPr>
             <a:r>
-              <a:t>  • 增强免疫力</a:t>
+              <a:t>  • 降气消痰，平喘润肠</a:t>
             </a:r>
           </a:p>
           <a:p>
@@ -15373,9 +17017,6 @@
                 <a:latin typeface="Microsoft YaHei"/>
               </a:defRPr>
             </a:pPr>
-            <a:r>
-              <a:t>  • 保护细胞膜不受氧化损伤</a:t>
-            </a:r>
           </a:p>
           <a:p>
             <a:pPr algn="l">
@@ -15389,6 +17030,9 @@
                 <a:latin typeface="Microsoft YaHei"/>
               </a:defRPr>
             </a:pPr>
+            <a:r>
+              <a:t>🔸 现代研究证实：</a:t>
+            </a:r>
           </a:p>
           <a:p>
             <a:pPr algn="l">
@@ -15403,7 +17047,7 @@
               </a:defRPr>
             </a:pPr>
             <a:r>
-              <a:t>📊 临床数据：葡萄籽油可显著降低</a:t>
+              <a:t>  ✓ 调节血脂 —— 甘油三酯下降约 8%</a:t>
             </a:r>
           </a:p>
           <a:p>
@@ -15419,14 +17063,30 @@
               </a:defRPr>
             </a:pPr>
             <a:r>
-              <a:t>    血清胆固醇和甘油三酯水平</a:t>
-            </a:r>
-          </a:p>
-        </p:txBody>
-      </p:sp>
-      <p:sp>
-        <p:nvSpPr>
-          <p:cNvPr id="7" name="Rounded Rectangle 6"/>
+              <a:t>  ✓ 预防心血管疾病</a:t>
+            </a:r>
+          </a:p>
+          <a:p>
+            <a:pPr algn="l">
+              <a:spcAft>
+                <a:spcPts val="350"/>
+              </a:spcAft>
+              <a:defRPr sz="1400">
+                <a:solidFill>
+                  <a:srgbClr val="F0FDF4"/>
+                </a:solidFill>
+                <a:latin typeface="Microsoft YaHei"/>
+              </a:defRPr>
+            </a:pPr>
+            <a:r>
+              <a:t>  ✓ 抗炎抗氧化 · 健脑益智</a:t>
+            </a:r>
+          </a:p>
+        </p:txBody>
+      </p:sp>
+      <p:sp>
+        <p:nvSpPr>
+          <p:cNvPr id="8" name="Rounded Rectangle 7"/>
           <p:cNvSpPr/>
           <p:nvPr/>
         </p:nvSpPr>
@@ -15441,7 +17101,7 @@
             </a:avLst>
           </a:prstGeom>
           <a:solidFill>
-            <a:srgbClr val="2D6A4F"/>
+            <a:srgbClr val="3D1A1A"/>
           </a:solidFill>
           <a:ln>
             <a:noFill/>
@@ -15471,7 +17131,7 @@
       </p:sp>
       <p:sp>
         <p:nvSpPr>
-          <p:cNvPr id="8" name="TextBox 7"/>
+          <p:cNvPr id="9" name="TextBox 8"/>
           <p:cNvSpPr txBox="1"/>
           <p:nvPr/>
         </p:nvSpPr>
@@ -15503,7 +17163,7 @@
               </a:defRPr>
             </a:pPr>
             <a:r>
-              <a:t>💡 关键数字</a:t>
+              <a:t>💡 君药关键数字</a:t>
             </a:r>
           </a:p>
           <a:p>
@@ -15532,7 +17192,7 @@
               </a:defRPr>
             </a:pPr>
             <a:r>
-              <a:t>抗氧化能力</a:t>
+              <a:t>α-亚麻酸含量</a:t>
             </a:r>
           </a:p>
           <a:p>
@@ -15548,7 +17208,7 @@
               </a:defRPr>
             </a:pPr>
             <a:r>
-              <a:t>是维生素C的 20倍</a:t>
+              <a:t>54%-67%</a:t>
             </a:r>
           </a:p>
           <a:p>
@@ -15564,7 +17224,7 @@
               </a:defRPr>
             </a:pPr>
             <a:r>
-              <a:t>是维生素E的 50倍</a:t>
+              <a:t>所有植物油中最高</a:t>
             </a:r>
           </a:p>
           <a:p>
@@ -15593,7 +17253,7 @@
               </a:defRPr>
             </a:pPr>
             <a:r>
-              <a:t>适合高温烹饪</a:t>
+              <a:t>临床数据</a:t>
             </a:r>
           </a:p>
           <a:p>
@@ -15609,7 +17269,7 @@
               </a:defRPr>
             </a:pPr>
             <a:r>
-              <a:t>烟点高达 216°C</a:t>
+              <a:t>每日 10g 可使</a:t>
             </a:r>
           </a:p>
           <a:p>
@@ -15624,6 +17284,9 @@
                 <a:latin typeface="Microsoft YaHei"/>
               </a:defRPr>
             </a:pPr>
+            <a:r>
+              <a:t>甘油三酯下降约 8%</a:t>
+            </a:r>
           </a:p>
           <a:p>
             <a:pPr algn="l">
@@ -15637,9 +17300,6 @@
                 <a:latin typeface="Microsoft YaHei"/>
               </a:defRPr>
             </a:pPr>
-            <a:r>
-              <a:t>适合人群：</a:t>
-            </a:r>
           </a:p>
           <a:p>
             <a:pPr algn="l">
@@ -15654,7 +17314,7 @@
               </a:defRPr>
             </a:pPr>
             <a:r>
-              <a:t>✓ 高血脂人群</a:t>
+              <a:t>🏛️ 国家认证</a:t>
             </a:r>
           </a:p>
           <a:p>
@@ -15670,7 +17330,7 @@
               </a:defRPr>
             </a:pPr>
             <a:r>
-              <a:t>✓ 动脉硬化风险者</a:t>
+              <a:t>106种药食同源</a:t>
             </a:r>
           </a:p>
           <a:p>
@@ -15686,14 +17346,14 @@
               </a:defRPr>
             </a:pPr>
             <a:r>
-              <a:t>✓ 关注抗衰老人群</a:t>
-            </a:r>
-          </a:p>
-        </p:txBody>
-      </p:sp>
-      <p:sp>
-        <p:nvSpPr>
-          <p:cNvPr id="9" name="TextBox 8"/>
+              <a:t>唯一油用种子</a:t>
+            </a:r>
+          </a:p>
+        </p:txBody>
+      </p:sp>
+      <p:sp>
+        <p:nvSpPr>
+          <p:cNvPr id="10" name="TextBox 9"/>
           <p:cNvSpPr txBox="1"/>
           <p:nvPr/>
         </p:nvSpPr>
@@ -15722,7 +17382,7 @@
               </a:defRPr>
             </a:pPr>
             <a:r>
-              <a:t>5/18</a:t>
+              <a:t>5/19</a:t>
             </a:r>
           </a:p>
         </p:txBody>
@@ -15878,14 +17538,50 @@
               </a:defRPr>
             </a:pPr>
             <a:r>
-              <a:t>🌾 亚麻籽油 —— Omega-3 之王</a:t>
-            </a:r>
-          </a:p>
-        </p:txBody>
-      </p:sp>
-      <p:sp>
-        <p:nvSpPr>
-          <p:cNvPr id="5" name="Rounded Rectangle 4"/>
+              <a:t>🔷 臣 · 亚麻籽油 —— 强力辅佐</a:t>
+            </a:r>
+          </a:p>
+        </p:txBody>
+      </p:sp>
+      <p:sp>
+        <p:nvSpPr>
+          <p:cNvPr id="5" name="TextBox 4"/>
+          <p:cNvSpPr txBox="1"/>
+          <p:nvPr/>
+        </p:nvSpPr>
+        <p:spPr>
+          <a:xfrm>
+            <a:off x="731520" y="914400"/>
+            <a:ext cx="10515600" cy="457200"/>
+          </a:xfrm>
+          <a:prstGeom prst="rect">
+            <a:avLst/>
+          </a:prstGeom>
+          <a:noFill/>
+        </p:spPr>
+        <p:txBody>
+          <a:bodyPr wrap="square">
+            <a:spAutoFit/>
+          </a:bodyPr>
+          <a:lstStyle/>
+          <a:p>
+            <a:pPr algn="l">
+              <a:defRPr sz="1600" b="0">
+                <a:solidFill>
+                  <a:srgbClr val="6B7280"/>
+                </a:solidFill>
+                <a:latin typeface="Microsoft YaHei"/>
+              </a:defRPr>
+            </a:pPr>
+            <a:r>
+              <a:t>辅助君药增强功效，双倍补充 Omega-3</a:t>
+            </a:r>
+          </a:p>
+        </p:txBody>
+      </p:sp>
+      <p:sp>
+        <p:nvSpPr>
+          <p:cNvPr id="6" name="Rounded Rectangle 5"/>
           <p:cNvSpPr/>
           <p:nvPr/>
         </p:nvSpPr>
@@ -15930,7 +17626,7 @@
       </p:sp>
       <p:sp>
         <p:nvSpPr>
-          <p:cNvPr id="6" name="TextBox 5"/>
+          <p:cNvPr id="7" name="TextBox 6"/>
           <p:cNvSpPr txBox="1"/>
           <p:nvPr/>
         </p:nvSpPr>
@@ -15962,7 +17658,7 @@
               </a:defRPr>
             </a:pPr>
             <a:r>
-              <a:t>核心成分与功效</a:t>
+              <a:t>🔷 臣药地位：辅助君药，增强功效</a:t>
             </a:r>
           </a:p>
           <a:p>
@@ -15991,7 +17687,7 @@
               </a:defRPr>
             </a:pPr>
             <a:r>
-              <a:t>🔸 α-亚麻酸（ALA）含量高达55%</a:t>
+              <a:t>🔸 α-亚麻酸（ALA）含量高达 55%</a:t>
             </a:r>
           </a:p>
           <a:p>
@@ -16007,7 +17703,7 @@
               </a:defRPr>
             </a:pPr>
             <a:r>
-              <a:t>  • 陆地植物中Omega-3含量最高</a:t>
+              <a:t>  • 陆地植物中 Omega-3 含量最高</a:t>
             </a:r>
           </a:p>
           <a:p>
@@ -16052,7 +17748,7 @@
               </a:defRPr>
             </a:pPr>
             <a:r>
-              <a:t>🔸 木酚素：</a:t>
+              <a:t>🔸 与君药（紫苏籽油）协同：</a:t>
             </a:r>
           </a:p>
           <a:p>
@@ -16068,7 +17764,7 @@
               </a:defRPr>
             </a:pPr>
             <a:r>
-              <a:t>  • 与Omega-3协同作用</a:t>
+              <a:t>  • 双倍补充 α-亚麻酸</a:t>
             </a:r>
           </a:p>
           <a:p>
@@ -16084,7 +17780,7 @@
               </a:defRPr>
             </a:pPr>
             <a:r>
-              <a:t>  • 提升内皮细胞活性</a:t>
+              <a:t>  • 协同调节血脂、呵护心血管</a:t>
             </a:r>
           </a:p>
           <a:p>
@@ -16113,7 +17809,7 @@
               </a:defRPr>
             </a:pPr>
             <a:r>
-              <a:t>🔸 三大功效（2025年专家共识）：</a:t>
+              <a:t>🔸 木酚素：</a:t>
             </a:r>
           </a:p>
           <a:p>
@@ -16129,7 +17825,7 @@
               </a:defRPr>
             </a:pPr>
             <a:r>
-              <a:t>  ✓ 降低炎症反应</a:t>
+              <a:t>  • 含量是其他植物油的 75-800 倍</a:t>
             </a:r>
           </a:p>
           <a:p>
@@ -16145,7 +17841,7 @@
               </a:defRPr>
             </a:pPr>
             <a:r>
-              <a:t>  ✓ 改善血压水平</a:t>
+              <a:t>  • 与 Omega-3 协同，提升内皮细胞活性</a:t>
             </a:r>
           </a:p>
           <a:p>
@@ -16160,9 +17856,6 @@
                 <a:latin typeface="Microsoft YaHei"/>
               </a:defRPr>
             </a:pPr>
-            <a:r>
-              <a:t>  ✓ 提升胰岛素敏感度</a:t>
-            </a:r>
           </a:p>
           <a:p>
             <a:pPr algn="l">
@@ -16176,28 +17869,15 @@
                 <a:latin typeface="Microsoft YaHei"/>
               </a:defRPr>
             </a:pPr>
-          </a:p>
-          <a:p>
-            <a:pPr algn="l">
-              <a:spcAft>
-                <a:spcPts val="350"/>
-              </a:spcAft>
-              <a:defRPr sz="1400">
-                <a:solidFill>
-                  <a:srgbClr val="F0FDF4"/>
-                </a:solidFill>
-                <a:latin typeface="Microsoft YaHei"/>
-              </a:defRPr>
-            </a:pPr>
-            <a:r>
-              <a:t>📊 研究显示：有助于降血脂、降血压、降血糖</a:t>
-            </a:r>
-          </a:p>
-        </p:txBody>
-      </p:sp>
-      <p:sp>
-        <p:nvSpPr>
-          <p:cNvPr id="7" name="Rounded Rectangle 6"/>
+            <a:r>
+              <a:t>📊 2025 专家共识：降炎症 · 改善血压 · 提升胰岛素敏感度</a:t>
+            </a:r>
+          </a:p>
+        </p:txBody>
+      </p:sp>
+      <p:sp>
+        <p:nvSpPr>
+          <p:cNvPr id="8" name="Rounded Rectangle 7"/>
           <p:cNvSpPr/>
           <p:nvPr/>
         </p:nvSpPr>
@@ -16212,7 +17892,7 @@
             </a:avLst>
           </a:prstGeom>
           <a:solidFill>
-            <a:srgbClr val="2D6A4F"/>
+            <a:srgbClr val="1A2E4A"/>
           </a:solidFill>
           <a:ln>
             <a:noFill/>
@@ -16242,7 +17922,7 @@
       </p:sp>
       <p:sp>
         <p:nvSpPr>
-          <p:cNvPr id="8" name="TextBox 7"/>
+          <p:cNvPr id="9" name="TextBox 8"/>
           <p:cNvSpPr txBox="1"/>
           <p:nvPr/>
         </p:nvSpPr>
@@ -16274,7 +17954,7 @@
               </a:defRPr>
             </a:pPr>
             <a:r>
-              <a:t>💡 关键数字</a:t>
+              <a:t>💡 臣药关键数字</a:t>
             </a:r>
           </a:p>
           <a:p>
@@ -16335,7 +18015,7 @@
               </a:defRPr>
             </a:pPr>
             <a:r>
-              <a:t>陆地最高Omega-3来源</a:t>
+              <a:t>陆地最高 Omega-3 来源</a:t>
             </a:r>
           </a:p>
           <a:p>
@@ -16396,7 +18076,7 @@
               </a:defRPr>
             </a:pPr>
             <a:r>
-              <a:t>75-800倍</a:t>
+              <a:t>75-800 倍</a:t>
             </a:r>
           </a:p>
           <a:p>
@@ -16425,7 +18105,7 @@
               </a:defRPr>
             </a:pPr>
             <a:r>
-              <a:t>适合人群：</a:t>
+              <a:t>三大功效（共识）</a:t>
             </a:r>
           </a:p>
           <a:p>
@@ -16441,7 +18121,7 @@
               </a:defRPr>
             </a:pPr>
             <a:r>
-              <a:t>✓ 三高人群</a:t>
+              <a:t>✓ 降低炎症</a:t>
             </a:r>
           </a:p>
           <a:p>
@@ -16457,7 +18137,7 @@
               </a:defRPr>
             </a:pPr>
             <a:r>
-              <a:t>✓ 心血管问题</a:t>
+              <a:t>✓ 改善血压</a:t>
             </a:r>
           </a:p>
           <a:p>
@@ -16473,14 +18153,14 @@
               </a:defRPr>
             </a:pPr>
             <a:r>
-              <a:t>✓ 慢性炎症患者</a:t>
-            </a:r>
-          </a:p>
-        </p:txBody>
-      </p:sp>
-      <p:sp>
-        <p:nvSpPr>
-          <p:cNvPr id="9" name="TextBox 8"/>
+              <a:t>✓ 提升胰岛素敏感度</a:t>
+            </a:r>
+          </a:p>
+        </p:txBody>
+      </p:sp>
+      <p:sp>
+        <p:nvSpPr>
+          <p:cNvPr id="10" name="TextBox 9"/>
           <p:cNvSpPr txBox="1"/>
           <p:nvPr/>
         </p:nvSpPr>
@@ -16509,7 +18189,7 @@
               </a:defRPr>
             </a:pPr>
             <a:r>
-              <a:t>6/18</a:t>
+              <a:t>6/19</a:t>
             </a:r>
           </a:p>
         </p:txBody>
@@ -16665,14 +18345,50 @@
               </a:defRPr>
             </a:pPr>
             <a:r>
-              <a:t>🌿 山茶籽油 —— 东方橄榄油</a:t>
-            </a:r>
-          </a:p>
-        </p:txBody>
-      </p:sp>
-      <p:sp>
-        <p:nvSpPr>
-          <p:cNvPr id="5" name="Rounded Rectangle 4"/>
+              <a:t>🌿 佐 · 山茶籽油 —— 平衡调和</a:t>
+            </a:r>
+          </a:p>
+        </p:txBody>
+      </p:sp>
+      <p:sp>
+        <p:nvSpPr>
+          <p:cNvPr id="5" name="TextBox 4"/>
+          <p:cNvSpPr txBox="1"/>
+          <p:nvPr/>
+        </p:nvSpPr>
+        <p:spPr>
+          <a:xfrm>
+            <a:off x="731520" y="914400"/>
+            <a:ext cx="10515600" cy="457200"/>
+          </a:xfrm>
+          <a:prstGeom prst="rect">
+            <a:avLst/>
+          </a:prstGeom>
+          <a:noFill/>
+        </p:spPr>
+        <p:txBody>
+          <a:bodyPr wrap="square">
+            <a:spAutoFit/>
+          </a:bodyPr>
+          <a:lstStyle/>
+          <a:p>
+            <a:pPr algn="l">
+              <a:defRPr sz="1600" b="0">
+                <a:solidFill>
+                  <a:srgbClr val="6B7280"/>
+                </a:solidFill>
+                <a:latin typeface="Microsoft YaHei"/>
+              </a:defRPr>
+            </a:pPr>
+            <a:r>
+              <a:t>制衡药性，兼顾次要问题，温和滋养</a:t>
+            </a:r>
+          </a:p>
+        </p:txBody>
+      </p:sp>
+      <p:sp>
+        <p:nvSpPr>
+          <p:cNvPr id="6" name="Rounded Rectangle 5"/>
           <p:cNvSpPr/>
           <p:nvPr/>
         </p:nvSpPr>
@@ -16717,7 +18433,7 @@
       </p:sp>
       <p:sp>
         <p:nvSpPr>
-          <p:cNvPr id="6" name="TextBox 5"/>
+          <p:cNvPr id="7" name="TextBox 6"/>
           <p:cNvSpPr txBox="1"/>
           <p:nvPr/>
         </p:nvSpPr>
@@ -16749,7 +18465,7 @@
               </a:defRPr>
             </a:pPr>
             <a:r>
-              <a:t>核心成分与功效</a:t>
+              <a:t>🌿 佐药地位：制衡药性、兼顾次要问题</a:t>
             </a:r>
           </a:p>
           <a:p>
@@ -16778,7 +18494,7 @@
               </a:defRPr>
             </a:pPr>
             <a:r>
-              <a:t>🔸 单不饱和脂肪酸含量高达80%-83%</a:t>
+              <a:t>🔸 单不饱和脂肪酸含量高达 80%-83%</a:t>
             </a:r>
           </a:p>
           <a:p>
@@ -16794,7 +18510,7 @@
               </a:defRPr>
             </a:pPr>
             <a:r>
-              <a:t>  • 与橄榄油相当，被誉为"东方橄榄油"</a:t>
+              <a:t>  • 与特级初榨橄榄油相当</a:t>
             </a:r>
           </a:p>
           <a:p>
@@ -16810,7 +18526,7 @@
               </a:defRPr>
             </a:pPr>
             <a:r>
-              <a:t>  • 易于人体吸收，不增加身体负担</a:t>
+              <a:t>  • 被誉为"东方橄榄油"</a:t>
             </a:r>
           </a:p>
           <a:p>
@@ -16839,7 +18555,7 @@
               </a:defRPr>
             </a:pPr>
             <a:r>
-              <a:t>🔸 中国农大专家指出三大益处：</a:t>
+              <a:t>🔸 佐药的三大作用：</a:t>
             </a:r>
           </a:p>
           <a:p>
@@ -16855,7 +18571,7 @@
               </a:defRPr>
             </a:pPr>
             <a:r>
-              <a:t>  ✓ 降血压 —— 改善血管功能</a:t>
+              <a:t>  ✓ 制衡 —— 平衡 Omega-3/6/9 比例</a:t>
             </a:r>
           </a:p>
           <a:p>
@@ -16871,7 +18587,7 @@
               </a:defRPr>
             </a:pPr>
             <a:r>
-              <a:t>  ✓ 降血脂 —— 减少坏胆固醇</a:t>
+              <a:t>  ✓ 兼顾 —— 辅助降血糖、抗氧化</a:t>
             </a:r>
           </a:p>
           <a:p>
@@ -16887,7 +18603,7 @@
               </a:defRPr>
             </a:pPr>
             <a:r>
-              <a:t>  ✓ 控血糖 —— 改善胰岛素抵抗</a:t>
+              <a:t>  ✓ 调和 —— 温和滋养、不增加身体负担</a:t>
             </a:r>
           </a:p>
           <a:p>
@@ -16916,7 +18632,7 @@
               </a:defRPr>
             </a:pPr>
             <a:r>
-              <a:t>🔸 抗氧化能力：</a:t>
+              <a:t>🔸 中国农大专家指出：</a:t>
             </a:r>
           </a:p>
           <a:p>
@@ -16932,30 +18648,14 @@
               </a:defRPr>
             </a:pPr>
             <a:r>
-              <a:t>  • 抑制动脉硬化</a:t>
-            </a:r>
-          </a:p>
-          <a:p>
-            <a:pPr algn="l">
-              <a:spcAft>
-                <a:spcPts val="350"/>
-              </a:spcAft>
-              <a:defRPr sz="1400">
-                <a:solidFill>
-                  <a:srgbClr val="F0FDF4"/>
-                </a:solidFill>
-                <a:latin typeface="Microsoft YaHei"/>
-              </a:defRPr>
-            </a:pPr>
-            <a:r>
-              <a:t>  • 清除自由基、延缓衰老</a:t>
-            </a:r>
-          </a:p>
-        </p:txBody>
-      </p:sp>
-      <p:sp>
-        <p:nvSpPr>
-          <p:cNvPr id="7" name="Rounded Rectangle 6"/>
+              <a:t>  降血压 · 降血脂 · 控血糖 · 抑制动脉硬化</a:t>
+            </a:r>
+          </a:p>
+        </p:txBody>
+      </p:sp>
+      <p:sp>
+        <p:nvSpPr>
+          <p:cNvPr id="8" name="Rounded Rectangle 7"/>
           <p:cNvSpPr/>
           <p:nvPr/>
         </p:nvSpPr>
@@ -16970,7 +18670,7 @@
             </a:avLst>
           </a:prstGeom>
           <a:solidFill>
-            <a:srgbClr val="2D6A4F"/>
+            <a:srgbClr val="1A3D2E"/>
           </a:solidFill>
           <a:ln>
             <a:noFill/>
@@ -17000,7 +18700,7 @@
       </p:sp>
       <p:sp>
         <p:nvSpPr>
-          <p:cNvPr id="8" name="TextBox 7"/>
+          <p:cNvPr id="9" name="TextBox 8"/>
           <p:cNvSpPr txBox="1"/>
           <p:nvPr/>
         </p:nvSpPr>
@@ -17032,7 +18732,7 @@
               </a:defRPr>
             </a:pPr>
             <a:r>
-              <a:t>💡 关键数字</a:t>
+              <a:t>💡 佐药关键数字</a:t>
             </a:r>
           </a:p>
           <a:p>
@@ -17154,7 +18854,7 @@
               </a:defRPr>
             </a:pPr>
             <a:r>
-              <a:t>远高于橄榄油(190°C)</a:t>
+              <a:t>远高于橄榄油 (190°C)</a:t>
             </a:r>
           </a:p>
           <a:p>
@@ -17183,7 +18883,7 @@
               </a:defRPr>
             </a:pPr>
             <a:r>
-              <a:t>适合人群：</a:t>
+              <a:t>三大佐助功效</a:t>
             </a:r>
           </a:p>
           <a:p>
@@ -17199,7 +18899,7 @@
               </a:defRPr>
             </a:pPr>
             <a:r>
-              <a:t>✓ 三高人群</a:t>
+              <a:t>✓ 平衡脂肪酸比例</a:t>
             </a:r>
           </a:p>
           <a:p>
@@ -17215,7 +18915,7 @@
               </a:defRPr>
             </a:pPr>
             <a:r>
-              <a:t>✓ 关注心脑血管</a:t>
+              <a:t>✓ 辅助降血糖</a:t>
             </a:r>
           </a:p>
           <a:p>
@@ -17231,14 +18931,14 @@
               </a:defRPr>
             </a:pPr>
             <a:r>
-              <a:t>✓ 追求健康烹饪</a:t>
-            </a:r>
-          </a:p>
-        </p:txBody>
-      </p:sp>
-      <p:sp>
-        <p:nvSpPr>
-          <p:cNvPr id="9" name="TextBox 8"/>
+              <a:t>✓ 温和抗氧化</a:t>
+            </a:r>
+          </a:p>
+        </p:txBody>
+      </p:sp>
+      <p:sp>
+        <p:nvSpPr>
+          <p:cNvPr id="10" name="TextBox 9"/>
           <p:cNvSpPr txBox="1"/>
           <p:nvPr/>
         </p:nvSpPr>
@@ -17267,7 +18967,7 @@
               </a:defRPr>
             </a:pPr>
             <a:r>
-              <a:t>7/18</a:t>
+              <a:t>7/19</a:t>
             </a:r>
           </a:p>
         </p:txBody>
@@ -17423,14 +19123,50 @@
               </a:defRPr>
             </a:pPr>
             <a:r>
-              <a:t>🍃 紫苏籽油 —— 药食同源的瑰宝</a:t>
-            </a:r>
-          </a:p>
-        </p:txBody>
-      </p:sp>
-      <p:sp>
-        <p:nvSpPr>
-          <p:cNvPr id="5" name="Rounded Rectangle 4"/>
+              <a:t>🍇 使 · 葡萄籽油 —— 引药归经</a:t>
+            </a:r>
+          </a:p>
+        </p:txBody>
+      </p:sp>
+      <p:sp>
+        <p:nvSpPr>
+          <p:cNvPr id="5" name="TextBox 4"/>
+          <p:cNvSpPr txBox="1"/>
+          <p:nvPr/>
+        </p:nvSpPr>
+        <p:spPr>
+          <a:xfrm>
+            <a:off x="731520" y="914400"/>
+            <a:ext cx="10515600" cy="457200"/>
+          </a:xfrm>
+          <a:prstGeom prst="rect">
+            <a:avLst/>
+          </a:prstGeom>
+          <a:noFill/>
+        </p:spPr>
+        <p:txBody>
+          <a:bodyPr wrap="square">
+            <a:spAutoFit/>
+          </a:bodyPr>
+          <a:lstStyle/>
+          <a:p>
+            <a:pPr algn="l">
+              <a:defRPr sz="1600" b="0">
+                <a:solidFill>
+                  <a:srgbClr val="6B7280"/>
+                </a:solidFill>
+                <a:latin typeface="Microsoft YaHei"/>
+              </a:defRPr>
+            </a:pPr>
+            <a:r>
+              <a:t>引导诸药到达作用部位，调和诸油</a:t>
+            </a:r>
+          </a:p>
+        </p:txBody>
+      </p:sp>
+      <p:sp>
+        <p:nvSpPr>
+          <p:cNvPr id="6" name="Rounded Rectangle 5"/>
           <p:cNvSpPr/>
           <p:nvPr/>
         </p:nvSpPr>
@@ -17475,7 +19211,7 @@
       </p:sp>
       <p:sp>
         <p:nvSpPr>
-          <p:cNvPr id="6" name="TextBox 5"/>
+          <p:cNvPr id="7" name="TextBox 6"/>
           <p:cNvSpPr txBox="1"/>
           <p:nvPr/>
         </p:nvSpPr>
@@ -17507,7 +19243,7 @@
               </a:defRPr>
             </a:pPr>
             <a:r>
-              <a:t>核心成分与功效</a:t>
+              <a:t>🍇 使药地位：引药归经、调和诸药</a:t>
             </a:r>
           </a:p>
           <a:p>
@@ -17536,7 +19272,7 @@
               </a:defRPr>
             </a:pPr>
             <a:r>
-              <a:t>🔸 α-亚麻酸含量高达54%-67%</a:t>
+              <a:t>🔸 原花青素（OPC）：</a:t>
             </a:r>
           </a:p>
           <a:p>
@@ -17552,7 +19288,7 @@
               </a:defRPr>
             </a:pPr>
             <a:r>
-              <a:t>  • 国际医学界公认的天然保健品</a:t>
+              <a:t>  • 自然界最强抗氧化剂之一</a:t>
             </a:r>
           </a:p>
           <a:p>
@@ -17568,7 +19304,7 @@
               </a:defRPr>
             </a:pPr>
             <a:r>
-              <a:t>  • 唯一入选国家药食同源目录的油用种子</a:t>
+              <a:t>  • 抗氧化力 = 维生素C × 20、维生素E × 50</a:t>
             </a:r>
           </a:p>
           <a:p>
@@ -17583,6 +19319,9 @@
                 <a:latin typeface="Microsoft YaHei"/>
               </a:defRPr>
             </a:pPr>
+            <a:r>
+              <a:t>  • 清除自由基，保护血管弹性</a:t>
+            </a:r>
           </a:p>
           <a:p>
             <a:pPr algn="l">
@@ -17596,9 +19335,6 @@
                 <a:latin typeface="Microsoft YaHei"/>
               </a:defRPr>
             </a:pPr>
-            <a:r>
-              <a:t>🔸 中医传统认知：</a:t>
-            </a:r>
           </a:p>
           <a:p>
             <a:pPr algn="l">
@@ -17613,7 +19349,7 @@
               </a:defRPr>
             </a:pPr>
             <a:r>
-              <a:t>  • "解表散寒，行气和胃"</a:t>
+              <a:t>🔸 使药的两大作用：</a:t>
             </a:r>
           </a:p>
           <a:p>
@@ -17629,7 +19365,7 @@
               </a:defRPr>
             </a:pPr>
             <a:r>
-              <a:t>  • 降气消痰，平喘润肠</a:t>
+              <a:t>  ✓ 引药归经 —— 引导诸油成分到达血管</a:t>
             </a:r>
           </a:p>
           <a:p>
@@ -17644,6 +19380,9 @@
                 <a:latin typeface="Microsoft YaHei"/>
               </a:defRPr>
             </a:pPr>
+            <a:r>
+              <a:t>  ✓ 调和诸油 —— 促进吸收、增强整体效果</a:t>
+            </a:r>
           </a:p>
           <a:p>
             <a:pPr algn="l">
@@ -17657,9 +19396,6 @@
                 <a:latin typeface="Microsoft YaHei"/>
               </a:defRPr>
             </a:pPr>
-            <a:r>
-              <a:t>🔸 现代研究证实：</a:t>
-            </a:r>
           </a:p>
           <a:p>
             <a:pPr algn="l">
@@ -17674,7 +19410,7 @@
               </a:defRPr>
             </a:pPr>
             <a:r>
-              <a:t>  ✓ 调节血脂 —— 甘油三酯下降约8%</a:t>
+              <a:t>🔸 亚油酸 + 维生素E：</a:t>
             </a:r>
           </a:p>
           <a:p>
@@ -17690,7 +19426,7 @@
               </a:defRPr>
             </a:pPr>
             <a:r>
-              <a:t>  ✓ 预防心血管疾病</a:t>
+              <a:t>  • 降低血清胆固醇和甘油三酯</a:t>
             </a:r>
           </a:p>
           <a:p>
@@ -17706,30 +19442,14 @@
               </a:defRPr>
             </a:pPr>
             <a:r>
-              <a:t>  ✓ 抗炎抗氧化</a:t>
-            </a:r>
-          </a:p>
-          <a:p>
-            <a:pPr algn="l">
-              <a:spcAft>
-                <a:spcPts val="350"/>
-              </a:spcAft>
-              <a:defRPr sz="1400">
-                <a:solidFill>
-                  <a:srgbClr val="F0FDF4"/>
-                </a:solidFill>
-                <a:latin typeface="Microsoft YaHei"/>
-              </a:defRPr>
-            </a:pPr>
-            <a:r>
-              <a:t>  ✓ 健脑益智</a:t>
-            </a:r>
-          </a:p>
-        </p:txBody>
-      </p:sp>
-      <p:sp>
-        <p:nvSpPr>
-          <p:cNvPr id="7" name="Rounded Rectangle 6"/>
+              <a:t>  • 增强免疫力，保护细胞膜</a:t>
+            </a:r>
+          </a:p>
+        </p:txBody>
+      </p:sp>
+      <p:sp>
+        <p:nvSpPr>
+          <p:cNvPr id="8" name="Rounded Rectangle 7"/>
           <p:cNvSpPr/>
           <p:nvPr/>
         </p:nvSpPr>
@@ -17744,7 +19464,7 @@
             </a:avLst>
           </a:prstGeom>
           <a:solidFill>
-            <a:srgbClr val="2D6A4F"/>
+            <a:srgbClr val="2D1A3D"/>
           </a:solidFill>
           <a:ln>
             <a:noFill/>
@@ -17774,7 +19494,7 @@
       </p:sp>
       <p:sp>
         <p:nvSpPr>
-          <p:cNvPr id="8" name="TextBox 7"/>
+          <p:cNvPr id="9" name="TextBox 8"/>
           <p:cNvSpPr txBox="1"/>
           <p:nvPr/>
         </p:nvSpPr>
@@ -17806,7 +19526,7 @@
               </a:defRPr>
             </a:pPr>
             <a:r>
-              <a:t>💡 关键数字</a:t>
+              <a:t>💡 使药关键数字</a:t>
             </a:r>
           </a:p>
           <a:p>
@@ -17835,7 +19555,7 @@
               </a:defRPr>
             </a:pPr>
             <a:r>
-              <a:t>α-亚麻酸含量</a:t>
+              <a:t>抗氧化能力</a:t>
             </a:r>
           </a:p>
           <a:p>
@@ -17851,7 +19571,7 @@
               </a:defRPr>
             </a:pPr>
             <a:r>
-              <a:t>54%-67%</a:t>
+              <a:t>维生素C × 20</a:t>
             </a:r>
           </a:p>
           <a:p>
@@ -17867,7 +19587,7 @@
               </a:defRPr>
             </a:pPr>
             <a:r>
-              <a:t>所有植物油中最高</a:t>
+              <a:t>维生素E × 50</a:t>
             </a:r>
           </a:p>
           <a:p>
@@ -17896,7 +19616,7 @@
               </a:defRPr>
             </a:pPr>
             <a:r>
-              <a:t>临床数据</a:t>
+              <a:t>发烟点</a:t>
             </a:r>
           </a:p>
           <a:p>
@@ -17912,7 +19632,7 @@
               </a:defRPr>
             </a:pPr>
             <a:r>
-              <a:t>每日10g可使</a:t>
+              <a:t>216°C</a:t>
             </a:r>
           </a:p>
           <a:p>
@@ -17928,7 +19648,7 @@
               </a:defRPr>
             </a:pPr>
             <a:r>
-              <a:t>甘油三酯下降约8%</a:t>
+              <a:t>适合日常烹饪</a:t>
             </a:r>
           </a:p>
           <a:p>
@@ -17957,7 +19677,7 @@
               </a:defRPr>
             </a:pPr>
             <a:r>
-              <a:t>适合人群：</a:t>
+              <a:t>使药两大使命</a:t>
             </a:r>
           </a:p>
           <a:p>
@@ -17973,7 +19693,7 @@
               </a:defRPr>
             </a:pPr>
             <a:r>
-              <a:t>✓ 高血压患者</a:t>
+              <a:t>✓ 引药归经</a:t>
             </a:r>
           </a:p>
           <a:p>
@@ -17989,30 +19709,14 @@
               </a:defRPr>
             </a:pPr>
             <a:r>
-              <a:t>✓ 高血脂人群</a:t>
-            </a:r>
-          </a:p>
-          <a:p>
-            <a:pPr algn="l">
-              <a:spcAft>
-                <a:spcPts val="420"/>
-              </a:spcAft>
-              <a:defRPr sz="1400">
-                <a:solidFill>
-                  <a:srgbClr val="F0FDF4"/>
-                </a:solidFill>
-                <a:latin typeface="Microsoft YaHei"/>
-              </a:defRPr>
-            </a:pPr>
-            <a:r>
-              <a:t>✓ 脑力工作者</a:t>
-            </a:r>
-          </a:p>
-        </p:txBody>
-      </p:sp>
-      <p:sp>
-        <p:nvSpPr>
-          <p:cNvPr id="9" name="TextBox 8"/>
+              <a:t>✓ 调和诸油</a:t>
+            </a:r>
+          </a:p>
+        </p:txBody>
+      </p:sp>
+      <p:sp>
+        <p:nvSpPr>
+          <p:cNvPr id="10" name="TextBox 9"/>
           <p:cNvSpPr txBox="1"/>
           <p:nvPr/>
         </p:nvSpPr>
@@ -18041,7 +19745,7 @@
               </a:defRPr>
             </a:pPr>
             <a:r>
-              <a:t>8/18</a:t>
+              <a:t>8/19</a:t>
             </a:r>
           </a:p>
         </p:txBody>
@@ -18197,14 +19901,50 @@
               </a:defRPr>
             </a:pPr>
             <a:r>
-              <a:t>⚡ 四油合一：1+1+1+1 &gt; 4 的协同效应</a:t>
-            </a:r>
-          </a:p>
-        </p:txBody>
-      </p:sp>
-      <p:sp>
-        <p:nvSpPr>
-          <p:cNvPr id="5" name="Rounded Rectangle 4"/>
+              <a:t>⚡ 四油合一：君臣佐使的协同效应</a:t>
+            </a:r>
+          </a:p>
+        </p:txBody>
+      </p:sp>
+      <p:sp>
+        <p:nvSpPr>
+          <p:cNvPr id="5" name="TextBox 4"/>
+          <p:cNvSpPr txBox="1"/>
+          <p:nvPr/>
+        </p:nvSpPr>
+        <p:spPr>
+          <a:xfrm>
+            <a:off x="731520" y="914400"/>
+            <a:ext cx="10515600" cy="457200"/>
+          </a:xfrm>
+          <a:prstGeom prst="rect">
+            <a:avLst/>
+          </a:prstGeom>
+          <a:noFill/>
+        </p:spPr>
+        <p:txBody>
+          <a:bodyPr wrap="square">
+            <a:spAutoFit/>
+          </a:bodyPr>
+          <a:lstStyle/>
+          <a:p>
+            <a:pPr algn="l">
+              <a:defRPr sz="1600" b="0">
+                <a:solidFill>
+                  <a:srgbClr val="6B7280"/>
+                </a:solidFill>
+                <a:latin typeface="Microsoft YaHei"/>
+              </a:defRPr>
+            </a:pPr>
+            <a:r>
+              <a:t>君+臣+佐+使 = 完整的配伍体系</a:t>
+            </a:r>
+          </a:p>
+        </p:txBody>
+      </p:sp>
+      <p:sp>
+        <p:nvSpPr>
+          <p:cNvPr id="6" name="Rounded Rectangle 5"/>
           <p:cNvSpPr/>
           <p:nvPr/>
         </p:nvSpPr>
@@ -18249,7 +19989,7 @@
       </p:sp>
       <p:sp>
         <p:nvSpPr>
-          <p:cNvPr id="6" name="TextBox 5"/>
+          <p:cNvPr id="7" name="TextBox 6"/>
           <p:cNvSpPr txBox="1"/>
           <p:nvPr/>
         </p:nvSpPr>
@@ -18281,7 +20021,7 @@
               </a:defRPr>
             </a:pPr>
             <a:r>
-              <a:t>💡 核心原理：单吃一种油，好比只练一门功夫。四种油科学配比，各司其职、互相配合，实现协同增效。</a:t>
+              <a:t>💡 核心原理：四籽油丸按照中医「君臣佐使」理论配伍，四种油各有角色、各司其职、互相配合。</a:t>
             </a:r>
           </a:p>
           <a:p>
@@ -18297,7 +20037,7 @@
               </a:defRPr>
             </a:pPr>
             <a:r>
-              <a:t>紫苏籽油 + 亚麻籽油 → 双倍补充α-亚麻酸，协同调节血脂、呵护心血管</a:t>
+              <a:t>👑 君（紫苏籽油）→ 核心降脂主力  |  🔷 臣（亚麻籽油）→ 双倍增强 Omega-3</a:t>
             </a:r>
           </a:p>
           <a:p>
@@ -18313,14 +20053,14 @@
               </a:defRPr>
             </a:pPr>
             <a:r>
-              <a:t>葡萄籽油 → 原花青素抗氧化、清除自由基  |  山茶籽油 → 单不饱和脂肪酸助力降血压、降血脂</a:t>
-            </a:r>
-          </a:p>
-        </p:txBody>
-      </p:sp>
-      <p:sp>
-        <p:nvSpPr>
-          <p:cNvPr id="7" name="Rounded Rectangle 6"/>
+              <a:t>🌿 佐（山茶籽油）→ 平衡调和、兼顾血糖  |  🍇 使（葡萄籽油）→ 引药归经、抗氧化保护</a:t>
+            </a:r>
+          </a:p>
+        </p:txBody>
+      </p:sp>
+      <p:sp>
+        <p:nvSpPr>
+          <p:cNvPr id="8" name="Rounded Rectangle 7"/>
           <p:cNvSpPr/>
           <p:nvPr/>
         </p:nvSpPr>
@@ -18365,7 +20105,50 @@
       </p:sp>
       <p:sp>
         <p:nvSpPr>
-          <p:cNvPr id="8" name="TextBox 7"/>
+          <p:cNvPr id="9" name="Rectangle 8"/>
+          <p:cNvSpPr/>
+          <p:nvPr/>
+        </p:nvSpPr>
+        <p:spPr>
+          <a:xfrm>
+            <a:off x="731520" y="3383280"/>
+            <a:ext cx="2606040" cy="54864"/>
+          </a:xfrm>
+          <a:prstGeom prst="rect">
+            <a:avLst/>
+          </a:prstGeom>
+          <a:solidFill>
+            <a:srgbClr val="DC2626"/>
+          </a:solidFill>
+          <a:ln>
+            <a:noFill/>
+          </a:ln>
+        </p:spPr>
+        <p:style>
+          <a:lnRef idx="1">
+            <a:schemeClr val="accent1"/>
+          </a:lnRef>
+          <a:fillRef idx="3">
+            <a:schemeClr val="accent1"/>
+          </a:fillRef>
+          <a:effectRef idx="2">
+            <a:schemeClr val="accent1"/>
+          </a:effectRef>
+          <a:fontRef idx="minor">
+            <a:schemeClr val="lt1"/>
+          </a:fontRef>
+        </p:style>
+        <p:txBody>
+          <a:bodyPr rtlCol="0" anchor="ctr"/>
+          <a:lstStyle/>
+          <a:p>
+            <a:pPr algn="ctr"/>
+          </a:p>
+        </p:txBody>
+      </p:sp>
+      <p:sp>
+        <p:nvSpPr>
+          <p:cNvPr id="10" name="TextBox 9"/>
           <p:cNvSpPr txBox="1"/>
           <p:nvPr/>
         </p:nvSpPr>
@@ -18401,7 +20184,7 @@
       </p:sp>
       <p:sp>
         <p:nvSpPr>
-          <p:cNvPr id="9" name="TextBox 8"/>
+          <p:cNvPr id="11" name="TextBox 10"/>
           <p:cNvSpPr txBox="1"/>
           <p:nvPr/>
         </p:nvSpPr>
@@ -18430,11 +20213,11 @@
               </a:defRPr>
             </a:pPr>
             <a:r>
-              <a:t>四种籽油的不饱和脂肪酸</a:t>
+              <a:t>君+臣：双倍 α-亚麻酸</a:t>
             </a:r>
             <a:br/>
             <a:r>
-              <a:t>帮助代谢体内饱和脂肪</a:t>
+              <a:t>代谢体内饱和脂肪</a:t>
             </a:r>
             <a:br/>
             <a:r>
@@ -18445,7 +20228,7 @@
       </p:sp>
       <p:sp>
         <p:nvSpPr>
-          <p:cNvPr id="10" name="Rounded Rectangle 9"/>
+          <p:cNvPr id="12" name="Rounded Rectangle 11"/>
           <p:cNvSpPr/>
           <p:nvPr/>
         </p:nvSpPr>
@@ -18490,7 +20273,50 @@
       </p:sp>
       <p:sp>
         <p:nvSpPr>
-          <p:cNvPr id="11" name="TextBox 10"/>
+          <p:cNvPr id="13" name="Rectangle 12"/>
+          <p:cNvSpPr/>
+          <p:nvPr/>
+        </p:nvSpPr>
+        <p:spPr>
+          <a:xfrm>
+            <a:off x="3520439" y="3383280"/>
+            <a:ext cx="2606040" cy="54864"/>
+          </a:xfrm>
+          <a:prstGeom prst="rect">
+            <a:avLst/>
+          </a:prstGeom>
+          <a:solidFill>
+            <a:srgbClr val="7C3AED"/>
+          </a:solidFill>
+          <a:ln>
+            <a:noFill/>
+          </a:ln>
+        </p:spPr>
+        <p:style>
+          <a:lnRef idx="1">
+            <a:schemeClr val="accent1"/>
+          </a:lnRef>
+          <a:fillRef idx="3">
+            <a:schemeClr val="accent1"/>
+          </a:fillRef>
+          <a:effectRef idx="2">
+            <a:schemeClr val="accent1"/>
+          </a:effectRef>
+          <a:fontRef idx="minor">
+            <a:schemeClr val="lt1"/>
+          </a:fontRef>
+        </p:style>
+        <p:txBody>
+          <a:bodyPr rtlCol="0" anchor="ctr"/>
+          <a:lstStyle/>
+          <a:p>
+            <a:pPr algn="ctr"/>
+          </a:p>
+        </p:txBody>
+      </p:sp>
+      <p:sp>
+        <p:nvSpPr>
+          <p:cNvPr id="14" name="TextBox 13"/>
           <p:cNvSpPr txBox="1"/>
           <p:nvPr/>
         </p:nvSpPr>
@@ -18526,7 +20352,7 @@
       </p:sp>
       <p:sp>
         <p:nvSpPr>
-          <p:cNvPr id="12" name="TextBox 11"/>
+          <p:cNvPr id="15" name="TextBox 14"/>
           <p:cNvSpPr txBox="1"/>
           <p:nvPr/>
         </p:nvSpPr>
@@ -18555,22 +20381,22 @@
               </a:defRPr>
             </a:pPr>
             <a:r>
-              <a:t>原花青素 + Omega-3</a:t>
+              <a:t>君+使：降脂 + 抗氧化</a:t>
             </a:r>
             <a:br/>
             <a:r>
+              <a:t>原花青素清除自由基</a:t>
+            </a:r>
+            <a:br/>
+            <a:r>
               <a:t>双重保护血管弹性</a:t>
             </a:r>
-            <a:br/>
-            <a:r>
-              <a:t>预防动脉粥样硬化</a:t>
-            </a:r>
-          </a:p>
-        </p:txBody>
-      </p:sp>
-      <p:sp>
-        <p:nvSpPr>
-          <p:cNvPr id="13" name="Rounded Rectangle 12"/>
+          </a:p>
+        </p:txBody>
+      </p:sp>
+      <p:sp>
+        <p:nvSpPr>
+          <p:cNvPr id="16" name="Rounded Rectangle 15"/>
           <p:cNvSpPr/>
           <p:nvPr/>
         </p:nvSpPr>
@@ -18615,7 +20441,50 @@
       </p:sp>
       <p:sp>
         <p:nvSpPr>
-          <p:cNvPr id="14" name="TextBox 13"/>
+          <p:cNvPr id="17" name="Rectangle 16"/>
+          <p:cNvSpPr/>
+          <p:nvPr/>
+        </p:nvSpPr>
+        <p:spPr>
+          <a:xfrm>
+            <a:off x="6309359" y="3383280"/>
+            <a:ext cx="2606040" cy="54864"/>
+          </a:xfrm>
+          <a:prstGeom prst="rect">
+            <a:avLst/>
+          </a:prstGeom>
+          <a:solidFill>
+            <a:srgbClr val="059669"/>
+          </a:solidFill>
+          <a:ln>
+            <a:noFill/>
+          </a:ln>
+        </p:spPr>
+        <p:style>
+          <a:lnRef idx="1">
+            <a:schemeClr val="accent1"/>
+          </a:lnRef>
+          <a:fillRef idx="3">
+            <a:schemeClr val="accent1"/>
+          </a:fillRef>
+          <a:effectRef idx="2">
+            <a:schemeClr val="accent1"/>
+          </a:effectRef>
+          <a:fontRef idx="minor">
+            <a:schemeClr val="lt1"/>
+          </a:fontRef>
+        </p:style>
+        <p:txBody>
+          <a:bodyPr rtlCol="0" anchor="ctr"/>
+          <a:lstStyle/>
+          <a:p>
+            <a:pPr algn="ctr"/>
+          </a:p>
+        </p:txBody>
+      </p:sp>
+      <p:sp>
+        <p:nvSpPr>
+          <p:cNvPr id="18" name="TextBox 17"/>
           <p:cNvSpPr txBox="1"/>
           <p:nvPr/>
         </p:nvSpPr>
@@ -18651,7 +20520,7 @@
       </p:sp>
       <p:sp>
         <p:nvSpPr>
-          <p:cNvPr id="15" name="TextBox 14"/>
+          <p:cNvPr id="19" name="TextBox 18"/>
           <p:cNvSpPr txBox="1"/>
           <p:nvPr/>
         </p:nvSpPr>
@@ -18680,22 +20549,22 @@
               </a:defRPr>
             </a:pPr>
             <a:r>
-              <a:t>多种天然抗氧化成分</a:t>
+              <a:t>臣+佐+使：多成分协同</a:t>
             </a:r>
             <a:br/>
             <a:r>
-              <a:t>协同清除自由基</a:t>
+              <a:t>木酚素+多酚+原花青素</a:t>
             </a:r>
             <a:br/>
             <a:r>
-              <a:t>降低慢性炎症水平</a:t>
-            </a:r>
-          </a:p>
-        </p:txBody>
-      </p:sp>
-      <p:sp>
-        <p:nvSpPr>
-          <p:cNvPr id="16" name="Rounded Rectangle 15"/>
+              <a:t>全方位抗炎抗氧化</a:t>
+            </a:r>
+          </a:p>
+        </p:txBody>
+      </p:sp>
+      <p:sp>
+        <p:nvSpPr>
+          <p:cNvPr id="20" name="Rounded Rectangle 19"/>
           <p:cNvSpPr/>
           <p:nvPr/>
         </p:nvSpPr>
@@ -18740,7 +20609,50 @@
       </p:sp>
       <p:sp>
         <p:nvSpPr>
-          <p:cNvPr id="17" name="TextBox 16"/>
+          <p:cNvPr id="21" name="Rectangle 20"/>
+          <p:cNvSpPr/>
+          <p:nvPr/>
+        </p:nvSpPr>
+        <p:spPr>
+          <a:xfrm>
+            <a:off x="9098280" y="3383280"/>
+            <a:ext cx="2606040" cy="54864"/>
+          </a:xfrm>
+          <a:prstGeom prst="rect">
+            <a:avLst/>
+          </a:prstGeom>
+          <a:solidFill>
+            <a:srgbClr val="2569EB"/>
+          </a:solidFill>
+          <a:ln>
+            <a:noFill/>
+          </a:ln>
+        </p:spPr>
+        <p:style>
+          <a:lnRef idx="1">
+            <a:schemeClr val="accent1"/>
+          </a:lnRef>
+          <a:fillRef idx="3">
+            <a:schemeClr val="accent1"/>
+          </a:fillRef>
+          <a:effectRef idx="2">
+            <a:schemeClr val="accent1"/>
+          </a:effectRef>
+          <a:fontRef idx="minor">
+            <a:schemeClr val="lt1"/>
+          </a:fontRef>
+        </p:style>
+        <p:txBody>
+          <a:bodyPr rtlCol="0" anchor="ctr"/>
+          <a:lstStyle/>
+          <a:p>
+            <a:pPr algn="ctr"/>
+          </a:p>
+        </p:txBody>
+      </p:sp>
+      <p:sp>
+        <p:nvSpPr>
+          <p:cNvPr id="22" name="TextBox 21"/>
           <p:cNvSpPr txBox="1"/>
           <p:nvPr/>
         </p:nvSpPr>
@@ -18776,7 +20688,7 @@
       </p:sp>
       <p:sp>
         <p:nvSpPr>
-          <p:cNvPr id="18" name="TextBox 17"/>
+          <p:cNvPr id="23" name="TextBox 22"/>
           <p:cNvSpPr txBox="1"/>
           <p:nvPr/>
         </p:nvSpPr>
@@ -18805,11 +20717,11 @@
               </a:defRPr>
             </a:pPr>
             <a:r>
-              <a:t>改善胰岛素敏感度</a:t>
+              <a:t>四油协同：Omega-3/6/9</a:t>
             </a:r>
             <a:br/>
             <a:r>
-              <a:t>辅助调节血糖血脂</a:t>
+              <a:t>全谱覆盖脂肪酸需求</a:t>
             </a:r>
             <a:br/>
             <a:r>
@@ -18820,7 +20732,7 @@
       </p:sp>
       <p:sp>
         <p:nvSpPr>
-          <p:cNvPr id="19" name="TextBox 18"/>
+          <p:cNvPr id="24" name="TextBox 23"/>
           <p:cNvSpPr txBox="1"/>
           <p:nvPr/>
         </p:nvSpPr>
@@ -18849,7 +20761,7 @@
               </a:defRPr>
             </a:pPr>
             <a:r>
-              <a:t>9/18</a:t>
+              <a:t>9/19</a:t>
             </a:r>
           </a:p>
         </p:txBody>
